--- a/lecons/F1/22_F1_M3_FS02_What_to_Do_in_Case_of_an_Earthquake_or_a_Volcanic_Eruption.pptx
+++ b/lecons/F1/22_F1_M3_FS02_What_to_Do_in_Case_of_an_Earthquake_or_a_Volcanic_Eruption.pptx
@@ -56,9 +56,15 @@
     <p:sldId id="304" r:id="rId50"/>
     <p:sldId id="305" r:id="rId51"/>
     <p:sldId id="306" r:id="rId52"/>
+    <p:sldId id="307" r:id="rId53"/>
+    <p:sldId id="308" r:id="rId54"/>
+    <p:sldId id="309" r:id="rId55"/>
+    <p:sldId id="310" r:id="rId56"/>
+    <p:sldId id="311" r:id="rId57"/>
+    <p:sldId id="312" r:id="rId58"/>
   </p:sldIdLst>
   <p:notesMasterIdLst>
-    <p:notesMasterId r:id="rId53"/>
+    <p:notesMasterId r:id="rId59"/>
   </p:notesMasterIdLst>
   <p:sldSz cx="12192000" cy="6858000"/>
   <p:notesSz cx="6858000" cy="12192000"/>
@@ -640,7 +646,7 @@
           <a:p>
             <a:r>
               <a:rPr lang="en-US" dirty="0"/>
-              <a:t>Listen carefully to this situation from real life. The radio announces that Mount Cameroon may erupt soon. The people of Buea are worried and do not know what to do. Some want to stay, others want to leave immediately. Think about it, because I am going to ask you some questions.</a:t>
+              <a:t>Listen carefully to this situation from real life. The radio announces that Mount Cameroon may erupt soon. The people of Buea are worried: some want to stay, and others want to leave immediately. A mother asks: "What must my family do to stay safe?" Think about it, because I am going to ask you some questions.</a:t>
             </a:r>
             <a:endParaRPr lang="en-US" dirty="0"/>
           </a:p>
@@ -816,7 +822,7 @@
           <a:p>
             <a:r>
               <a:rPr lang="en-US" dirty="0"/>
-              <a:t>Good. The people do not know what to do before an eruption.</a:t>
+              <a:t>Good. The people of Buea do not know what to do before and during an eruption.</a:t>
             </a:r>
             <a:endParaRPr lang="en-US" dirty="0"/>
           </a:p>
@@ -1608,7 +1614,7 @@
           <a:p>
             <a:r>
               <a:rPr lang="en-US" dirty="0"/>
-              <a:t>Here is the question for Activity 1: What should you do inside a building during an earthquake? Take one minute to think and write your answer in your rough notebook.</a:t>
+              <a:t>Here is the question for Activity 1: Where should you hide inside a building when the ground shakes? Take one minute to think and write your answer in your rough notebook.</a:t>
             </a:r>
             <a:endParaRPr lang="en-US" dirty="0"/>
           </a:p>
@@ -1696,7 +1702,7 @@
           <a:p>
             <a:r>
               <a:rPr lang="en-US" dirty="0"/>
-              <a:t>Let us check the answer together. Drop, cover your head under a strong table and hold on; stay away from windows.</a:t>
+              <a:t>Let us check the answer together. Under a strong table, covering your head, away from windows.</a:t>
             </a:r>
             <a:endParaRPr lang="en-US" dirty="0"/>
           </a:p>
@@ -1872,7 +1878,7 @@
           <a:p>
             <a:r>
               <a:rPr lang="en-US" dirty="0"/>
-              <a:t>Here is the question for Activity 2: What should you do after an earthquake? Take one minute to think and write your answer in your rough notebook.</a:t>
+              <a:t>Here is the question for Activity 2: What should you do after the shaking stops? Take one minute to think and write your answer in your rough notebook.</a:t>
             </a:r>
             <a:endParaRPr lang="en-US" dirty="0"/>
           </a:p>
@@ -2136,7 +2142,7 @@
           <a:p>
             <a:r>
               <a:rPr lang="en-US" dirty="0"/>
-              <a:t>Here is the question for Activity 3: What should people do when a volcano erupts? Take one minute to think and write your answer in your rough notebook.</a:t>
+              <a:t>Here is the question for Activity 3: Why must people leave the valleys during an eruption? Take one minute to think and write your answer in your rough notebook.</a:t>
             </a:r>
             <a:endParaRPr lang="en-US" dirty="0"/>
           </a:p>
@@ -2224,7 +2230,7 @@
           <a:p>
             <a:r>
               <a:rPr lang="en-US" dirty="0"/>
-              <a:t>Let us check the answer together. Follow warnings, leave the area quickly, move away from lava paths and valleys, and cover the nose and mouth against ash.</a:t>
+              <a:t>Let us check the answer together. Lava and heavy gases flow down the valleys.</a:t>
             </a:r>
             <a:endParaRPr lang="en-US" dirty="0"/>
           </a:p>
@@ -2312,7 +2318,7 @@
           <a:p>
             <a:r>
               <a:rPr lang="en-US" dirty="0"/>
-              <a:t>Activity 4. Look carefully at this picture: a volcano monitoring station. Observe every detail before I ask the question.</a:t>
+              <a:t>Activity 4. Look carefully at this picture: scientists at work on a volcano. Observe every detail before I ask the question.</a:t>
             </a:r>
             <a:endParaRPr lang="en-US" dirty="0"/>
           </a:p>
@@ -3016,7 +3022,7 @@
           <a:p>
             <a:r>
               <a:rPr lang="en-US" dirty="0"/>
-              <a:t>Let us copy What to Do During an Earthquake. During an earthquake, we follow these rules. On this slide we have Inside and Outside. Write each point on a new line, with the key term first, and explain it in your own words when we revise. When you finish, we go to the next slide.</a:t>
+              <a:t>Let us copy the definitions. The key terms of this lesson are defined as follows. On this slide we have Evacuation and First aid. Write each point on a new line, with the key term first, and explain it in your own words when we revise.</a:t>
             </a:r>
             <a:endParaRPr lang="en-US" dirty="0"/>
           </a:p>
@@ -3104,7 +3110,7 @@
           <a:p>
             <a:r>
               <a:rPr lang="en-US" dirty="0"/>
-              <a:t>We continue with What to Do During an Earthquake. On this slide we have After. Write each point on a new line, with the key term first, and explain it in your own words when we revise.</a:t>
+              <a:t>Let us copy What to Do in Case of an Earthquake. In case of an earthquake, we follow these rules. Copy the point on Inside on the left, then draw the diagram on the right: damage after an earthquake. Give it a title and label it clearly.</a:t>
             </a:r>
             <a:endParaRPr lang="en-US" dirty="0"/>
           </a:p>
@@ -3192,7 +3198,7 @@
           <a:p>
             <a:r>
               <a:rPr lang="en-US" dirty="0"/>
-              <a:t>Let us copy What to Do During a Volcanic Eruption. During a volcanic eruption, we follow these rules. On this slide we have Warnings and Evacuation. Write each point on a new line, with the key term first, and explain it in your own words when we revise. When you finish, we go to the next slide.</a:t>
+              <a:t>We continue with What to Do in Case of an Earthquake. On this slide we have Outside. Write each point on a new line, with the key term first, and explain it in your own words when we revise.</a:t>
             </a:r>
             <a:endParaRPr lang="en-US" dirty="0"/>
           </a:p>
@@ -3280,7 +3286,7 @@
           <a:p>
             <a:r>
               <a:rPr lang="en-US" dirty="0"/>
-              <a:t>We continue with What to Do During a Volcanic Eruption. On this slide we have Protection. Write each point on a new line, with the key term first, and explain it in your own words when we revise.</a:t>
+              <a:t>Copy the point on After on the left, then draw the diagram on the right: rescue workers. Give it a title and label it clearly.</a:t>
             </a:r>
             <a:endParaRPr lang="en-US" dirty="0"/>
           </a:p>
@@ -3368,7 +3374,7 @@
           <a:p>
             <a:r>
               <a:rPr lang="en-US" dirty="0"/>
-              <a:t>Let us copy Adaptation and Mitigation Measures. The following measures reduce the dangers. On this slide we have Monitoring and Strong buildings. Write each point on a new line, with the key term first, and explain it in your own words when we revise. When you finish, we go to the next slide.</a:t>
+              <a:t>We continue with What to Do in Case of an Earthquake. On this slide we have Tsunami warning. Write each point on a new line, with the key term first, and explain it in your own words when we revise.</a:t>
             </a:r>
             <a:endParaRPr lang="en-US" dirty="0"/>
           </a:p>
@@ -3544,7 +3550,7 @@
           <a:p>
             <a:r>
               <a:rPr lang="en-US" dirty="0"/>
-              <a:t>We continue with Adaptation and Mitigation Measures. On this slide we have Education. Write each point on a new line, with the key term first, and explain it in your own words when we revise.</a:t>
+              <a:t>Let us copy What to Do in Case of a Volcanic Eruption. In case of a volcanic eruption, we follow these rules. On this slide we have Warnings. Write each point on a new line, with the key term first, and explain it in your own words when we revise.</a:t>
             </a:r>
             <a:endParaRPr lang="en-US" dirty="0"/>
           </a:p>
@@ -3632,7 +3638,7 @@
           <a:p>
             <a:r>
               <a:rPr lang="en-US" dirty="0"/>
-              <a:t>Now let us check what you have understood. Question 1: Give two rules during an earthquake. Answer in your exercise book.</a:t>
+              <a:t>Copy the point on Evacuation on the left, then draw the diagram on the right: a volcanic eruption. Give it a title and label it clearly.</a:t>
             </a:r>
             <a:endParaRPr lang="en-US" dirty="0"/>
           </a:p>
@@ -3720,7 +3726,7 @@
           <a:p>
             <a:r>
               <a:rPr lang="en-US" dirty="0"/>
-              <a:t>The expected answer is: drop, cover and hold on; stay away from windows. If you got it right, well done.</a:t>
+              <a:t>We continue with What to Do in Case of a Volcanic Eruption. On this slide we have Protection and Emergency bag. Write each point on a new line, with the key term first, and explain it in your own words when we revise.</a:t>
             </a:r>
             <a:endParaRPr lang="en-US" dirty="0"/>
           </a:p>
@@ -3808,7 +3814,7 @@
           <a:p>
             <a:r>
               <a:rPr lang="en-US" dirty="0"/>
-              <a:t>Now let us check what you have understood. Question 2: Give two rules during a volcanic eruption. Answer in your exercise book.</a:t>
+              <a:t>Let us copy Adaptation and Mitigation Measures. The following measures reduce the dangers. Copy the point on Monitoring on the left, then draw the diagram on the right: volcano monitoring. Give it a title and label it clearly.</a:t>
             </a:r>
             <a:endParaRPr lang="en-US" dirty="0"/>
           </a:p>
@@ -3896,7 +3902,7 @@
           <a:p>
             <a:r>
               <a:rPr lang="en-US" dirty="0"/>
-              <a:t>The expected answer is: obey warnings and leave the area away from lava paths. If you got it right, well done.</a:t>
+              <a:t>We continue with Adaptation and Mitigation Measures. On this slide we have Strong buildings and Land-use planning. Write each point on a new line, with the key term first, and explain it in your own words when we revise.</a:t>
             </a:r>
             <a:endParaRPr lang="en-US" dirty="0"/>
           </a:p>
@@ -3984,7 +3990,7 @@
           <a:p>
             <a:r>
               <a:rPr lang="en-US" dirty="0"/>
-              <a:t>For those who need more practice, fill in the blanks in your exercise book. The answers are: number 1, hold; number 2, evacuation; number 3, warnings.</a:t>
+              <a:t>Copy the point on Degassing on the left, then draw the diagram on the right: lake Nyos. Give it a title and label it clearly.</a:t>
             </a:r>
             <a:endParaRPr lang="en-US" dirty="0"/>
           </a:p>
@@ -4072,7 +4078,7 @@
           <a:p>
             <a:r>
               <a:rPr lang="en-US" dirty="0"/>
-              <a:t>For your homework: Prepare a list of five items to take in an emergency bag. We shall correct it at the beginning of our next lesson.</a:t>
+              <a:t>We continue with Adaptation and Mitigation Measures. On this slide we have Education. Write each point on a new line, with the key term first, and explain it in your own words when we revise.</a:t>
             </a:r>
             <a:endParaRPr lang="en-US" dirty="0"/>
           </a:p>
@@ -4160,7 +4166,7 @@
           <a:p>
             <a:r>
               <a:rPr lang="en-US" dirty="0"/>
-              <a:t>Let us play the bilingual game. I say a word in English, and you give me the French word. Then we do the reverse.</a:t>
+              <a:t>Now let us check what you have understood. Question 1: Give two rules during an earthquake. Answer in your exercise book.</a:t>
             </a:r>
             <a:endParaRPr lang="en-US" dirty="0"/>
           </a:p>
@@ -4248,7 +4254,7 @@
           <a:p>
             <a:r>
               <a:rPr lang="en-US" dirty="0"/>
-              <a:t>I record this information in the official logbook of the class after the lesson.</a:t>
+              <a:t>The expected answer is: drop, cover and hold on; stay away from windows. If you got it right, well done.</a:t>
             </a:r>
             <a:endParaRPr lang="en-US" dirty="0"/>
           </a:p>
@@ -4336,7 +4342,7 @@
           <a:p>
             <a:r>
               <a:rPr lang="en-US" dirty="0"/>
-              <a:t>I complete the second page of the logbook: the matter taught, the evaluation, the homework and the attendance.</a:t>
+              <a:t>Now let us check what you have understood. Question 2: Give two rules during a volcanic eruption. Answer in your exercise book.</a:t>
             </a:r>
             <a:endParaRPr lang="en-US" dirty="0"/>
           </a:p>
@@ -4512,7 +4518,7 @@
           <a:p>
             <a:r>
               <a:rPr lang="en-US" dirty="0"/>
-              <a:t>This slide is for me, the teacher: it gives the timing of the lesson and what to do if the projector is not available.</a:t>
+              <a:t>The expected answer is: obey warnings and leave the area away from lava paths. If you got it right, well done.</a:t>
             </a:r>
             <a:endParaRPr lang="en-US" dirty="0"/>
           </a:p>
@@ -4600,7 +4606,7 @@
           <a:p>
             <a:r>
               <a:rPr lang="en-US" dirty="0"/>
-              <a:t>These are the references and picture credits used to prepare this lesson.</a:t>
+              <a:t>For those who need more practice, fill in the blanks in your exercise book. The answers are: number 1, hold; number 2, evacuation; number 3, warnings.</a:t>
             </a:r>
             <a:endParaRPr lang="en-US" dirty="0"/>
           </a:p>
@@ -4624,6 +4630,534 @@
             <a:fld id="{F7021451-1387-4CA6-816F-3879F97B5CBC}" type="slidenum">
               <a:rPr lang="en-US"/>
               <a:t>51</a:t>
+            </a:fld>
+            <a:endParaRPr lang="en-US"/>
+          </a:p>
+        </p:txBody>
+      </p:sp>
+    </p:spTree>
+    <p:extLst>
+      <p:ext uri="{BB962C8B-B14F-4D97-AF65-F5344CB8AC3E}">
+        <p14:creationId xmlns:p14="http://schemas.microsoft.com/office/powerpoint/2010/main" val="1024086991"/>
+      </p:ext>
+    </p:extLst>
+  </p:cSld>
+  <p:clrMapOvr>
+    <a:masterClrMapping/>
+  </p:clrMapOvr>
+</p:notes>
+</file>
+
+<file path=ppt/notesSlides/notesSlide52.xml><?xml version="1.0" encoding="utf-8"?>
+<p:notes xmlns:a="http://schemas.openxmlformats.org/drawingml/2006/main" xmlns:r="http://schemas.openxmlformats.org/officeDocument/2006/relationships" xmlns:p="http://schemas.openxmlformats.org/presentationml/2006/main">
+  <p:cSld>
+    <p:spTree>
+      <p:nvGrpSpPr>
+        <p:cNvPr id="1" name=""/>
+        <p:cNvGrpSpPr/>
+        <p:nvPr/>
+      </p:nvGrpSpPr>
+      <p:grpSpPr>
+        <a:xfrm>
+          <a:off x="0" y="0"/>
+          <a:ext cx="0" cy="0"/>
+          <a:chOff x="0" y="0"/>
+          <a:chExt cx="0" cy="0"/>
+        </a:xfrm>
+      </p:grpSpPr>
+      <p:sp>
+        <p:nvSpPr>
+          <p:cNvPr id="2" name="Slide Image Placeholder 1"/>
+          <p:cNvSpPr>
+            <a:spLocks noGrp="1" noRot="1" noChangeAspect="1"/>
+          </p:cNvSpPr>
+          <p:nvPr>
+            <p:ph type="sldImg"/>
+          </p:nvPr>
+        </p:nvSpPr>
+        <p:spPr/>
+      </p:sp>
+      <p:sp>
+        <p:nvSpPr>
+          <p:cNvPr id="3" name="Notes Placeholder 2"/>
+          <p:cNvSpPr>
+            <a:spLocks noGrp="1"/>
+          </p:cNvSpPr>
+          <p:nvPr>
+            <p:ph type="body" idx="1"/>
+          </p:nvPr>
+        </p:nvSpPr>
+        <p:spPr/>
+        <p:txBody>
+          <a:bodyPr/>
+          <a:lstStyle/>
+          <a:p>
+            <a:r>
+              <a:rPr lang="en-US" dirty="0"/>
+              <a:t>For your homework: Prepare a list of five items to take in an emergency bag. We shall correct it at the beginning of our next lesson.</a:t>
+            </a:r>
+            <a:endParaRPr lang="en-US" dirty="0"/>
+          </a:p>
+        </p:txBody>
+      </p:sp>
+      <p:sp>
+        <p:nvSpPr>
+          <p:cNvPr id="4" name="Slide Number Placeholder 3"/>
+          <p:cNvSpPr>
+            <a:spLocks noGrp="1"/>
+          </p:cNvSpPr>
+          <p:nvPr>
+            <p:ph type="sldNum" sz="quarter" idx="10"/>
+          </p:nvPr>
+        </p:nvSpPr>
+        <p:spPr/>
+        <p:txBody>
+          <a:bodyPr/>
+          <a:lstStyle/>
+          <a:p>
+            <a:fld id="{F7021451-1387-4CA6-816F-3879F97B5CBC}" type="slidenum">
+              <a:rPr lang="en-US"/>
+              <a:t>52</a:t>
+            </a:fld>
+            <a:endParaRPr lang="en-US"/>
+          </a:p>
+        </p:txBody>
+      </p:sp>
+    </p:spTree>
+    <p:extLst>
+      <p:ext uri="{BB962C8B-B14F-4D97-AF65-F5344CB8AC3E}">
+        <p14:creationId xmlns:p14="http://schemas.microsoft.com/office/powerpoint/2010/main" val="1024086991"/>
+      </p:ext>
+    </p:extLst>
+  </p:cSld>
+  <p:clrMapOvr>
+    <a:masterClrMapping/>
+  </p:clrMapOvr>
+</p:notes>
+</file>
+
+<file path=ppt/notesSlides/notesSlide53.xml><?xml version="1.0" encoding="utf-8"?>
+<p:notes xmlns:a="http://schemas.openxmlformats.org/drawingml/2006/main" xmlns:r="http://schemas.openxmlformats.org/officeDocument/2006/relationships" xmlns:p="http://schemas.openxmlformats.org/presentationml/2006/main">
+  <p:cSld>
+    <p:spTree>
+      <p:nvGrpSpPr>
+        <p:cNvPr id="1" name=""/>
+        <p:cNvGrpSpPr/>
+        <p:nvPr/>
+      </p:nvGrpSpPr>
+      <p:grpSpPr>
+        <a:xfrm>
+          <a:off x="0" y="0"/>
+          <a:ext cx="0" cy="0"/>
+          <a:chOff x="0" y="0"/>
+          <a:chExt cx="0" cy="0"/>
+        </a:xfrm>
+      </p:grpSpPr>
+      <p:sp>
+        <p:nvSpPr>
+          <p:cNvPr id="2" name="Slide Image Placeholder 1"/>
+          <p:cNvSpPr>
+            <a:spLocks noGrp="1" noRot="1" noChangeAspect="1"/>
+          </p:cNvSpPr>
+          <p:nvPr>
+            <p:ph type="sldImg"/>
+          </p:nvPr>
+        </p:nvSpPr>
+        <p:spPr/>
+      </p:sp>
+      <p:sp>
+        <p:nvSpPr>
+          <p:cNvPr id="3" name="Notes Placeholder 2"/>
+          <p:cNvSpPr>
+            <a:spLocks noGrp="1"/>
+          </p:cNvSpPr>
+          <p:nvPr>
+            <p:ph type="body" idx="1"/>
+          </p:nvPr>
+        </p:nvSpPr>
+        <p:spPr/>
+        <p:txBody>
+          <a:bodyPr/>
+          <a:lstStyle/>
+          <a:p>
+            <a:r>
+              <a:rPr lang="en-US" dirty="0"/>
+              <a:t>Let us play the bilingual game. I say a word in English, and you give me the French word. Then we do the reverse.</a:t>
+            </a:r>
+            <a:endParaRPr lang="en-US" dirty="0"/>
+          </a:p>
+        </p:txBody>
+      </p:sp>
+      <p:sp>
+        <p:nvSpPr>
+          <p:cNvPr id="4" name="Slide Number Placeholder 3"/>
+          <p:cNvSpPr>
+            <a:spLocks noGrp="1"/>
+          </p:cNvSpPr>
+          <p:nvPr>
+            <p:ph type="sldNum" sz="quarter" idx="10"/>
+          </p:nvPr>
+        </p:nvSpPr>
+        <p:spPr/>
+        <p:txBody>
+          <a:bodyPr/>
+          <a:lstStyle/>
+          <a:p>
+            <a:fld id="{F7021451-1387-4CA6-816F-3879F97B5CBC}" type="slidenum">
+              <a:rPr lang="en-US"/>
+              <a:t>53</a:t>
+            </a:fld>
+            <a:endParaRPr lang="en-US"/>
+          </a:p>
+        </p:txBody>
+      </p:sp>
+    </p:spTree>
+    <p:extLst>
+      <p:ext uri="{BB962C8B-B14F-4D97-AF65-F5344CB8AC3E}">
+        <p14:creationId xmlns:p14="http://schemas.microsoft.com/office/powerpoint/2010/main" val="1024086991"/>
+      </p:ext>
+    </p:extLst>
+  </p:cSld>
+  <p:clrMapOvr>
+    <a:masterClrMapping/>
+  </p:clrMapOvr>
+</p:notes>
+</file>
+
+<file path=ppt/notesSlides/notesSlide54.xml><?xml version="1.0" encoding="utf-8"?>
+<p:notes xmlns:a="http://schemas.openxmlformats.org/drawingml/2006/main" xmlns:r="http://schemas.openxmlformats.org/officeDocument/2006/relationships" xmlns:p="http://schemas.openxmlformats.org/presentationml/2006/main">
+  <p:cSld>
+    <p:spTree>
+      <p:nvGrpSpPr>
+        <p:cNvPr id="1" name=""/>
+        <p:cNvGrpSpPr/>
+        <p:nvPr/>
+      </p:nvGrpSpPr>
+      <p:grpSpPr>
+        <a:xfrm>
+          <a:off x="0" y="0"/>
+          <a:ext cx="0" cy="0"/>
+          <a:chOff x="0" y="0"/>
+          <a:chExt cx="0" cy="0"/>
+        </a:xfrm>
+      </p:grpSpPr>
+      <p:sp>
+        <p:nvSpPr>
+          <p:cNvPr id="2" name="Slide Image Placeholder 1"/>
+          <p:cNvSpPr>
+            <a:spLocks noGrp="1" noRot="1" noChangeAspect="1"/>
+          </p:cNvSpPr>
+          <p:nvPr>
+            <p:ph type="sldImg"/>
+          </p:nvPr>
+        </p:nvSpPr>
+        <p:spPr/>
+      </p:sp>
+      <p:sp>
+        <p:nvSpPr>
+          <p:cNvPr id="3" name="Notes Placeholder 2"/>
+          <p:cNvSpPr>
+            <a:spLocks noGrp="1"/>
+          </p:cNvSpPr>
+          <p:nvPr>
+            <p:ph type="body" idx="1"/>
+          </p:nvPr>
+        </p:nvSpPr>
+        <p:spPr/>
+        <p:txBody>
+          <a:bodyPr/>
+          <a:lstStyle/>
+          <a:p>
+            <a:r>
+              <a:rPr lang="en-US" dirty="0"/>
+              <a:t>I record this information in the official logbook of the class after the lesson.</a:t>
+            </a:r>
+            <a:endParaRPr lang="en-US" dirty="0"/>
+          </a:p>
+        </p:txBody>
+      </p:sp>
+      <p:sp>
+        <p:nvSpPr>
+          <p:cNvPr id="4" name="Slide Number Placeholder 3"/>
+          <p:cNvSpPr>
+            <a:spLocks noGrp="1"/>
+          </p:cNvSpPr>
+          <p:nvPr>
+            <p:ph type="sldNum" sz="quarter" idx="10"/>
+          </p:nvPr>
+        </p:nvSpPr>
+        <p:spPr/>
+        <p:txBody>
+          <a:bodyPr/>
+          <a:lstStyle/>
+          <a:p>
+            <a:fld id="{F7021451-1387-4CA6-816F-3879F97B5CBC}" type="slidenum">
+              <a:rPr lang="en-US"/>
+              <a:t>54</a:t>
+            </a:fld>
+            <a:endParaRPr lang="en-US"/>
+          </a:p>
+        </p:txBody>
+      </p:sp>
+    </p:spTree>
+    <p:extLst>
+      <p:ext uri="{BB962C8B-B14F-4D97-AF65-F5344CB8AC3E}">
+        <p14:creationId xmlns:p14="http://schemas.microsoft.com/office/powerpoint/2010/main" val="1024086991"/>
+      </p:ext>
+    </p:extLst>
+  </p:cSld>
+  <p:clrMapOvr>
+    <a:masterClrMapping/>
+  </p:clrMapOvr>
+</p:notes>
+</file>
+
+<file path=ppt/notesSlides/notesSlide55.xml><?xml version="1.0" encoding="utf-8"?>
+<p:notes xmlns:a="http://schemas.openxmlformats.org/drawingml/2006/main" xmlns:r="http://schemas.openxmlformats.org/officeDocument/2006/relationships" xmlns:p="http://schemas.openxmlformats.org/presentationml/2006/main">
+  <p:cSld>
+    <p:spTree>
+      <p:nvGrpSpPr>
+        <p:cNvPr id="1" name=""/>
+        <p:cNvGrpSpPr/>
+        <p:nvPr/>
+      </p:nvGrpSpPr>
+      <p:grpSpPr>
+        <a:xfrm>
+          <a:off x="0" y="0"/>
+          <a:ext cx="0" cy="0"/>
+          <a:chOff x="0" y="0"/>
+          <a:chExt cx="0" cy="0"/>
+        </a:xfrm>
+      </p:grpSpPr>
+      <p:sp>
+        <p:nvSpPr>
+          <p:cNvPr id="2" name="Slide Image Placeholder 1"/>
+          <p:cNvSpPr>
+            <a:spLocks noGrp="1" noRot="1" noChangeAspect="1"/>
+          </p:cNvSpPr>
+          <p:nvPr>
+            <p:ph type="sldImg"/>
+          </p:nvPr>
+        </p:nvSpPr>
+        <p:spPr/>
+      </p:sp>
+      <p:sp>
+        <p:nvSpPr>
+          <p:cNvPr id="3" name="Notes Placeholder 2"/>
+          <p:cNvSpPr>
+            <a:spLocks noGrp="1"/>
+          </p:cNvSpPr>
+          <p:nvPr>
+            <p:ph type="body" idx="1"/>
+          </p:nvPr>
+        </p:nvSpPr>
+        <p:spPr/>
+        <p:txBody>
+          <a:bodyPr/>
+          <a:lstStyle/>
+          <a:p>
+            <a:r>
+              <a:rPr lang="en-US" dirty="0"/>
+              <a:t>I complete the second page of the logbook: the matter taught, the evaluation, the homework and the attendance.</a:t>
+            </a:r>
+            <a:endParaRPr lang="en-US" dirty="0"/>
+          </a:p>
+        </p:txBody>
+      </p:sp>
+      <p:sp>
+        <p:nvSpPr>
+          <p:cNvPr id="4" name="Slide Number Placeholder 3"/>
+          <p:cNvSpPr>
+            <a:spLocks noGrp="1"/>
+          </p:cNvSpPr>
+          <p:nvPr>
+            <p:ph type="sldNum" sz="quarter" idx="10"/>
+          </p:nvPr>
+        </p:nvSpPr>
+        <p:spPr/>
+        <p:txBody>
+          <a:bodyPr/>
+          <a:lstStyle/>
+          <a:p>
+            <a:fld id="{F7021451-1387-4CA6-816F-3879F97B5CBC}" type="slidenum">
+              <a:rPr lang="en-US"/>
+              <a:t>55</a:t>
+            </a:fld>
+            <a:endParaRPr lang="en-US"/>
+          </a:p>
+        </p:txBody>
+      </p:sp>
+    </p:spTree>
+    <p:extLst>
+      <p:ext uri="{BB962C8B-B14F-4D97-AF65-F5344CB8AC3E}">
+        <p14:creationId xmlns:p14="http://schemas.microsoft.com/office/powerpoint/2010/main" val="1024086991"/>
+      </p:ext>
+    </p:extLst>
+  </p:cSld>
+  <p:clrMapOvr>
+    <a:masterClrMapping/>
+  </p:clrMapOvr>
+</p:notes>
+</file>
+
+<file path=ppt/notesSlides/notesSlide56.xml><?xml version="1.0" encoding="utf-8"?>
+<p:notes xmlns:a="http://schemas.openxmlformats.org/drawingml/2006/main" xmlns:r="http://schemas.openxmlformats.org/officeDocument/2006/relationships" xmlns:p="http://schemas.openxmlformats.org/presentationml/2006/main">
+  <p:cSld>
+    <p:spTree>
+      <p:nvGrpSpPr>
+        <p:cNvPr id="1" name=""/>
+        <p:cNvGrpSpPr/>
+        <p:nvPr/>
+      </p:nvGrpSpPr>
+      <p:grpSpPr>
+        <a:xfrm>
+          <a:off x="0" y="0"/>
+          <a:ext cx="0" cy="0"/>
+          <a:chOff x="0" y="0"/>
+          <a:chExt cx="0" cy="0"/>
+        </a:xfrm>
+      </p:grpSpPr>
+      <p:sp>
+        <p:nvSpPr>
+          <p:cNvPr id="2" name="Slide Image Placeholder 1"/>
+          <p:cNvSpPr>
+            <a:spLocks noGrp="1" noRot="1" noChangeAspect="1"/>
+          </p:cNvSpPr>
+          <p:nvPr>
+            <p:ph type="sldImg"/>
+          </p:nvPr>
+        </p:nvSpPr>
+        <p:spPr/>
+      </p:sp>
+      <p:sp>
+        <p:nvSpPr>
+          <p:cNvPr id="3" name="Notes Placeholder 2"/>
+          <p:cNvSpPr>
+            <a:spLocks noGrp="1"/>
+          </p:cNvSpPr>
+          <p:nvPr>
+            <p:ph type="body" idx="1"/>
+          </p:nvPr>
+        </p:nvSpPr>
+        <p:spPr/>
+        <p:txBody>
+          <a:bodyPr/>
+          <a:lstStyle/>
+          <a:p>
+            <a:r>
+              <a:rPr lang="en-US" dirty="0"/>
+              <a:t>This slide is for me, the teacher: it gives the timing of the lesson and what to do if the projector is not available.</a:t>
+            </a:r>
+            <a:endParaRPr lang="en-US" dirty="0"/>
+          </a:p>
+        </p:txBody>
+      </p:sp>
+      <p:sp>
+        <p:nvSpPr>
+          <p:cNvPr id="4" name="Slide Number Placeholder 3"/>
+          <p:cNvSpPr>
+            <a:spLocks noGrp="1"/>
+          </p:cNvSpPr>
+          <p:nvPr>
+            <p:ph type="sldNum" sz="quarter" idx="10"/>
+          </p:nvPr>
+        </p:nvSpPr>
+        <p:spPr/>
+        <p:txBody>
+          <a:bodyPr/>
+          <a:lstStyle/>
+          <a:p>
+            <a:fld id="{F7021451-1387-4CA6-816F-3879F97B5CBC}" type="slidenum">
+              <a:rPr lang="en-US"/>
+              <a:t>56</a:t>
+            </a:fld>
+            <a:endParaRPr lang="en-US"/>
+          </a:p>
+        </p:txBody>
+      </p:sp>
+    </p:spTree>
+    <p:extLst>
+      <p:ext uri="{BB962C8B-B14F-4D97-AF65-F5344CB8AC3E}">
+        <p14:creationId xmlns:p14="http://schemas.microsoft.com/office/powerpoint/2010/main" val="1024086991"/>
+      </p:ext>
+    </p:extLst>
+  </p:cSld>
+  <p:clrMapOvr>
+    <a:masterClrMapping/>
+  </p:clrMapOvr>
+</p:notes>
+</file>
+
+<file path=ppt/notesSlides/notesSlide57.xml><?xml version="1.0" encoding="utf-8"?>
+<p:notes xmlns:a="http://schemas.openxmlformats.org/drawingml/2006/main" xmlns:r="http://schemas.openxmlformats.org/officeDocument/2006/relationships" xmlns:p="http://schemas.openxmlformats.org/presentationml/2006/main">
+  <p:cSld>
+    <p:spTree>
+      <p:nvGrpSpPr>
+        <p:cNvPr id="1" name=""/>
+        <p:cNvGrpSpPr/>
+        <p:nvPr/>
+      </p:nvGrpSpPr>
+      <p:grpSpPr>
+        <a:xfrm>
+          <a:off x="0" y="0"/>
+          <a:ext cx="0" cy="0"/>
+          <a:chOff x="0" y="0"/>
+          <a:chExt cx="0" cy="0"/>
+        </a:xfrm>
+      </p:grpSpPr>
+      <p:sp>
+        <p:nvSpPr>
+          <p:cNvPr id="2" name="Slide Image Placeholder 1"/>
+          <p:cNvSpPr>
+            <a:spLocks noGrp="1" noRot="1" noChangeAspect="1"/>
+          </p:cNvSpPr>
+          <p:nvPr>
+            <p:ph type="sldImg"/>
+          </p:nvPr>
+        </p:nvSpPr>
+        <p:spPr/>
+      </p:sp>
+      <p:sp>
+        <p:nvSpPr>
+          <p:cNvPr id="3" name="Notes Placeholder 2"/>
+          <p:cNvSpPr>
+            <a:spLocks noGrp="1"/>
+          </p:cNvSpPr>
+          <p:nvPr>
+            <p:ph type="body" idx="1"/>
+          </p:nvPr>
+        </p:nvSpPr>
+        <p:spPr/>
+        <p:txBody>
+          <a:bodyPr/>
+          <a:lstStyle/>
+          <a:p>
+            <a:r>
+              <a:rPr lang="en-US" dirty="0"/>
+              <a:t>These are the references and picture credits used to prepare this lesson.</a:t>
+            </a:r>
+            <a:endParaRPr lang="en-US" dirty="0"/>
+          </a:p>
+        </p:txBody>
+      </p:sp>
+      <p:sp>
+        <p:nvSpPr>
+          <p:cNvPr id="4" name="Slide Number Placeholder 3"/>
+          <p:cNvSpPr>
+            <a:spLocks noGrp="1"/>
+          </p:cNvSpPr>
+          <p:nvPr>
+            <p:ph type="sldNum" sz="quarter" idx="10"/>
+          </p:nvPr>
+        </p:nvSpPr>
+        <p:spPr/>
+        <p:txBody>
+          <a:bodyPr/>
+          <a:lstStyle/>
+          <a:p>
+            <a:fld id="{F7021451-1387-4CA6-816F-3879F97B5CBC}" type="slidenum">
+              <a:rPr lang="en-US"/>
+              <a:t>57</a:t>
             </a:fld>
             <a:endParaRPr lang="en-US"/>
           </a:p>
@@ -6332,7 +6866,7 @@
         <p:spPr>
           <a:xfrm>
             <a:off x="0" y="658368"/>
-            <a:ext cx="5120640" cy="5833872"/>
+            <a:ext cx="3840480" cy="5833872"/>
           </a:xfrm>
           <a:prstGeom prst="rect">
             <a:avLst/>
@@ -6347,8 +6881,8 @@
         </p:nvSpPr>
         <p:spPr>
           <a:xfrm>
-            <a:off x="5349240" y="1005840"/>
-            <a:ext cx="6522415" cy="731520"/>
+            <a:off x="4069080" y="1005840"/>
+            <a:ext cx="7802575" cy="731520"/>
           </a:xfrm>
           <a:prstGeom prst="rect">
             <a:avLst/>
@@ -6388,8 +6922,8 @@
         </p:nvSpPr>
         <p:spPr>
           <a:xfrm>
-            <a:off x="5349240" y="1783080"/>
-            <a:ext cx="6522415" cy="4663440"/>
+            <a:off x="4069080" y="1783080"/>
+            <a:ext cx="7802575" cy="4663440"/>
           </a:xfrm>
           <a:prstGeom prst="rect">
             <a:avLst/>
@@ -6416,7 +6950,7 @@
                 <a:ea typeface="Times New Roman" pitchFamily="34" charset="-122"/>
                 <a:cs typeface="Times New Roman" pitchFamily="34" charset="-120"/>
               </a:rPr>
-              <a:t>The radio announces that Mount Cameroon may erupt soon. The people of Buea are worried and do not know what to do. Some want to stay, others want to leave immediately.</a:t>
+              <a:t>The radio announces that Mount Cameroon may erupt soon. The people of Buea are worried: some want to stay, and others want to leave immediately. A mother asks: "What must my family do to stay safe?"</a:t>
             </a:r>
             <a:endParaRPr lang="en-US" sz="4000" dirty="0"/>
           </a:p>
@@ -6854,7 +7388,7 @@
                 <a:ea typeface="Times New Roman" pitchFamily="34" charset="-122"/>
                 <a:cs typeface="Times New Roman" pitchFamily="34" charset="-120"/>
               </a:rPr>
-              <a:t>The people do not know what to do before an eruption.</a:t>
+              <a:t>The people of Buea do not know what to do before and during an eruption.</a:t>
             </a:r>
             <a:endParaRPr lang="en-US" sz="4000" dirty="0"/>
           </a:p>
@@ -9196,7 +9730,7 @@
                 <a:ea typeface="Times New Roman" pitchFamily="34" charset="-122"/>
                 <a:cs typeface="Times New Roman" pitchFamily="34" charset="-120"/>
               </a:rPr>
-              <a:t>What should you do inside a building during an earthquake?</a:t>
+              <a:t>Where should you hide inside a building when the ground shakes?</a:t>
             </a:r>
             <a:endParaRPr lang="en-US" sz="4000" dirty="0"/>
           </a:p>
@@ -9415,7 +9949,7 @@
                 <a:ea typeface="Times New Roman" pitchFamily="34" charset="-122"/>
                 <a:cs typeface="Times New Roman" pitchFamily="34" charset="-120"/>
               </a:rPr>
-              <a:t>Drop, cover your head under a strong table and hold on; stay away from windows.</a:t>
+              <a:t>Under a strong table, covering your head, away from windows.</a:t>
             </a:r>
             <a:endParaRPr lang="en-US" sz="4000" dirty="0"/>
           </a:p>
@@ -9848,7 +10382,7 @@
                 <a:ea typeface="Times New Roman" pitchFamily="34" charset="-122"/>
                 <a:cs typeface="Times New Roman" pitchFamily="34" charset="-120"/>
               </a:rPr>
-              <a:t>What should you do after an earthquake?</a:t>
+              <a:t>What should you do after the shaking stops?</a:t>
             </a:r>
             <a:endParaRPr lang="en-US" sz="4000" dirty="0"/>
           </a:p>
@@ -10500,7 +11034,7 @@
                 <a:ea typeface="Times New Roman" pitchFamily="34" charset="-122"/>
                 <a:cs typeface="Times New Roman" pitchFamily="34" charset="-120"/>
               </a:rPr>
-              <a:t>What should people do when a volcano erupts?</a:t>
+              <a:t>Why must people leave the valleys during an eruption?</a:t>
             </a:r>
             <a:endParaRPr lang="en-US" sz="4000" dirty="0"/>
           </a:p>
@@ -10719,7 +11253,7 @@
                 <a:ea typeface="Times New Roman" pitchFamily="34" charset="-122"/>
                 <a:cs typeface="Times New Roman" pitchFamily="34" charset="-120"/>
               </a:rPr>
-              <a:t>Follow warnings, leave the area quickly, move away from lava paths and valleys, and cover the nose and mouth against ash.</a:t>
+              <a:t>Lava and heavy gases flow down the valleys.</a:t>
             </a:r>
             <a:endParaRPr lang="en-US" sz="4000" dirty="0"/>
           </a:p>
@@ -10933,7 +11467,7 @@
                 <a:ea typeface="Times New Roman" pitchFamily="34" charset="-122"/>
                 <a:cs typeface="Times New Roman" pitchFamily="34" charset="-120"/>
               </a:rPr>
-              <a:t>A volcano monitoring station.</a:t>
+              <a:t>Scientists at work on a volcano.</a:t>
             </a:r>
             <a:endParaRPr lang="en-US" sz="1800" dirty="0"/>
           </a:p>
@@ -11973,7 +12507,7 @@
                           <a:ea typeface="Calibri" pitchFamily="34" charset="-122"/>
                           <a:cs typeface="Calibri" pitchFamily="34" charset="-120"/>
                         </a:rPr>
-                        <a:t>What to do in case of an earthquake or a volcanic eruption; adaptation and mitigation measures.</a:t>
+                        <a:t>What to do in case of an earthquake or a volcanic eruption, and what adaptation and mitigation measures to take.</a:t>
                       </a:r>
                       <a:endParaRPr lang="en-US" sz="1700" dirty="0">
                         <a:latin typeface="Calibri" charset="0"/>
@@ -13426,7 +13960,7 @@
         <p:spPr>
           <a:xfrm>
             <a:off x="0" y="658368"/>
-            <a:ext cx="3840480" cy="5833872"/>
+            <a:ext cx="2468880" cy="5833872"/>
           </a:xfrm>
           <a:prstGeom prst="rect">
             <a:avLst/>
@@ -13441,8 +13975,8 @@
         </p:nvSpPr>
         <p:spPr>
           <a:xfrm>
-            <a:off x="4069080" y="1005840"/>
-            <a:ext cx="7802575" cy="731520"/>
+            <a:off x="2697480" y="1005840"/>
+            <a:ext cx="9174175" cy="731520"/>
           </a:xfrm>
           <a:prstGeom prst="rect">
             <a:avLst/>
@@ -13468,7 +14002,7 @@
                 <a:ea typeface="Times New Roman" pitchFamily="34" charset="-122"/>
                 <a:cs typeface="Times New Roman" pitchFamily="34" charset="-120"/>
               </a:rPr>
-              <a:t>1. What to Do During an Earthquake</a:t>
+              <a:t>DEFINITIONS</a:t>
             </a:r>
             <a:endParaRPr lang="en-US" sz="3600" dirty="0"/>
           </a:p>
@@ -13482,8 +14016,8 @@
         </p:nvSpPr>
         <p:spPr>
           <a:xfrm>
-            <a:off x="4069080" y="1783080"/>
-            <a:ext cx="7802575" cy="4663440"/>
+            <a:off x="2697480" y="1783080"/>
+            <a:ext cx="9174175" cy="4663440"/>
           </a:xfrm>
           <a:prstGeom prst="rect">
             <a:avLst/>
@@ -13510,7 +14044,7 @@
                 <a:ea typeface="Times New Roman" pitchFamily="34" charset="-122"/>
                 <a:cs typeface="Times New Roman" pitchFamily="34" charset="-120"/>
               </a:rPr>
-              <a:t>During an earthquake, we follow these rules:</a:t>
+              <a:t>The key terms of this lesson are defined as follows:</a:t>
             </a:r>
             <a:endParaRPr lang="en-US" sz="4000" dirty="0"/>
           </a:p>
@@ -13530,7 +14064,7 @@
                 <a:ea typeface="Times New Roman" pitchFamily="34" charset="-122"/>
                 <a:cs typeface="Times New Roman" pitchFamily="34" charset="-120"/>
               </a:rPr>
-              <a:t>Inside: </a:t>
+              <a:t>Evacuation: </a:t>
             </a:r>
             <a:pPr algn="l" indent="0" marL="0">
               <a:spcAft>
@@ -13547,7 +14081,7 @@
                 <a:ea typeface="Times New Roman" pitchFamily="34" charset="-122"/>
                 <a:cs typeface="Times New Roman" pitchFamily="34" charset="-120"/>
               </a:rPr>
-              <a:t>We drop, cover our head under a strong table and hold on.</a:t>
+              <a:t>It is leaving a dangerous place quickly and in an organised way.</a:t>
             </a:r>
             <a:endParaRPr lang="en-US" sz="4000" dirty="0"/>
           </a:p>
@@ -13567,7 +14101,7 @@
                 <a:ea typeface="Times New Roman" pitchFamily="34" charset="-122"/>
                 <a:cs typeface="Times New Roman" pitchFamily="34" charset="-120"/>
               </a:rPr>
-              <a:t>Outside: </a:t>
+              <a:t>First aid: </a:t>
             </a:r>
             <a:pPr algn="l" indent="0" marL="0">
               <a:spcAft>
@@ -13584,7 +14118,7 @@
                 <a:ea typeface="Times New Roman" pitchFamily="34" charset="-122"/>
                 <a:cs typeface="Times New Roman" pitchFamily="34" charset="-120"/>
               </a:rPr>
-              <a:t>We move to an open space away from buildings, trees and electric wires.</a:t>
+              <a:t>It is the first help given to an injured person before the doctor arrives.</a:t>
             </a:r>
             <a:endParaRPr lang="en-US" sz="4000" dirty="0"/>
           </a:p>
@@ -13702,9 +14236,129 @@
           </a:p>
         </p:txBody>
       </p:sp>
+      <p:sp>
+        <p:nvSpPr>
+          <p:cNvPr id="3" name="Text 1"/>
+          <p:cNvSpPr/>
+          <p:nvPr/>
+        </p:nvSpPr>
+        <p:spPr>
+          <a:xfrm>
+            <a:off x="365760" y="1005840"/>
+            <a:ext cx="11460175" cy="731520"/>
+          </a:xfrm>
+          <a:prstGeom prst="rect">
+            <a:avLst/>
+          </a:prstGeom>
+          <a:noFill/>
+          <a:ln/>
+        </p:spPr>
+        <p:txBody>
+          <a:bodyPr wrap="square" lIns="0" tIns="0" rIns="0" bIns="0" rtlCol="0" anchor="ctr">
+            <a:normAutofit/>
+          </a:bodyPr>
+          <a:lstStyle/>
+          <a:p>
+            <a:pPr algn="ctr" indent="0" marL="0">
+              <a:buNone/>
+            </a:pPr>
+            <a:r>
+              <a:rPr lang="en-US" sz="3600" b="1" dirty="0">
+                <a:solidFill>
+                  <a:srgbClr val="990011"/>
+                </a:solidFill>
+                <a:latin typeface="Times New Roman" pitchFamily="34" charset="0"/>
+                <a:ea typeface="Times New Roman" pitchFamily="34" charset="-122"/>
+                <a:cs typeface="Times New Roman" pitchFamily="34" charset="-120"/>
+              </a:rPr>
+              <a:t>1. What to Do in Case of an Earthquake</a:t>
+            </a:r>
+            <a:endParaRPr lang="en-US" sz="3600" dirty="0"/>
+          </a:p>
+        </p:txBody>
+      </p:sp>
+      <p:sp>
+        <p:nvSpPr>
+          <p:cNvPr id="4" name="Text 2"/>
+          <p:cNvSpPr/>
+          <p:nvPr/>
+        </p:nvSpPr>
+        <p:spPr>
+          <a:xfrm>
+            <a:off x="365760" y="1783080"/>
+            <a:ext cx="4846320" cy="4617720"/>
+          </a:xfrm>
+          <a:prstGeom prst="rect">
+            <a:avLst/>
+          </a:prstGeom>
+          <a:noFill/>
+          <a:ln/>
+        </p:spPr>
+        <p:txBody>
+          <a:bodyPr wrap="square" lIns="0" tIns="0" rIns="0" bIns="0" rtlCol="0" anchor="t"/>
+          <a:lstStyle/>
+          <a:p>
+            <a:pPr algn="l" indent="0" marL="0">
+              <a:spcAft>
+                <a:spcPts val="800"/>
+              </a:spcAft>
+              <a:buNone/>
+            </a:pPr>
+            <a:r>
+              <a:rPr lang="en-US" sz="3600" i="1" dirty="0">
+                <a:solidFill>
+                  <a:srgbClr val="111111"/>
+                </a:solidFill>
+                <a:latin typeface="Times New Roman" pitchFamily="34" charset="0"/>
+                <a:ea typeface="Times New Roman" pitchFamily="34" charset="-122"/>
+                <a:cs typeface="Times New Roman" pitchFamily="34" charset="-120"/>
+              </a:rPr>
+              <a:t>In case of an earthquake, we follow these rules:</a:t>
+            </a:r>
+            <a:endParaRPr lang="en-US" sz="3600" dirty="0"/>
+          </a:p>
+          <a:p>
+            <a:pPr algn="l" indent="0" marL="0">
+              <a:spcAft>
+                <a:spcPts val="800"/>
+              </a:spcAft>
+              <a:buNone/>
+            </a:pPr>
+            <a:r>
+              <a:rPr lang="en-US" sz="3600" b="1" dirty="0">
+                <a:solidFill>
+                  <a:srgbClr val="111111"/>
+                </a:solidFill>
+                <a:latin typeface="Times New Roman" pitchFamily="34" charset="0"/>
+                <a:ea typeface="Times New Roman" pitchFamily="34" charset="-122"/>
+                <a:cs typeface="Times New Roman" pitchFamily="34" charset="-120"/>
+              </a:rPr>
+              <a:t>Inside: </a:t>
+            </a:r>
+            <a:pPr algn="l" indent="0" marL="0">
+              <a:spcAft>
+                <a:spcPts val="800"/>
+              </a:spcAft>
+              <a:buNone/>
+            </a:pPr>
+            <a:r>
+              <a:rPr lang="en-US" sz="3600" dirty="0">
+                <a:solidFill>
+                  <a:srgbClr val="111111"/>
+                </a:solidFill>
+                <a:latin typeface="Times New Roman" pitchFamily="34" charset="0"/>
+                <a:ea typeface="Times New Roman" pitchFamily="34" charset="-122"/>
+                <a:cs typeface="Times New Roman" pitchFamily="34" charset="-120"/>
+              </a:rPr>
+              <a:t>We drop, cover our head under a strong table and hold on, away from windows.</a:t>
+            </a:r>
+            <a:endParaRPr lang="en-US" sz="3600" dirty="0"/>
+          </a:p>
+        </p:txBody>
+      </p:sp>
       <p:pic>
         <p:nvPicPr>
-          <p:cNvPr id="3" name="Image 0" descr="/home/claude/f4/img/minesec_sheet.png">    </p:cNvPr>
+          <p:cNvPr id="5" name="Image 0" descr="/home/claude/f4/img/v2/f4_quakedamage.jpg">    </p:cNvPr>
           <p:cNvPicPr>
             <a:picLocks noChangeAspect="1"/>
           </p:cNvPicPr>
@@ -13718,8 +14372,8 @@
         </p:blipFill>
         <p:spPr>
           <a:xfrm>
-            <a:off x="0" y="658368"/>
-            <a:ext cx="5120640" cy="5833872"/>
+            <a:off x="5349240" y="2069407"/>
+            <a:ext cx="6659575" cy="3697594"/>
           </a:xfrm>
           <a:prstGeom prst="rect">
             <a:avLst/>
@@ -13728,14 +14382,14 @@
       </p:pic>
       <p:sp>
         <p:nvSpPr>
-          <p:cNvPr id="4" name="Text 1"/>
+          <p:cNvPr id="6" name="Text 3"/>
           <p:cNvSpPr/>
           <p:nvPr/>
         </p:nvSpPr>
         <p:spPr>
           <a:xfrm>
-            <a:off x="5349240" y="1005840"/>
-            <a:ext cx="6522415" cy="731520"/>
+            <a:off x="5349240" y="6089904"/>
+            <a:ext cx="6659575" cy="347472"/>
           </a:xfrm>
           <a:prstGeom prst="rect">
             <a:avLst/>
@@ -13744,85 +14398,24 @@
           <a:ln/>
         </p:spPr>
         <p:txBody>
-          <a:bodyPr wrap="square" lIns="0" tIns="0" rIns="0" bIns="0" rtlCol="0" anchor="ctr">
-            <a:normAutofit/>
-          </a:bodyPr>
+          <a:bodyPr wrap="square" lIns="0" tIns="0" rIns="0" bIns="0" rtlCol="0" anchor="ctr"/>
           <a:lstStyle/>
           <a:p>
             <a:pPr algn="ctr" indent="0" marL="0">
               <a:buNone/>
             </a:pPr>
             <a:r>
-              <a:rPr lang="en-US" sz="3600" b="1" dirty="0">
-                <a:solidFill>
-                  <a:srgbClr val="990011"/>
+              <a:rPr lang="en-US" sz="1600" i="1" dirty="0">
+                <a:solidFill>
+                  <a:srgbClr val="555555"/>
                 </a:solidFill>
                 <a:latin typeface="Times New Roman" pitchFamily="34" charset="0"/>
                 <a:ea typeface="Times New Roman" pitchFamily="34" charset="-122"/>
                 <a:cs typeface="Times New Roman" pitchFamily="34" charset="-120"/>
               </a:rPr>
-              <a:t>1. What to Do During an Earthquake (continued)</a:t>
-            </a:r>
-            <a:endParaRPr lang="en-US" sz="3600" dirty="0"/>
-          </a:p>
-        </p:txBody>
-      </p:sp>
-      <p:sp>
-        <p:nvSpPr>
-          <p:cNvPr id="5" name="Text 2"/>
-          <p:cNvSpPr/>
-          <p:nvPr/>
-        </p:nvSpPr>
-        <p:spPr>
-          <a:xfrm>
-            <a:off x="5349240" y="1783080"/>
-            <a:ext cx="6522415" cy="4663440"/>
-          </a:xfrm>
-          <a:prstGeom prst="rect">
-            <a:avLst/>
-          </a:prstGeom>
-          <a:noFill/>
-          <a:ln/>
-        </p:spPr>
-        <p:txBody>
-          <a:bodyPr wrap="square" lIns="0" tIns="0" rIns="0" bIns="0" rtlCol="0" anchor="t"/>
-          <a:lstStyle/>
-          <a:p>
-            <a:pPr algn="l" indent="0" marL="0">
-              <a:spcAft>
-                <a:spcPts val="800"/>
-              </a:spcAft>
-              <a:buNone/>
-            </a:pPr>
-            <a:r>
-              <a:rPr lang="en-US" sz="4000" b="1" dirty="0">
-                <a:solidFill>
-                  <a:srgbClr val="111111"/>
-                </a:solidFill>
-                <a:latin typeface="Times New Roman" pitchFamily="34" charset="0"/>
-                <a:ea typeface="Times New Roman" pitchFamily="34" charset="-122"/>
-                <a:cs typeface="Times New Roman" pitchFamily="34" charset="-120"/>
-              </a:rPr>
-              <a:t>After: </a:t>
-            </a:r>
-            <a:pPr algn="l" indent="0" marL="0">
-              <a:spcAft>
-                <a:spcPts val="800"/>
-              </a:spcAft>
-              <a:buNone/>
-            </a:pPr>
-            <a:r>
-              <a:rPr lang="en-US" sz="4000" dirty="0">
-                <a:solidFill>
-                  <a:srgbClr val="111111"/>
-                </a:solidFill>
-                <a:latin typeface="Times New Roman" pitchFamily="34" charset="0"/>
-                <a:ea typeface="Times New Roman" pitchFamily="34" charset="-122"/>
-                <a:cs typeface="Times New Roman" pitchFamily="34" charset="-120"/>
-              </a:rPr>
-              <a:t>We help the injured, give first aid and call the rescue services.</a:t>
-            </a:r>
-            <a:endParaRPr lang="en-US" sz="4000" dirty="0"/>
+              <a:t>Illustration: damage after an earthquake</a:t>
+            </a:r>
+            <a:endParaRPr lang="en-US" sz="1600" dirty="0"/>
           </a:p>
         </p:txBody>
       </p:sp>
@@ -13955,7 +14548,7 @@
         <p:spPr>
           <a:xfrm>
             <a:off x="0" y="658368"/>
-            <a:ext cx="3840480" cy="5833872"/>
+            <a:ext cx="5120640" cy="5833872"/>
           </a:xfrm>
           <a:prstGeom prst="rect">
             <a:avLst/>
@@ -13970,8 +14563,8 @@
         </p:nvSpPr>
         <p:spPr>
           <a:xfrm>
-            <a:off x="4069080" y="1005840"/>
-            <a:ext cx="7802575" cy="731520"/>
+            <a:off x="5349240" y="1005840"/>
+            <a:ext cx="6522415" cy="731520"/>
           </a:xfrm>
           <a:prstGeom prst="rect">
             <a:avLst/>
@@ -13997,7 +14590,7 @@
                 <a:ea typeface="Times New Roman" pitchFamily="34" charset="-122"/>
                 <a:cs typeface="Times New Roman" pitchFamily="34" charset="-120"/>
               </a:rPr>
-              <a:t>2. What to Do During a Volcanic Eruption</a:t>
+              <a:t>1. What to Do in Case of an Earthquake</a:t>
             </a:r>
             <a:endParaRPr lang="en-US" sz="3600" dirty="0"/>
           </a:p>
@@ -14011,8 +14604,8 @@
         </p:nvSpPr>
         <p:spPr>
           <a:xfrm>
-            <a:off x="4069080" y="1783080"/>
-            <a:ext cx="7802575" cy="4663440"/>
+            <a:off x="5349240" y="1783080"/>
+            <a:ext cx="6522415" cy="4663440"/>
           </a:xfrm>
           <a:prstGeom prst="rect">
             <a:avLst/>
@@ -14031,7 +14624,7 @@
               <a:buNone/>
             </a:pPr>
             <a:r>
-              <a:rPr lang="en-US" sz="4000" i="1" dirty="0">
+              <a:rPr lang="en-US" sz="4000" b="1" dirty="0">
                 <a:solidFill>
                   <a:srgbClr val="111111"/>
                 </a:solidFill>
@@ -14039,11 +14632,8 @@
                 <a:ea typeface="Times New Roman" pitchFamily="34" charset="-122"/>
                 <a:cs typeface="Times New Roman" pitchFamily="34" charset="-120"/>
               </a:rPr>
-              <a:t>During a volcanic eruption, we follow these rules:</a:t>
-            </a:r>
-            <a:endParaRPr lang="en-US" sz="4000" dirty="0"/>
-          </a:p>
-          <a:p>
+              <a:t>Outside: </a:t>
+            </a:r>
             <a:pPr algn="l" indent="0" marL="0">
               <a:spcAft>
                 <a:spcPts val="800"/>
@@ -14051,7 +14641,7 @@
               <a:buNone/>
             </a:pPr>
             <a:r>
-              <a:rPr lang="en-US" sz="4000" b="1" dirty="0">
+              <a:rPr lang="en-US" sz="4000" dirty="0">
                 <a:solidFill>
                   <a:srgbClr val="111111"/>
                 </a:solidFill>
@@ -14059,61 +14649,7 @@
                 <a:ea typeface="Times New Roman" pitchFamily="34" charset="-122"/>
                 <a:cs typeface="Times New Roman" pitchFamily="34" charset="-120"/>
               </a:rPr>
-              <a:t>Warnings: </a:t>
-            </a:r>
-            <a:pPr algn="l" indent="0" marL="0">
-              <a:spcAft>
-                <a:spcPts val="800"/>
-              </a:spcAft>
-              <a:buNone/>
-            </a:pPr>
-            <a:r>
-              <a:rPr lang="en-US" sz="4000" dirty="0">
-                <a:solidFill>
-                  <a:srgbClr val="111111"/>
-                </a:solidFill>
-                <a:latin typeface="Times New Roman" pitchFamily="34" charset="0"/>
-                <a:ea typeface="Times New Roman" pitchFamily="34" charset="-122"/>
-                <a:cs typeface="Times New Roman" pitchFamily="34" charset="-120"/>
-              </a:rPr>
-              <a:t>We listen to the radio and obey the authorities.</a:t>
-            </a:r>
-            <a:endParaRPr lang="en-US" sz="4000" dirty="0"/>
-          </a:p>
-          <a:p>
-            <a:pPr algn="l" indent="0" marL="0">
-              <a:spcAft>
-                <a:spcPts val="800"/>
-              </a:spcAft>
-              <a:buNone/>
-            </a:pPr>
-            <a:r>
-              <a:rPr lang="en-US" sz="4000" b="1" dirty="0">
-                <a:solidFill>
-                  <a:srgbClr val="111111"/>
-                </a:solidFill>
-                <a:latin typeface="Times New Roman" pitchFamily="34" charset="0"/>
-                <a:ea typeface="Times New Roman" pitchFamily="34" charset="-122"/>
-                <a:cs typeface="Times New Roman" pitchFamily="34" charset="-120"/>
-              </a:rPr>
-              <a:t>Evacuation: </a:t>
-            </a:r>
-            <a:pPr algn="l" indent="0" marL="0">
-              <a:spcAft>
-                <a:spcPts val="800"/>
-              </a:spcAft>
-              <a:buNone/>
-            </a:pPr>
-            <a:r>
-              <a:rPr lang="en-US" sz="4000" dirty="0">
-                <a:solidFill>
-                  <a:srgbClr val="111111"/>
-                </a:solidFill>
-                <a:latin typeface="Times New Roman" pitchFamily="34" charset="0"/>
-                <a:ea typeface="Times New Roman" pitchFamily="34" charset="-122"/>
-                <a:cs typeface="Times New Roman" pitchFamily="34" charset="-120"/>
-              </a:rPr>
-              <a:t>We leave quickly, away from lava paths and low valleys.</a:t>
+              <a:t>We move to an open space away from buildings, trees and electric wires.</a:t>
             </a:r>
             <a:endParaRPr lang="en-US" sz="4000" dirty="0"/>
           </a:p>
@@ -14231,9 +14767,109 @@
           </a:p>
         </p:txBody>
       </p:sp>
+      <p:sp>
+        <p:nvSpPr>
+          <p:cNvPr id="3" name="Text 1"/>
+          <p:cNvSpPr/>
+          <p:nvPr/>
+        </p:nvSpPr>
+        <p:spPr>
+          <a:xfrm>
+            <a:off x="365760" y="1005840"/>
+            <a:ext cx="11460175" cy="731520"/>
+          </a:xfrm>
+          <a:prstGeom prst="rect">
+            <a:avLst/>
+          </a:prstGeom>
+          <a:noFill/>
+          <a:ln/>
+        </p:spPr>
+        <p:txBody>
+          <a:bodyPr wrap="square" lIns="0" tIns="0" rIns="0" bIns="0" rtlCol="0" anchor="ctr">
+            <a:normAutofit/>
+          </a:bodyPr>
+          <a:lstStyle/>
+          <a:p>
+            <a:pPr algn="ctr" indent="0" marL="0">
+              <a:buNone/>
+            </a:pPr>
+            <a:r>
+              <a:rPr lang="en-US" sz="3600" b="1" dirty="0">
+                <a:solidFill>
+                  <a:srgbClr val="990011"/>
+                </a:solidFill>
+                <a:latin typeface="Times New Roman" pitchFamily="34" charset="0"/>
+                <a:ea typeface="Times New Roman" pitchFamily="34" charset="-122"/>
+                <a:cs typeface="Times New Roman" pitchFamily="34" charset="-120"/>
+              </a:rPr>
+              <a:t>1. What to Do in Case of an Earthquake</a:t>
+            </a:r>
+            <a:endParaRPr lang="en-US" sz="3600" dirty="0"/>
+          </a:p>
+        </p:txBody>
+      </p:sp>
+      <p:sp>
+        <p:nvSpPr>
+          <p:cNvPr id="4" name="Text 2"/>
+          <p:cNvSpPr/>
+          <p:nvPr/>
+        </p:nvSpPr>
+        <p:spPr>
+          <a:xfrm>
+            <a:off x="365760" y="1783080"/>
+            <a:ext cx="4846320" cy="4617720"/>
+          </a:xfrm>
+          <a:prstGeom prst="rect">
+            <a:avLst/>
+          </a:prstGeom>
+          <a:noFill/>
+          <a:ln/>
+        </p:spPr>
+        <p:txBody>
+          <a:bodyPr wrap="square" lIns="0" tIns="0" rIns="0" bIns="0" rtlCol="0" anchor="t"/>
+          <a:lstStyle/>
+          <a:p>
+            <a:pPr algn="l" indent="0" marL="0">
+              <a:spcAft>
+                <a:spcPts val="800"/>
+              </a:spcAft>
+              <a:buNone/>
+            </a:pPr>
+            <a:r>
+              <a:rPr lang="en-US" sz="3600" b="1" dirty="0">
+                <a:solidFill>
+                  <a:srgbClr val="111111"/>
+                </a:solidFill>
+                <a:latin typeface="Times New Roman" pitchFamily="34" charset="0"/>
+                <a:ea typeface="Times New Roman" pitchFamily="34" charset="-122"/>
+                <a:cs typeface="Times New Roman" pitchFamily="34" charset="-120"/>
+              </a:rPr>
+              <a:t>After: </a:t>
+            </a:r>
+            <a:pPr algn="l" indent="0" marL="0">
+              <a:spcAft>
+                <a:spcPts val="800"/>
+              </a:spcAft>
+              <a:buNone/>
+            </a:pPr>
+            <a:r>
+              <a:rPr lang="en-US" sz="3600" dirty="0">
+                <a:solidFill>
+                  <a:srgbClr val="111111"/>
+                </a:solidFill>
+                <a:latin typeface="Times New Roman" pitchFamily="34" charset="0"/>
+                <a:ea typeface="Times New Roman" pitchFamily="34" charset="-122"/>
+                <a:cs typeface="Times New Roman" pitchFamily="34" charset="-120"/>
+              </a:rPr>
+              <a:t>We go out carefully, help the injured, give first aid and call the rescue services.</a:t>
+            </a:r>
+            <a:endParaRPr lang="en-US" sz="3600" dirty="0"/>
+          </a:p>
+        </p:txBody>
+      </p:sp>
       <p:pic>
         <p:nvPicPr>
-          <p:cNvPr id="3" name="Image 0" descr="/home/claude/f4/img/minesec_sheet.png">    </p:cNvPr>
+          <p:cNvPr id="5" name="Image 0" descr="/home/claude/f4/img/v2/usa_sandbags.jpg">    </p:cNvPr>
           <p:cNvPicPr>
             <a:picLocks noChangeAspect="1"/>
           </p:cNvPicPr>
@@ -14247,8 +14883,8 @@
         </p:blipFill>
         <p:spPr>
           <a:xfrm>
-            <a:off x="0" y="658368"/>
-            <a:ext cx="5120640" cy="5833872"/>
+            <a:off x="5349240" y="2071212"/>
+            <a:ext cx="6659575" cy="3693983"/>
           </a:xfrm>
           <a:prstGeom prst="rect">
             <a:avLst/>
@@ -14257,14 +14893,14 @@
       </p:pic>
       <p:sp>
         <p:nvSpPr>
-          <p:cNvPr id="4" name="Text 1"/>
+          <p:cNvPr id="6" name="Text 3"/>
           <p:cNvSpPr/>
           <p:nvPr/>
         </p:nvSpPr>
         <p:spPr>
           <a:xfrm>
-            <a:off x="5349240" y="1005840"/>
-            <a:ext cx="6522415" cy="731520"/>
+            <a:off x="5349240" y="6089904"/>
+            <a:ext cx="6659575" cy="347472"/>
           </a:xfrm>
           <a:prstGeom prst="rect">
             <a:avLst/>
@@ -14273,85 +14909,24 @@
           <a:ln/>
         </p:spPr>
         <p:txBody>
-          <a:bodyPr wrap="square" lIns="0" tIns="0" rIns="0" bIns="0" rtlCol="0" anchor="ctr">
-            <a:normAutofit/>
-          </a:bodyPr>
+          <a:bodyPr wrap="square" lIns="0" tIns="0" rIns="0" bIns="0" rtlCol="0" anchor="ctr"/>
           <a:lstStyle/>
           <a:p>
             <a:pPr algn="ctr" indent="0" marL="0">
               <a:buNone/>
             </a:pPr>
             <a:r>
-              <a:rPr lang="en-US" sz="3600" b="1" dirty="0">
-                <a:solidFill>
-                  <a:srgbClr val="990011"/>
+              <a:rPr lang="en-US" sz="1600" i="1" dirty="0">
+                <a:solidFill>
+                  <a:srgbClr val="555555"/>
                 </a:solidFill>
                 <a:latin typeface="Times New Roman" pitchFamily="34" charset="0"/>
                 <a:ea typeface="Times New Roman" pitchFamily="34" charset="-122"/>
                 <a:cs typeface="Times New Roman" pitchFamily="34" charset="-120"/>
               </a:rPr>
-              <a:t>2. What to Do During a Volcanic Eruption (continued)</a:t>
-            </a:r>
-            <a:endParaRPr lang="en-US" sz="3600" dirty="0"/>
-          </a:p>
-        </p:txBody>
-      </p:sp>
-      <p:sp>
-        <p:nvSpPr>
-          <p:cNvPr id="5" name="Text 2"/>
-          <p:cNvSpPr/>
-          <p:nvPr/>
-        </p:nvSpPr>
-        <p:spPr>
-          <a:xfrm>
-            <a:off x="5349240" y="1783080"/>
-            <a:ext cx="6522415" cy="4663440"/>
-          </a:xfrm>
-          <a:prstGeom prst="rect">
-            <a:avLst/>
-          </a:prstGeom>
-          <a:noFill/>
-          <a:ln/>
-        </p:spPr>
-        <p:txBody>
-          <a:bodyPr wrap="square" lIns="0" tIns="0" rIns="0" bIns="0" rtlCol="0" anchor="t"/>
-          <a:lstStyle/>
-          <a:p>
-            <a:pPr algn="l" indent="0" marL="0">
-              <a:spcAft>
-                <a:spcPts val="800"/>
-              </a:spcAft>
-              <a:buNone/>
-            </a:pPr>
-            <a:r>
-              <a:rPr lang="en-US" sz="4000" b="1" dirty="0">
-                <a:solidFill>
-                  <a:srgbClr val="111111"/>
-                </a:solidFill>
-                <a:latin typeface="Times New Roman" pitchFamily="34" charset="0"/>
-                <a:ea typeface="Times New Roman" pitchFamily="34" charset="-122"/>
-                <a:cs typeface="Times New Roman" pitchFamily="34" charset="-120"/>
-              </a:rPr>
-              <a:t>Protection: </a:t>
-            </a:r>
-            <a:pPr algn="l" indent="0" marL="0">
-              <a:spcAft>
-                <a:spcPts val="800"/>
-              </a:spcAft>
-              <a:buNone/>
-            </a:pPr>
-            <a:r>
-              <a:rPr lang="en-US" sz="4000" dirty="0">
-                <a:solidFill>
-                  <a:srgbClr val="111111"/>
-                </a:solidFill>
-                <a:latin typeface="Times New Roman" pitchFamily="34" charset="0"/>
-                <a:ea typeface="Times New Roman" pitchFamily="34" charset="-122"/>
-                <a:cs typeface="Times New Roman" pitchFamily="34" charset="-120"/>
-              </a:rPr>
-              <a:t>We cover the nose and mouth against ash and gases.</a:t>
-            </a:r>
-            <a:endParaRPr lang="en-US" sz="4000" dirty="0"/>
+              <a:t>Illustration: rescue workers</a:t>
+            </a:r>
+            <a:endParaRPr lang="en-US" sz="1600" dirty="0"/>
           </a:p>
         </p:txBody>
       </p:sp>
@@ -14484,7 +15059,7 @@
         <p:spPr>
           <a:xfrm>
             <a:off x="0" y="658368"/>
-            <a:ext cx="3840480" cy="5833872"/>
+            <a:ext cx="5120640" cy="5833872"/>
           </a:xfrm>
           <a:prstGeom prst="rect">
             <a:avLst/>
@@ -14499,8 +15074,8 @@
         </p:nvSpPr>
         <p:spPr>
           <a:xfrm>
-            <a:off x="4069080" y="1005840"/>
-            <a:ext cx="7802575" cy="731520"/>
+            <a:off x="5349240" y="1005840"/>
+            <a:ext cx="6522415" cy="731520"/>
           </a:xfrm>
           <a:prstGeom prst="rect">
             <a:avLst/>
@@ -14526,7 +15101,7 @@
                 <a:ea typeface="Times New Roman" pitchFamily="34" charset="-122"/>
                 <a:cs typeface="Times New Roman" pitchFamily="34" charset="-120"/>
               </a:rPr>
-              <a:t>3. Adaptation and Mitigation Measures</a:t>
+              <a:t>1. What to Do in Case of an Earthquake</a:t>
             </a:r>
             <a:endParaRPr lang="en-US" sz="3600" dirty="0"/>
           </a:p>
@@ -14540,8 +15115,8 @@
         </p:nvSpPr>
         <p:spPr>
           <a:xfrm>
-            <a:off x="4069080" y="1783080"/>
-            <a:ext cx="7802575" cy="4663440"/>
+            <a:off x="5349240" y="1783080"/>
+            <a:ext cx="6522415" cy="4663440"/>
           </a:xfrm>
           <a:prstGeom prst="rect">
             <a:avLst/>
@@ -14560,7 +15135,7 @@
               <a:buNone/>
             </a:pPr>
             <a:r>
-              <a:rPr lang="en-US" sz="4000" i="1" dirty="0">
+              <a:rPr lang="en-US" sz="4000" b="1" dirty="0">
                 <a:solidFill>
                   <a:srgbClr val="111111"/>
                 </a:solidFill>
@@ -14568,11 +15143,8 @@
                 <a:ea typeface="Times New Roman" pitchFamily="34" charset="-122"/>
                 <a:cs typeface="Times New Roman" pitchFamily="34" charset="-120"/>
               </a:rPr>
-              <a:t>The following measures reduce the dangers:</a:t>
-            </a:r>
-            <a:endParaRPr lang="en-US" sz="4000" dirty="0"/>
-          </a:p>
-          <a:p>
+              <a:t>Tsunami warning: </a:t>
+            </a:r>
             <a:pPr algn="l" indent="0" marL="0">
               <a:spcAft>
                 <a:spcPts val="800"/>
@@ -14580,7 +15152,7 @@
               <a:buNone/>
             </a:pPr>
             <a:r>
-              <a:rPr lang="en-US" sz="4000" b="1" dirty="0">
+              <a:rPr lang="en-US" sz="4000" dirty="0">
                 <a:solidFill>
                   <a:srgbClr val="111111"/>
                 </a:solidFill>
@@ -14588,61 +15160,7 @@
                 <a:ea typeface="Times New Roman" pitchFamily="34" charset="-122"/>
                 <a:cs typeface="Times New Roman" pitchFamily="34" charset="-120"/>
               </a:rPr>
-              <a:t>Monitoring: </a:t>
-            </a:r>
-            <a:pPr algn="l" indent="0" marL="0">
-              <a:spcAft>
-                <a:spcPts val="800"/>
-              </a:spcAft>
-              <a:buNone/>
-            </a:pPr>
-            <a:r>
-              <a:rPr lang="en-US" sz="4000" dirty="0">
-                <a:solidFill>
-                  <a:srgbClr val="111111"/>
-                </a:solidFill>
-                <a:latin typeface="Times New Roman" pitchFamily="34" charset="0"/>
-                <a:ea typeface="Times New Roman" pitchFamily="34" charset="-122"/>
-                <a:cs typeface="Times New Roman" pitchFamily="34" charset="-120"/>
-              </a:rPr>
-              <a:t>Scientists watch volcanoes and earthquakes to warn people.</a:t>
-            </a:r>
-            <a:endParaRPr lang="en-US" sz="4000" dirty="0"/>
-          </a:p>
-          <a:p>
-            <a:pPr algn="l" indent="0" marL="0">
-              <a:spcAft>
-                <a:spcPts val="800"/>
-              </a:spcAft>
-              <a:buNone/>
-            </a:pPr>
-            <a:r>
-              <a:rPr lang="en-US" sz="4000" b="1" dirty="0">
-                <a:solidFill>
-                  <a:srgbClr val="111111"/>
-                </a:solidFill>
-                <a:latin typeface="Times New Roman" pitchFamily="34" charset="0"/>
-                <a:ea typeface="Times New Roman" pitchFamily="34" charset="-122"/>
-                <a:cs typeface="Times New Roman" pitchFamily="34" charset="-120"/>
-              </a:rPr>
-              <a:t>Strong buildings: </a:t>
-            </a:r>
-            <a:pPr algn="l" indent="0" marL="0">
-              <a:spcAft>
-                <a:spcPts val="800"/>
-              </a:spcAft>
-              <a:buNone/>
-            </a:pPr>
-            <a:r>
-              <a:rPr lang="en-US" sz="4000" dirty="0">
-                <a:solidFill>
-                  <a:srgbClr val="111111"/>
-                </a:solidFill>
-                <a:latin typeface="Times New Roman" pitchFamily="34" charset="0"/>
-                <a:ea typeface="Times New Roman" pitchFamily="34" charset="-122"/>
-                <a:cs typeface="Times New Roman" pitchFamily="34" charset="-120"/>
-              </a:rPr>
-              <a:t>Buildings made to resist shaking save lives.</a:t>
+              <a:t>On the coast, we move quickly to high ground.</a:t>
             </a:r>
             <a:endParaRPr lang="en-US" sz="4000" dirty="0"/>
           </a:p>
@@ -15058,7 +15576,7 @@
                 <a:ea typeface="Times New Roman" pitchFamily="34" charset="-122"/>
                 <a:cs typeface="Times New Roman" pitchFamily="34" charset="-120"/>
               </a:rPr>
-              <a:t>3. Adaptation and Mitigation Measures (continued)</a:t>
+              <a:t>2. What to Do in Case of a Volcanic Eruption</a:t>
             </a:r>
             <a:endParaRPr lang="en-US" sz="3600" dirty="0"/>
           </a:p>
@@ -15092,7 +15610,7 @@
               <a:buNone/>
             </a:pPr>
             <a:r>
-              <a:rPr lang="en-US" sz="4000" b="1" dirty="0">
+              <a:rPr lang="en-US" sz="4000" i="1" dirty="0">
                 <a:solidFill>
                   <a:srgbClr val="111111"/>
                 </a:solidFill>
@@ -15100,8 +15618,11 @@
                 <a:ea typeface="Times New Roman" pitchFamily="34" charset="-122"/>
                 <a:cs typeface="Times New Roman" pitchFamily="34" charset="-120"/>
               </a:rPr>
-              <a:t>Education: </a:t>
-            </a:r>
+              <a:t>In case of a volcanic eruption, we follow these rules:</a:t>
+            </a:r>
+            <a:endParaRPr lang="en-US" sz="4000" dirty="0"/>
+          </a:p>
+          <a:p>
             <a:pPr algn="l" indent="0" marL="0">
               <a:spcAft>
                 <a:spcPts val="800"/>
@@ -15109,7 +15630,7 @@
               <a:buNone/>
             </a:pPr>
             <a:r>
-              <a:rPr lang="en-US" sz="4000" dirty="0">
+              <a:rPr lang="en-US" sz="4000" b="1" dirty="0">
                 <a:solidFill>
                   <a:srgbClr val="111111"/>
                 </a:solidFill>
@@ -15117,7 +15638,24 @@
                 <a:ea typeface="Times New Roman" pitchFamily="34" charset="-122"/>
                 <a:cs typeface="Times New Roman" pitchFamily="34" charset="-120"/>
               </a:rPr>
-              <a:t>People learn safety drills and first aid, as the Red Cross teaches.</a:t>
+              <a:t>Warnings: </a:t>
+            </a:r>
+            <a:pPr algn="l" indent="0" marL="0">
+              <a:spcAft>
+                <a:spcPts val="800"/>
+              </a:spcAft>
+              <a:buNone/>
+            </a:pPr>
+            <a:r>
+              <a:rPr lang="en-US" sz="4000" dirty="0">
+                <a:solidFill>
+                  <a:srgbClr val="111111"/>
+                </a:solidFill>
+                <a:latin typeface="Times New Roman" pitchFamily="34" charset="0"/>
+                <a:ea typeface="Times New Roman" pitchFamily="34" charset="-122"/>
+                <a:cs typeface="Times New Roman" pitchFamily="34" charset="-120"/>
+              </a:rPr>
+              <a:t>We listen to the radio and obey the authorities.</a:t>
             </a:r>
             <a:endParaRPr lang="en-US" sz="4000" dirty="0"/>
           </a:p>
@@ -15229,15 +15767,115 @@
                 <a:ea typeface="Calibri" pitchFamily="34" charset="-122"/>
                 <a:cs typeface="Calibri" pitchFamily="34" charset="-120"/>
               </a:rPr>
-              <a:t>FORMATIVE EVALUATION</a:t>
+              <a:t>BOARD SUMMARY</a:t>
             </a:r>
             <a:endParaRPr lang="en-US" sz="1400" dirty="0"/>
+          </a:p>
+        </p:txBody>
+      </p:sp>
+      <p:sp>
+        <p:nvSpPr>
+          <p:cNvPr id="3" name="Text 1"/>
+          <p:cNvSpPr/>
+          <p:nvPr/>
+        </p:nvSpPr>
+        <p:spPr>
+          <a:xfrm>
+            <a:off x="365760" y="1005840"/>
+            <a:ext cx="11460175" cy="731520"/>
+          </a:xfrm>
+          <a:prstGeom prst="rect">
+            <a:avLst/>
+          </a:prstGeom>
+          <a:noFill/>
+          <a:ln/>
+        </p:spPr>
+        <p:txBody>
+          <a:bodyPr wrap="square" lIns="0" tIns="0" rIns="0" bIns="0" rtlCol="0" anchor="ctr">
+            <a:normAutofit/>
+          </a:bodyPr>
+          <a:lstStyle/>
+          <a:p>
+            <a:pPr algn="ctr" indent="0" marL="0">
+              <a:buNone/>
+            </a:pPr>
+            <a:r>
+              <a:rPr lang="en-US" sz="3600" b="1" dirty="0">
+                <a:solidFill>
+                  <a:srgbClr val="990011"/>
+                </a:solidFill>
+                <a:latin typeface="Times New Roman" pitchFamily="34" charset="0"/>
+                <a:ea typeface="Times New Roman" pitchFamily="34" charset="-122"/>
+                <a:cs typeface="Times New Roman" pitchFamily="34" charset="-120"/>
+              </a:rPr>
+              <a:t>2. What to Do in Case of a Volcanic Eruption</a:t>
+            </a:r>
+            <a:endParaRPr lang="en-US" sz="3600" dirty="0"/>
+          </a:p>
+        </p:txBody>
+      </p:sp>
+      <p:sp>
+        <p:nvSpPr>
+          <p:cNvPr id="4" name="Text 2"/>
+          <p:cNvSpPr/>
+          <p:nvPr/>
+        </p:nvSpPr>
+        <p:spPr>
+          <a:xfrm>
+            <a:off x="365760" y="1783080"/>
+            <a:ext cx="4846320" cy="4617720"/>
+          </a:xfrm>
+          <a:prstGeom prst="rect">
+            <a:avLst/>
+          </a:prstGeom>
+          <a:noFill/>
+          <a:ln/>
+        </p:spPr>
+        <p:txBody>
+          <a:bodyPr wrap="square" lIns="0" tIns="0" rIns="0" bIns="0" rtlCol="0" anchor="t"/>
+          <a:lstStyle/>
+          <a:p>
+            <a:pPr algn="l" indent="0" marL="0">
+              <a:spcAft>
+                <a:spcPts val="800"/>
+              </a:spcAft>
+              <a:buNone/>
+            </a:pPr>
+            <a:r>
+              <a:rPr lang="en-US" sz="3600" b="1" dirty="0">
+                <a:solidFill>
+                  <a:srgbClr val="111111"/>
+                </a:solidFill>
+                <a:latin typeface="Times New Roman" pitchFamily="34" charset="0"/>
+                <a:ea typeface="Times New Roman" pitchFamily="34" charset="-122"/>
+                <a:cs typeface="Times New Roman" pitchFamily="34" charset="-120"/>
+              </a:rPr>
+              <a:t>Evacuation: </a:t>
+            </a:r>
+            <a:pPr algn="l" indent="0" marL="0">
+              <a:spcAft>
+                <a:spcPts val="800"/>
+              </a:spcAft>
+              <a:buNone/>
+            </a:pPr>
+            <a:r>
+              <a:rPr lang="en-US" sz="3600" dirty="0">
+                <a:solidFill>
+                  <a:srgbClr val="111111"/>
+                </a:solidFill>
+                <a:latin typeface="Times New Roman" pitchFamily="34" charset="0"/>
+                <a:ea typeface="Times New Roman" pitchFamily="34" charset="-122"/>
+                <a:cs typeface="Times New Roman" pitchFamily="34" charset="-120"/>
+              </a:rPr>
+              <a:t>We leave quickly, away from lava paths and low valleys.</a:t>
+            </a:r>
+            <a:endParaRPr lang="en-US" sz="3600" dirty="0"/>
           </a:p>
         </p:txBody>
       </p:sp>
       <p:pic>
         <p:nvPicPr>
-          <p:cNvPr id="3" name="Image 0" descr="/home/claude/f4/img/minesec_sheet.png">    </p:cNvPr>
+          <p:cNvPr id="5" name="Image 0" descr="/home/claude/f4/img/v2/f4_eruption.jpg">    </p:cNvPr>
           <p:cNvPicPr>
             <a:picLocks noChangeAspect="1"/>
           </p:cNvPicPr>
@@ -15251,8 +15889,8 @@
         </p:blipFill>
         <p:spPr>
           <a:xfrm>
-            <a:off x="0" y="658368"/>
-            <a:ext cx="5120640" cy="5833872"/>
+            <a:off x="5349240" y="2071212"/>
+            <a:ext cx="6659575" cy="3693983"/>
           </a:xfrm>
           <a:prstGeom prst="rect">
             <a:avLst/>
@@ -15261,14 +15899,14 @@
       </p:pic>
       <p:sp>
         <p:nvSpPr>
-          <p:cNvPr id="4" name="Text 1"/>
+          <p:cNvPr id="6" name="Text 3"/>
           <p:cNvSpPr/>
           <p:nvPr/>
         </p:nvSpPr>
         <p:spPr>
           <a:xfrm>
-            <a:off x="5349240" y="1005840"/>
-            <a:ext cx="6522415" cy="731520"/>
+            <a:off x="5349240" y="6089904"/>
+            <a:ext cx="6659575" cy="347472"/>
           </a:xfrm>
           <a:prstGeom prst="rect">
             <a:avLst/>
@@ -15277,68 +15915,24 @@
           <a:ln/>
         </p:spPr>
         <p:txBody>
-          <a:bodyPr wrap="square" lIns="0" tIns="0" rIns="0" bIns="0" rtlCol="0" anchor="ctr">
-            <a:normAutofit/>
-          </a:bodyPr>
+          <a:bodyPr wrap="square" lIns="0" tIns="0" rIns="0" bIns="0" rtlCol="0" anchor="ctr"/>
           <a:lstStyle/>
           <a:p>
             <a:pPr algn="ctr" indent="0" marL="0">
               <a:buNone/>
             </a:pPr>
             <a:r>
-              <a:rPr lang="en-US" sz="3600" b="1" dirty="0">
-                <a:solidFill>
-                  <a:srgbClr val="990011"/>
+              <a:rPr lang="en-US" sz="1600" i="1" dirty="0">
+                <a:solidFill>
+                  <a:srgbClr val="555555"/>
                 </a:solidFill>
                 <a:latin typeface="Times New Roman" pitchFamily="34" charset="0"/>
                 <a:ea typeface="Times New Roman" pitchFamily="34" charset="-122"/>
                 <a:cs typeface="Times New Roman" pitchFamily="34" charset="-120"/>
               </a:rPr>
-              <a:t>Evaluation 1</a:t>
-            </a:r>
-            <a:endParaRPr lang="en-US" sz="3600" dirty="0"/>
-          </a:p>
-        </p:txBody>
-      </p:sp>
-      <p:sp>
-        <p:nvSpPr>
-          <p:cNvPr id="5" name="Text 2"/>
-          <p:cNvSpPr/>
-          <p:nvPr/>
-        </p:nvSpPr>
-        <p:spPr>
-          <a:xfrm>
-            <a:off x="5349240" y="1783080"/>
-            <a:ext cx="6522415" cy="4663440"/>
-          </a:xfrm>
-          <a:prstGeom prst="rect">
-            <a:avLst/>
-          </a:prstGeom>
-          <a:noFill/>
-          <a:ln/>
-        </p:spPr>
-        <p:txBody>
-          <a:bodyPr wrap="square" lIns="0" tIns="0" rIns="0" bIns="0" rtlCol="0" anchor="t"/>
-          <a:lstStyle/>
-          <a:p>
-            <a:pPr algn="l" indent="0" marL="0">
-              <a:spcAft>
-                <a:spcPts val="800"/>
-              </a:spcAft>
-              <a:buNone/>
-            </a:pPr>
-            <a:r>
-              <a:rPr lang="en-US" sz="4000" dirty="0">
-                <a:solidFill>
-                  <a:srgbClr val="111111"/>
-                </a:solidFill>
-                <a:latin typeface="Times New Roman" pitchFamily="34" charset="0"/>
-                <a:ea typeface="Times New Roman" pitchFamily="34" charset="-122"/>
-                <a:cs typeface="Times New Roman" pitchFamily="34" charset="-120"/>
-              </a:rPr>
-              <a:t>Give two rules during an earthquake.</a:t>
-            </a:r>
-            <a:endParaRPr lang="en-US" sz="4000" dirty="0"/>
+              <a:t>Illustration: a volcanic eruption</a:t>
+            </a:r>
+            <a:endParaRPr lang="en-US" sz="1600" dirty="0"/>
           </a:p>
         </p:txBody>
       </p:sp>
@@ -15448,7 +16042,7 @@
                 <a:ea typeface="Calibri" pitchFamily="34" charset="-122"/>
                 <a:cs typeface="Calibri" pitchFamily="34" charset="-120"/>
               </a:rPr>
-              <a:t>FORMATIVE EVALUATION</a:t>
+              <a:t>BOARD SUMMARY</a:t>
             </a:r>
             <a:endParaRPr lang="en-US" sz="1400" dirty="0"/>
           </a:p>
@@ -15513,7 +16107,7 @@
                 <a:ea typeface="Times New Roman" pitchFamily="34" charset="-122"/>
                 <a:cs typeface="Times New Roman" pitchFamily="34" charset="-120"/>
               </a:rPr>
-              <a:t>Expected Answer</a:t>
+              <a:t>2. What to Do in Case of a Volcanic Eruption</a:t>
             </a:r>
             <a:endParaRPr lang="en-US" sz="3600" dirty="0"/>
           </a:p>
@@ -15547,7 +16141,7 @@
               <a:buNone/>
             </a:pPr>
             <a:r>
-              <a:rPr lang="en-US" sz="4000" dirty="0">
+              <a:rPr lang="en-US" sz="4000" b="1" dirty="0">
                 <a:solidFill>
                   <a:srgbClr val="111111"/>
                 </a:solidFill>
@@ -15555,7 +16149,61 @@
                 <a:ea typeface="Times New Roman" pitchFamily="34" charset="-122"/>
                 <a:cs typeface="Times New Roman" pitchFamily="34" charset="-120"/>
               </a:rPr>
-              <a:t>Drop, cover and hold on; stay away from windows.</a:t>
+              <a:t>Protection: </a:t>
+            </a:r>
+            <a:pPr algn="l" indent="0" marL="0">
+              <a:spcAft>
+                <a:spcPts val="800"/>
+              </a:spcAft>
+              <a:buNone/>
+            </a:pPr>
+            <a:r>
+              <a:rPr lang="en-US" sz="4000" dirty="0">
+                <a:solidFill>
+                  <a:srgbClr val="111111"/>
+                </a:solidFill>
+                <a:latin typeface="Times New Roman" pitchFamily="34" charset="0"/>
+                <a:ea typeface="Times New Roman" pitchFamily="34" charset="-122"/>
+                <a:cs typeface="Times New Roman" pitchFamily="34" charset="-120"/>
+              </a:rPr>
+              <a:t>We cover the nose and mouth against ash and gases.</a:t>
+            </a:r>
+            <a:endParaRPr lang="en-US" sz="4000" dirty="0"/>
+          </a:p>
+          <a:p>
+            <a:pPr algn="l" indent="0" marL="0">
+              <a:spcAft>
+                <a:spcPts val="800"/>
+              </a:spcAft>
+              <a:buNone/>
+            </a:pPr>
+            <a:r>
+              <a:rPr lang="en-US" sz="4000" b="1" dirty="0">
+                <a:solidFill>
+                  <a:srgbClr val="111111"/>
+                </a:solidFill>
+                <a:latin typeface="Times New Roman" pitchFamily="34" charset="0"/>
+                <a:ea typeface="Times New Roman" pitchFamily="34" charset="-122"/>
+                <a:cs typeface="Times New Roman" pitchFamily="34" charset="-120"/>
+              </a:rPr>
+              <a:t>Emergency bag: </a:t>
+            </a:r>
+            <a:pPr algn="l" indent="0" marL="0">
+              <a:spcAft>
+                <a:spcPts val="800"/>
+              </a:spcAft>
+              <a:buNone/>
+            </a:pPr>
+            <a:r>
+              <a:rPr lang="en-US" sz="4000" dirty="0">
+                <a:solidFill>
+                  <a:srgbClr val="111111"/>
+                </a:solidFill>
+                <a:latin typeface="Times New Roman" pitchFamily="34" charset="0"/>
+                <a:ea typeface="Times New Roman" pitchFamily="34" charset="-122"/>
+                <a:cs typeface="Times New Roman" pitchFamily="34" charset="-120"/>
+              </a:rPr>
+              <a:t>We take water, food, a torch, a first-aid kit and our documents.</a:t>
             </a:r>
             <a:endParaRPr lang="en-US" sz="4000" dirty="0"/>
           </a:p>
@@ -15667,15 +16315,135 @@
                 <a:ea typeface="Calibri" pitchFamily="34" charset="-122"/>
                 <a:cs typeface="Calibri" pitchFamily="34" charset="-120"/>
               </a:rPr>
-              <a:t>FORMATIVE EVALUATION</a:t>
+              <a:t>BOARD SUMMARY</a:t>
             </a:r>
             <a:endParaRPr lang="en-US" sz="1400" dirty="0"/>
+          </a:p>
+        </p:txBody>
+      </p:sp>
+      <p:sp>
+        <p:nvSpPr>
+          <p:cNvPr id="3" name="Text 1"/>
+          <p:cNvSpPr/>
+          <p:nvPr/>
+        </p:nvSpPr>
+        <p:spPr>
+          <a:xfrm>
+            <a:off x="365760" y="1005840"/>
+            <a:ext cx="11460175" cy="731520"/>
+          </a:xfrm>
+          <a:prstGeom prst="rect">
+            <a:avLst/>
+          </a:prstGeom>
+          <a:noFill/>
+          <a:ln/>
+        </p:spPr>
+        <p:txBody>
+          <a:bodyPr wrap="square" lIns="0" tIns="0" rIns="0" bIns="0" rtlCol="0" anchor="ctr">
+            <a:normAutofit/>
+          </a:bodyPr>
+          <a:lstStyle/>
+          <a:p>
+            <a:pPr algn="ctr" indent="0" marL="0">
+              <a:buNone/>
+            </a:pPr>
+            <a:r>
+              <a:rPr lang="en-US" sz="3600" b="1" dirty="0">
+                <a:solidFill>
+                  <a:srgbClr val="990011"/>
+                </a:solidFill>
+                <a:latin typeface="Times New Roman" pitchFamily="34" charset="0"/>
+                <a:ea typeface="Times New Roman" pitchFamily="34" charset="-122"/>
+                <a:cs typeface="Times New Roman" pitchFamily="34" charset="-120"/>
+              </a:rPr>
+              <a:t>3. Adaptation and Mitigation Measures</a:t>
+            </a:r>
+            <a:endParaRPr lang="en-US" sz="3600" dirty="0"/>
+          </a:p>
+        </p:txBody>
+      </p:sp>
+      <p:sp>
+        <p:nvSpPr>
+          <p:cNvPr id="4" name="Text 2"/>
+          <p:cNvSpPr/>
+          <p:nvPr/>
+        </p:nvSpPr>
+        <p:spPr>
+          <a:xfrm>
+            <a:off x="365760" y="1783080"/>
+            <a:ext cx="4846320" cy="4617720"/>
+          </a:xfrm>
+          <a:prstGeom prst="rect">
+            <a:avLst/>
+          </a:prstGeom>
+          <a:noFill/>
+          <a:ln/>
+        </p:spPr>
+        <p:txBody>
+          <a:bodyPr wrap="square" lIns="0" tIns="0" rIns="0" bIns="0" rtlCol="0" anchor="t"/>
+          <a:lstStyle/>
+          <a:p>
+            <a:pPr algn="l" indent="0" marL="0">
+              <a:spcAft>
+                <a:spcPts val="800"/>
+              </a:spcAft>
+              <a:buNone/>
+            </a:pPr>
+            <a:r>
+              <a:rPr lang="en-US" sz="3600" i="1" dirty="0">
+                <a:solidFill>
+                  <a:srgbClr val="111111"/>
+                </a:solidFill>
+                <a:latin typeface="Times New Roman" pitchFamily="34" charset="0"/>
+                <a:ea typeface="Times New Roman" pitchFamily="34" charset="-122"/>
+                <a:cs typeface="Times New Roman" pitchFamily="34" charset="-120"/>
+              </a:rPr>
+              <a:t>The following measures reduce the dangers:</a:t>
+            </a:r>
+            <a:endParaRPr lang="en-US" sz="3600" dirty="0"/>
+          </a:p>
+          <a:p>
+            <a:pPr algn="l" indent="0" marL="0">
+              <a:spcAft>
+                <a:spcPts val="800"/>
+              </a:spcAft>
+              <a:buNone/>
+            </a:pPr>
+            <a:r>
+              <a:rPr lang="en-US" sz="3600" b="1" dirty="0">
+                <a:solidFill>
+                  <a:srgbClr val="111111"/>
+                </a:solidFill>
+                <a:latin typeface="Times New Roman" pitchFamily="34" charset="0"/>
+                <a:ea typeface="Times New Roman" pitchFamily="34" charset="-122"/>
+                <a:cs typeface="Times New Roman" pitchFamily="34" charset="-120"/>
+              </a:rPr>
+              <a:t>Monitoring: </a:t>
+            </a:r>
+            <a:pPr algn="l" indent="0" marL="0">
+              <a:spcAft>
+                <a:spcPts val="800"/>
+              </a:spcAft>
+              <a:buNone/>
+            </a:pPr>
+            <a:r>
+              <a:rPr lang="en-US" sz="3600" dirty="0">
+                <a:solidFill>
+                  <a:srgbClr val="111111"/>
+                </a:solidFill>
+                <a:latin typeface="Times New Roman" pitchFamily="34" charset="0"/>
+                <a:ea typeface="Times New Roman" pitchFamily="34" charset="-122"/>
+                <a:cs typeface="Times New Roman" pitchFamily="34" charset="-120"/>
+              </a:rPr>
+              <a:t>Scientists watch volcanoes and earthquakes to warn people in time.</a:t>
+            </a:r>
+            <a:endParaRPr lang="en-US" sz="3600" dirty="0"/>
           </a:p>
         </p:txBody>
       </p:sp>
       <p:pic>
         <p:nvPicPr>
-          <p:cNvPr id="3" name="Image 0" descr="/home/claude/f4/img/minesec_sheet.png">    </p:cNvPr>
+          <p:cNvPr id="5" name="Image 0" descr="/home/claude/f4/img/v2/lsa_volcmonitor.jpg">    </p:cNvPr>
           <p:cNvPicPr>
             <a:picLocks noChangeAspect="1"/>
           </p:cNvPicPr>
@@ -15689,8 +16457,8 @@
         </p:blipFill>
         <p:spPr>
           <a:xfrm>
-            <a:off x="0" y="658368"/>
-            <a:ext cx="5120640" cy="5833872"/>
+            <a:off x="5349240" y="2071212"/>
+            <a:ext cx="6659575" cy="3693983"/>
           </a:xfrm>
           <a:prstGeom prst="rect">
             <a:avLst/>
@@ -15699,14 +16467,14 @@
       </p:pic>
       <p:sp>
         <p:nvSpPr>
-          <p:cNvPr id="4" name="Text 1"/>
+          <p:cNvPr id="6" name="Text 3"/>
           <p:cNvSpPr/>
           <p:nvPr/>
         </p:nvSpPr>
         <p:spPr>
           <a:xfrm>
-            <a:off x="5349240" y="1005840"/>
-            <a:ext cx="6522415" cy="731520"/>
+            <a:off x="5349240" y="6089904"/>
+            <a:ext cx="6659575" cy="347472"/>
           </a:xfrm>
           <a:prstGeom prst="rect">
             <a:avLst/>
@@ -15715,68 +16483,24 @@
           <a:ln/>
         </p:spPr>
         <p:txBody>
-          <a:bodyPr wrap="square" lIns="0" tIns="0" rIns="0" bIns="0" rtlCol="0" anchor="ctr">
-            <a:normAutofit/>
-          </a:bodyPr>
+          <a:bodyPr wrap="square" lIns="0" tIns="0" rIns="0" bIns="0" rtlCol="0" anchor="ctr"/>
           <a:lstStyle/>
           <a:p>
             <a:pPr algn="ctr" indent="0" marL="0">
               <a:buNone/>
             </a:pPr>
             <a:r>
-              <a:rPr lang="en-US" sz="3600" b="1" dirty="0">
-                <a:solidFill>
-                  <a:srgbClr val="990011"/>
+              <a:rPr lang="en-US" sz="1600" i="1" dirty="0">
+                <a:solidFill>
+                  <a:srgbClr val="555555"/>
                 </a:solidFill>
                 <a:latin typeface="Times New Roman" pitchFamily="34" charset="0"/>
                 <a:ea typeface="Times New Roman" pitchFamily="34" charset="-122"/>
                 <a:cs typeface="Times New Roman" pitchFamily="34" charset="-120"/>
               </a:rPr>
-              <a:t>Evaluation 2</a:t>
-            </a:r>
-            <a:endParaRPr lang="en-US" sz="3600" dirty="0"/>
-          </a:p>
-        </p:txBody>
-      </p:sp>
-      <p:sp>
-        <p:nvSpPr>
-          <p:cNvPr id="5" name="Text 2"/>
-          <p:cNvSpPr/>
-          <p:nvPr/>
-        </p:nvSpPr>
-        <p:spPr>
-          <a:xfrm>
-            <a:off x="5349240" y="1783080"/>
-            <a:ext cx="6522415" cy="4663440"/>
-          </a:xfrm>
-          <a:prstGeom prst="rect">
-            <a:avLst/>
-          </a:prstGeom>
-          <a:noFill/>
-          <a:ln/>
-        </p:spPr>
-        <p:txBody>
-          <a:bodyPr wrap="square" lIns="0" tIns="0" rIns="0" bIns="0" rtlCol="0" anchor="t"/>
-          <a:lstStyle/>
-          <a:p>
-            <a:pPr algn="l" indent="0" marL="0">
-              <a:spcAft>
-                <a:spcPts val="800"/>
-              </a:spcAft>
-              <a:buNone/>
-            </a:pPr>
-            <a:r>
-              <a:rPr lang="en-US" sz="4000" dirty="0">
-                <a:solidFill>
-                  <a:srgbClr val="111111"/>
-                </a:solidFill>
-                <a:latin typeface="Times New Roman" pitchFamily="34" charset="0"/>
-                <a:ea typeface="Times New Roman" pitchFamily="34" charset="-122"/>
-                <a:cs typeface="Times New Roman" pitchFamily="34" charset="-120"/>
-              </a:rPr>
-              <a:t>Give two rules during a volcanic eruption.</a:t>
-            </a:r>
-            <a:endParaRPr lang="en-US" sz="4000" dirty="0"/>
+              <a:t>Illustration: volcano monitoring</a:t>
+            </a:r>
+            <a:endParaRPr lang="en-US" sz="1600" dirty="0"/>
           </a:p>
         </p:txBody>
       </p:sp>
@@ -15886,7 +16610,7 @@
                 <a:ea typeface="Calibri" pitchFamily="34" charset="-122"/>
                 <a:cs typeface="Calibri" pitchFamily="34" charset="-120"/>
               </a:rPr>
-              <a:t>FORMATIVE EVALUATION</a:t>
+              <a:t>BOARD SUMMARY</a:t>
             </a:r>
             <a:endParaRPr lang="en-US" sz="1400" dirty="0"/>
           </a:p>
@@ -15951,7 +16675,7 @@
                 <a:ea typeface="Times New Roman" pitchFamily="34" charset="-122"/>
                 <a:cs typeface="Times New Roman" pitchFamily="34" charset="-120"/>
               </a:rPr>
-              <a:t>Expected Answer</a:t>
+              <a:t>3. Adaptation and Mitigation Measures</a:t>
             </a:r>
             <a:endParaRPr lang="en-US" sz="3600" dirty="0"/>
           </a:p>
@@ -15985,7 +16709,7 @@
               <a:buNone/>
             </a:pPr>
             <a:r>
-              <a:rPr lang="en-US" sz="4000" dirty="0">
+              <a:rPr lang="en-US" sz="4000" b="1" dirty="0">
                 <a:solidFill>
                   <a:srgbClr val="111111"/>
                 </a:solidFill>
@@ -15993,7 +16717,61 @@
                 <a:ea typeface="Times New Roman" pitchFamily="34" charset="-122"/>
                 <a:cs typeface="Times New Roman" pitchFamily="34" charset="-120"/>
               </a:rPr>
-              <a:t>Obey warnings and leave the area away from lava paths.</a:t>
+              <a:t>Strong buildings: </a:t>
+            </a:r>
+            <a:pPr algn="l" indent="0" marL="0">
+              <a:spcAft>
+                <a:spcPts val="800"/>
+              </a:spcAft>
+              <a:buNone/>
+            </a:pPr>
+            <a:r>
+              <a:rPr lang="en-US" sz="4000" dirty="0">
+                <a:solidFill>
+                  <a:srgbClr val="111111"/>
+                </a:solidFill>
+                <a:latin typeface="Times New Roman" pitchFamily="34" charset="0"/>
+                <a:ea typeface="Times New Roman" pitchFamily="34" charset="-122"/>
+                <a:cs typeface="Times New Roman" pitchFamily="34" charset="-120"/>
+              </a:rPr>
+              <a:t>Buildings made to resist shaking save lives.</a:t>
+            </a:r>
+            <a:endParaRPr lang="en-US" sz="4000" dirty="0"/>
+          </a:p>
+          <a:p>
+            <a:pPr algn="l" indent="0" marL="0">
+              <a:spcAft>
+                <a:spcPts val="800"/>
+              </a:spcAft>
+              <a:buNone/>
+            </a:pPr>
+            <a:r>
+              <a:rPr lang="en-US" sz="4000" b="1" dirty="0">
+                <a:solidFill>
+                  <a:srgbClr val="111111"/>
+                </a:solidFill>
+                <a:latin typeface="Times New Roman" pitchFamily="34" charset="0"/>
+                <a:ea typeface="Times New Roman" pitchFamily="34" charset="-122"/>
+                <a:cs typeface="Times New Roman" pitchFamily="34" charset="-120"/>
+              </a:rPr>
+              <a:t>Land-use planning: </a:t>
+            </a:r>
+            <a:pPr algn="l" indent="0" marL="0">
+              <a:spcAft>
+                <a:spcPts val="800"/>
+              </a:spcAft>
+              <a:buNone/>
+            </a:pPr>
+            <a:r>
+              <a:rPr lang="en-US" sz="4000" dirty="0">
+                <a:solidFill>
+                  <a:srgbClr val="111111"/>
+                </a:solidFill>
+                <a:latin typeface="Times New Roman" pitchFamily="34" charset="0"/>
+                <a:ea typeface="Times New Roman" pitchFamily="34" charset="-122"/>
+                <a:cs typeface="Times New Roman" pitchFamily="34" charset="-120"/>
+              </a:rPr>
+              <a:t>People do not build in valleys where lava and gases flow.</a:t>
             </a:r>
             <a:endParaRPr lang="en-US" sz="4000" dirty="0"/>
           </a:p>
@@ -16105,15 +16883,115 @@
                 <a:ea typeface="Calibri" pitchFamily="34" charset="-122"/>
                 <a:cs typeface="Calibri" pitchFamily="34" charset="-120"/>
               </a:rPr>
-              <a:t>REMEDIATION</a:t>
+              <a:t>BOARD SUMMARY</a:t>
             </a:r>
             <a:endParaRPr lang="en-US" sz="1400" dirty="0"/>
+          </a:p>
+        </p:txBody>
+      </p:sp>
+      <p:sp>
+        <p:nvSpPr>
+          <p:cNvPr id="3" name="Text 1"/>
+          <p:cNvSpPr/>
+          <p:nvPr/>
+        </p:nvSpPr>
+        <p:spPr>
+          <a:xfrm>
+            <a:off x="365760" y="1005840"/>
+            <a:ext cx="11460175" cy="731520"/>
+          </a:xfrm>
+          <a:prstGeom prst="rect">
+            <a:avLst/>
+          </a:prstGeom>
+          <a:noFill/>
+          <a:ln/>
+        </p:spPr>
+        <p:txBody>
+          <a:bodyPr wrap="square" lIns="0" tIns="0" rIns="0" bIns="0" rtlCol="0" anchor="ctr">
+            <a:normAutofit/>
+          </a:bodyPr>
+          <a:lstStyle/>
+          <a:p>
+            <a:pPr algn="ctr" indent="0" marL="0">
+              <a:buNone/>
+            </a:pPr>
+            <a:r>
+              <a:rPr lang="en-US" sz="3600" b="1" dirty="0">
+                <a:solidFill>
+                  <a:srgbClr val="990011"/>
+                </a:solidFill>
+                <a:latin typeface="Times New Roman" pitchFamily="34" charset="0"/>
+                <a:ea typeface="Times New Roman" pitchFamily="34" charset="-122"/>
+                <a:cs typeface="Times New Roman" pitchFamily="34" charset="-120"/>
+              </a:rPr>
+              <a:t>3. Adaptation and Mitigation Measures</a:t>
+            </a:r>
+            <a:endParaRPr lang="en-US" sz="3600" dirty="0"/>
+          </a:p>
+        </p:txBody>
+      </p:sp>
+      <p:sp>
+        <p:nvSpPr>
+          <p:cNvPr id="4" name="Text 2"/>
+          <p:cNvSpPr/>
+          <p:nvPr/>
+        </p:nvSpPr>
+        <p:spPr>
+          <a:xfrm>
+            <a:off x="365760" y="1783080"/>
+            <a:ext cx="4846320" cy="4617720"/>
+          </a:xfrm>
+          <a:prstGeom prst="rect">
+            <a:avLst/>
+          </a:prstGeom>
+          <a:noFill/>
+          <a:ln/>
+        </p:spPr>
+        <p:txBody>
+          <a:bodyPr wrap="square" lIns="0" tIns="0" rIns="0" bIns="0" rtlCol="0" anchor="t"/>
+          <a:lstStyle/>
+          <a:p>
+            <a:pPr algn="l" indent="0" marL="0">
+              <a:spcAft>
+                <a:spcPts val="800"/>
+              </a:spcAft>
+              <a:buNone/>
+            </a:pPr>
+            <a:r>
+              <a:rPr lang="en-US" sz="3600" b="1" dirty="0">
+                <a:solidFill>
+                  <a:srgbClr val="111111"/>
+                </a:solidFill>
+                <a:latin typeface="Times New Roman" pitchFamily="34" charset="0"/>
+                <a:ea typeface="Times New Roman" pitchFamily="34" charset="-122"/>
+                <a:cs typeface="Times New Roman" pitchFamily="34" charset="-120"/>
+              </a:rPr>
+              <a:t>Degassing: </a:t>
+            </a:r>
+            <a:pPr algn="l" indent="0" marL="0">
+              <a:spcAft>
+                <a:spcPts val="800"/>
+              </a:spcAft>
+              <a:buNone/>
+            </a:pPr>
+            <a:r>
+              <a:rPr lang="en-US" sz="3600" dirty="0">
+                <a:solidFill>
+                  <a:srgbClr val="111111"/>
+                </a:solidFill>
+                <a:latin typeface="Times New Roman" pitchFamily="34" charset="0"/>
+                <a:ea typeface="Times New Roman" pitchFamily="34" charset="-122"/>
+                <a:cs typeface="Times New Roman" pitchFamily="34" charset="-120"/>
+              </a:rPr>
+              <a:t>Pipes remove the gas from Lake Nyos and Lake Monoun.</a:t>
+            </a:r>
+            <a:endParaRPr lang="en-US" sz="3600" dirty="0"/>
           </a:p>
         </p:txBody>
       </p:sp>
       <p:pic>
         <p:nvPicPr>
-          <p:cNvPr id="3" name="Image 0" descr="/home/claude/f4/img/minesec_sheet.png">    </p:cNvPr>
+          <p:cNvPr id="5" name="Image 0" descr="/home/claude/f4/img/v2/f4_nyos.jpg">    </p:cNvPr>
           <p:cNvPicPr>
             <a:picLocks noChangeAspect="1"/>
           </p:cNvPicPr>
@@ -16127,8 +17005,8 @@
         </p:blipFill>
         <p:spPr>
           <a:xfrm>
-            <a:off x="0" y="658368"/>
-            <a:ext cx="2468880" cy="5833872"/>
+            <a:off x="5349240" y="2071212"/>
+            <a:ext cx="6659575" cy="3693983"/>
           </a:xfrm>
           <a:prstGeom prst="rect">
             <a:avLst/>
@@ -16137,14 +17015,14 @@
       </p:pic>
       <p:sp>
         <p:nvSpPr>
-          <p:cNvPr id="4" name="Text 1"/>
+          <p:cNvPr id="6" name="Text 3"/>
           <p:cNvSpPr/>
           <p:nvPr/>
         </p:nvSpPr>
         <p:spPr>
           <a:xfrm>
-            <a:off x="2697480" y="1005840"/>
-            <a:ext cx="9174175" cy="731520"/>
+            <a:off x="5349240" y="6089904"/>
+            <a:ext cx="6659575" cy="347472"/>
           </a:xfrm>
           <a:prstGeom prst="rect">
             <a:avLst/>
@@ -16153,134 +17031,24 @@
           <a:ln/>
         </p:spPr>
         <p:txBody>
-          <a:bodyPr wrap="square" lIns="0" tIns="0" rIns="0" bIns="0" rtlCol="0" anchor="ctr">
-            <a:normAutofit/>
-          </a:bodyPr>
+          <a:bodyPr wrap="square" lIns="0" tIns="0" rIns="0" bIns="0" rtlCol="0" anchor="ctr"/>
           <a:lstStyle/>
           <a:p>
             <a:pPr algn="ctr" indent="0" marL="0">
               <a:buNone/>
             </a:pPr>
             <a:r>
-              <a:rPr lang="en-US" sz="3600" b="1" dirty="0">
-                <a:solidFill>
-                  <a:srgbClr val="990011"/>
+              <a:rPr lang="en-US" sz="1600" i="1" dirty="0">
+                <a:solidFill>
+                  <a:srgbClr val="555555"/>
                 </a:solidFill>
                 <a:latin typeface="Times New Roman" pitchFamily="34" charset="0"/>
                 <a:ea typeface="Times New Roman" pitchFamily="34" charset="-122"/>
                 <a:cs typeface="Times New Roman" pitchFamily="34" charset="-120"/>
               </a:rPr>
-              <a:t>Remediation</a:t>
-            </a:r>
-            <a:endParaRPr lang="en-US" sz="3600" dirty="0"/>
-          </a:p>
-        </p:txBody>
-      </p:sp>
-      <p:sp>
-        <p:nvSpPr>
-          <p:cNvPr id="5" name="Text 2"/>
-          <p:cNvSpPr/>
-          <p:nvPr/>
-        </p:nvSpPr>
-        <p:spPr>
-          <a:xfrm>
-            <a:off x="2697480" y="1783080"/>
-            <a:ext cx="9174175" cy="4663440"/>
-          </a:xfrm>
-          <a:prstGeom prst="rect">
-            <a:avLst/>
-          </a:prstGeom>
-          <a:noFill/>
-          <a:ln/>
-        </p:spPr>
-        <p:txBody>
-          <a:bodyPr wrap="square" lIns="0" tIns="0" rIns="0" bIns="0" rtlCol="0" anchor="t"/>
-          <a:lstStyle/>
-          <a:p>
-            <a:pPr algn="l" indent="0" marL="0">
-              <a:spcAft>
-                <a:spcPts val="800"/>
-              </a:spcAft>
-              <a:buNone/>
-            </a:pPr>
-            <a:r>
-              <a:rPr lang="en-US" sz="4000" b="1" dirty="0">
-                <a:solidFill>
-                  <a:srgbClr val="111111"/>
-                </a:solidFill>
-                <a:latin typeface="Times New Roman" pitchFamily="34" charset="0"/>
-                <a:ea typeface="Times New Roman" pitchFamily="34" charset="-122"/>
-                <a:cs typeface="Times New Roman" pitchFamily="34" charset="-120"/>
-              </a:rPr>
-              <a:t>Fill in the blanks:</a:t>
-            </a:r>
-            <a:endParaRPr lang="en-US" sz="4000" dirty="0"/>
-          </a:p>
-          <a:p>
-            <a:pPr algn="l" marL="342900" indent="-342900">
-              <a:spcAft>
-                <a:spcPts val="800"/>
-              </a:spcAft>
-              <a:buSzPct val="100000"/>
-              <a:buFont typeface="+mj-lt"/>
-              <a:buAutoNum type="arabicPeriod" startAt="1"/>
-            </a:pPr>
-            <a:r>
-              <a:rPr lang="en-US" sz="4000" dirty="0">
-                <a:solidFill>
-                  <a:srgbClr val="111111"/>
-                </a:solidFill>
-                <a:latin typeface="Times New Roman" pitchFamily="34" charset="0"/>
-                <a:ea typeface="Times New Roman" pitchFamily="34" charset="-122"/>
-                <a:cs typeface="Times New Roman" pitchFamily="34" charset="-120"/>
-              </a:rPr>
-              <a:t>During an earthquake, we drop, cover and ______ on.</a:t>
-            </a:r>
-            <a:endParaRPr lang="en-US" sz="4000" dirty="0"/>
-          </a:p>
-          <a:p>
-            <a:pPr algn="l" marL="342900" indent="-342900">
-              <a:spcAft>
-                <a:spcPts val="800"/>
-              </a:spcAft>
-              <a:buSzPct val="100000"/>
-              <a:buFont typeface="+mj-lt"/>
-              <a:buAutoNum type="arabicPeriod" startAt="1"/>
-            </a:pPr>
-            <a:r>
-              <a:rPr lang="en-US" sz="4000" dirty="0">
-                <a:solidFill>
-                  <a:srgbClr val="111111"/>
-                </a:solidFill>
-                <a:latin typeface="Times New Roman" pitchFamily="34" charset="0"/>
-                <a:ea typeface="Times New Roman" pitchFamily="34" charset="-122"/>
-                <a:cs typeface="Times New Roman" pitchFamily="34" charset="-120"/>
-              </a:rPr>
-              <a:t>Leaving a dangerous area is ______.</a:t>
-            </a:r>
-            <a:endParaRPr lang="en-US" sz="4000" dirty="0"/>
-          </a:p>
-          <a:p>
-            <a:pPr algn="l" marL="342900" indent="-342900">
-              <a:spcAft>
-                <a:spcPts val="800"/>
-              </a:spcAft>
-              <a:buSzPct val="100000"/>
-              <a:buFont typeface="+mj-lt"/>
-              <a:buAutoNum type="arabicPeriod" startAt="1"/>
-            </a:pPr>
-            <a:r>
-              <a:rPr lang="en-US" sz="4000" dirty="0">
-                <a:solidFill>
-                  <a:srgbClr val="111111"/>
-                </a:solidFill>
-                <a:latin typeface="Times New Roman" pitchFamily="34" charset="0"/>
-                <a:ea typeface="Times New Roman" pitchFamily="34" charset="-122"/>
-                <a:cs typeface="Times New Roman" pitchFamily="34" charset="-120"/>
-              </a:rPr>
-              <a:t>Scientists watch volcanoes to give ______.</a:t>
-            </a:r>
-            <a:endParaRPr lang="en-US" sz="4000" dirty="0"/>
+              <a:t>Illustration: Lake Nyos</a:t>
+            </a:r>
+            <a:endParaRPr lang="en-US" sz="1600" dirty="0"/>
           </a:p>
         </p:txBody>
       </p:sp>
@@ -16390,7 +17158,7 @@
                 <a:ea typeface="Calibri" pitchFamily="34" charset="-122"/>
                 <a:cs typeface="Calibri" pitchFamily="34" charset="-120"/>
               </a:rPr>
-              <a:t>HOMEWORK</a:t>
+              <a:t>BOARD SUMMARY</a:t>
             </a:r>
             <a:endParaRPr lang="en-US" sz="1400" dirty="0"/>
           </a:p>
@@ -16455,7 +17223,7 @@
                 <a:ea typeface="Times New Roman" pitchFamily="34" charset="-122"/>
                 <a:cs typeface="Times New Roman" pitchFamily="34" charset="-120"/>
               </a:rPr>
-              <a:t>Homework</a:t>
+              <a:t>3. Adaptation and Mitigation Measures</a:t>
             </a:r>
             <a:endParaRPr lang="en-US" sz="3600" dirty="0"/>
           </a:p>
@@ -16489,7 +17257,7 @@
               <a:buNone/>
             </a:pPr>
             <a:r>
-              <a:rPr lang="en-US" sz="4000" dirty="0">
+              <a:rPr lang="en-US" sz="4000" b="1" dirty="0">
                 <a:solidFill>
                   <a:srgbClr val="111111"/>
                 </a:solidFill>
@@ -16497,7 +17265,24 @@
                 <a:ea typeface="Times New Roman" pitchFamily="34" charset="-122"/>
                 <a:cs typeface="Times New Roman" pitchFamily="34" charset="-120"/>
               </a:rPr>
-              <a:t>Prepare a list of five items to take in an emergency bag.</a:t>
+              <a:t>Education: </a:t>
+            </a:r>
+            <a:pPr algn="l" indent="0" marL="0">
+              <a:spcAft>
+                <a:spcPts val="800"/>
+              </a:spcAft>
+              <a:buNone/>
+            </a:pPr>
+            <a:r>
+              <a:rPr lang="en-US" sz="4000" dirty="0">
+                <a:solidFill>
+                  <a:srgbClr val="111111"/>
+                </a:solidFill>
+                <a:latin typeface="Times New Roman" pitchFamily="34" charset="0"/>
+                <a:ea typeface="Times New Roman" pitchFamily="34" charset="-122"/>
+                <a:cs typeface="Times New Roman" pitchFamily="34" charset="-120"/>
+              </a:rPr>
+              <a:t>People learn safety drills and first aid, as the Red Cross teaches.</a:t>
             </a:r>
             <a:endParaRPr lang="en-US" sz="4000" dirty="0"/>
           </a:p>
@@ -16609,6 +17394,1605 @@
                 <a:ea typeface="Calibri" pitchFamily="34" charset="-122"/>
                 <a:cs typeface="Calibri" pitchFamily="34" charset="-120"/>
               </a:rPr>
+              <a:t>FORMATIVE EVALUATION</a:t>
+            </a:r>
+            <a:endParaRPr lang="en-US" sz="1400" dirty="0"/>
+          </a:p>
+        </p:txBody>
+      </p:sp>
+      <p:pic>
+        <p:nvPicPr>
+          <p:cNvPr id="3" name="Image 0" descr="/home/claude/f4/img/minesec_sheet.png">    </p:cNvPr>
+          <p:cNvPicPr>
+            <a:picLocks noChangeAspect="1"/>
+          </p:cNvPicPr>
+          <p:nvPr/>
+        </p:nvPicPr>
+        <p:blipFill>
+          <a:blip r:embed="rId1"/>
+          <a:stretch>
+            <a:fillRect/>
+          </a:stretch>
+        </p:blipFill>
+        <p:spPr>
+          <a:xfrm>
+            <a:off x="0" y="658368"/>
+            <a:ext cx="5120640" cy="5833872"/>
+          </a:xfrm>
+          <a:prstGeom prst="rect">
+            <a:avLst/>
+          </a:prstGeom>
+        </p:spPr>
+      </p:pic>
+      <p:sp>
+        <p:nvSpPr>
+          <p:cNvPr id="4" name="Text 1"/>
+          <p:cNvSpPr/>
+          <p:nvPr/>
+        </p:nvSpPr>
+        <p:spPr>
+          <a:xfrm>
+            <a:off x="5349240" y="1005840"/>
+            <a:ext cx="6522415" cy="731520"/>
+          </a:xfrm>
+          <a:prstGeom prst="rect">
+            <a:avLst/>
+          </a:prstGeom>
+          <a:noFill/>
+          <a:ln/>
+        </p:spPr>
+        <p:txBody>
+          <a:bodyPr wrap="square" lIns="0" tIns="0" rIns="0" bIns="0" rtlCol="0" anchor="ctr">
+            <a:normAutofit/>
+          </a:bodyPr>
+          <a:lstStyle/>
+          <a:p>
+            <a:pPr algn="ctr" indent="0" marL="0">
+              <a:buNone/>
+            </a:pPr>
+            <a:r>
+              <a:rPr lang="en-US" sz="3600" b="1" dirty="0">
+                <a:solidFill>
+                  <a:srgbClr val="990011"/>
+                </a:solidFill>
+                <a:latin typeface="Times New Roman" pitchFamily="34" charset="0"/>
+                <a:ea typeface="Times New Roman" pitchFamily="34" charset="-122"/>
+                <a:cs typeface="Times New Roman" pitchFamily="34" charset="-120"/>
+              </a:rPr>
+              <a:t>Evaluation 1</a:t>
+            </a:r>
+            <a:endParaRPr lang="en-US" sz="3600" dirty="0"/>
+          </a:p>
+        </p:txBody>
+      </p:sp>
+      <p:sp>
+        <p:nvSpPr>
+          <p:cNvPr id="5" name="Text 2"/>
+          <p:cNvSpPr/>
+          <p:nvPr/>
+        </p:nvSpPr>
+        <p:spPr>
+          <a:xfrm>
+            <a:off x="5349240" y="1783080"/>
+            <a:ext cx="6522415" cy="4663440"/>
+          </a:xfrm>
+          <a:prstGeom prst="rect">
+            <a:avLst/>
+          </a:prstGeom>
+          <a:noFill/>
+          <a:ln/>
+        </p:spPr>
+        <p:txBody>
+          <a:bodyPr wrap="square" lIns="0" tIns="0" rIns="0" bIns="0" rtlCol="0" anchor="t"/>
+          <a:lstStyle/>
+          <a:p>
+            <a:pPr algn="l" indent="0" marL="0">
+              <a:spcAft>
+                <a:spcPts val="800"/>
+              </a:spcAft>
+              <a:buNone/>
+            </a:pPr>
+            <a:r>
+              <a:rPr lang="en-US" sz="4000" dirty="0">
+                <a:solidFill>
+                  <a:srgbClr val="111111"/>
+                </a:solidFill>
+                <a:latin typeface="Times New Roman" pitchFamily="34" charset="0"/>
+                <a:ea typeface="Times New Roman" pitchFamily="34" charset="-122"/>
+                <a:cs typeface="Times New Roman" pitchFamily="34" charset="-120"/>
+              </a:rPr>
+              <a:t>Give two rules during an earthquake.</a:t>
+            </a:r>
+            <a:endParaRPr lang="en-US" sz="4000" dirty="0"/>
+          </a:p>
+        </p:txBody>
+      </p:sp>
+      <p:sp>
+        <p:nvSpPr>
+          <p:cNvPr id="25" name="Slide Number Placeholder 0"/>
+          <p:cNvSpPr>
+            <a:spLocks noGrp="1"/>
+          </p:cNvSpPr>
+          <p:nvPr>
+            <p:ph type="sldNum" sz="quarter" idx="4294967295"/>
+          </p:nvPr>
+        </p:nvSpPr>
+        <p:spPr>
+          <a:xfrm>
+            <a:off x="27432" y="91440"/>
+            <a:ext cx="585216" cy="475488"/>
+          </a:xfrm>
+          <a:prstGeom prst="rect">
+            <a:avLst/>
+          </a:prstGeom>
+          <a:extLst>
+            <a:ext uri="{C572A759-6A51-4108-AA02-DFA0A04FC94B}">
+              <ma14:wrappingTextBoxFlag xmlns:ma14="http://schemas.microsoft.com/office/mac/drawingml/2011/main" val="0"/>
+            </a:ext>
+          </a:extLst>
+        </p:spPr>
+        <p:txBody>
+          <a:bodyPr/>
+          <a:lstStyle>
+            <a:lvl1pPr>
+              <a:defRPr sz="2000">
+                <a:solidFill>
+                  <a:srgbClr val="FFFFFF"/>
+                </a:solidFill>
+                <a:latin typeface="Calibri"/>
+                <a:ea typeface="Calibri"/>
+                <a:cs typeface="Calibri"/>
+              </a:defRPr>
+            </a:lvl1pPr>
+          </a:lstStyle>
+          <a:p>
+            <a:pPr algn="ctr"/>
+            <a:fld id="{F7021451-1387-4CA6-816F-3879F97B5CBC}" type="slidenum">
+              <a:rPr b="1" lang="en-US"/>
+              <a:t>47</a:t>
+            </a:fld>
+            <a:endParaRPr lang="en-US"/>
+          </a:p>
+        </p:txBody>
+      </p:sp>
+    </p:spTree>
+  </p:cSld>
+  <p:clrMapOvr>
+    <a:masterClrMapping/>
+  </p:clrMapOvr>
+</p:sld>
+</file>
+
+<file path=ppt/slides/slide48.xml><?xml version="1.0" encoding="utf-8"?>
+<p:sld xmlns:a="http://schemas.openxmlformats.org/drawingml/2006/main" xmlns:r="http://schemas.openxmlformats.org/officeDocument/2006/relationships" xmlns:p="http://schemas.openxmlformats.org/presentationml/2006/main">
+  <p:cSld name="Slide 48">
+    <p:spTree>
+      <p:nvGrpSpPr>
+        <p:cNvPr id="1" name=""/>
+        <p:cNvGrpSpPr/>
+        <p:nvPr/>
+      </p:nvGrpSpPr>
+      <p:grpSpPr>
+        <a:xfrm>
+          <a:off x="0" y="0"/>
+          <a:ext cx="0" cy="0"/>
+          <a:chOff x="0" y="0"/>
+          <a:chExt cx="0" cy="0"/>
+        </a:xfrm>
+      </p:grpSpPr>
+      <p:sp>
+        <p:nvSpPr>
+          <p:cNvPr id="2" name="Text 0"/>
+          <p:cNvSpPr/>
+          <p:nvPr/>
+        </p:nvSpPr>
+        <p:spPr>
+          <a:xfrm>
+            <a:off x="457200" y="713232"/>
+            <a:ext cx="11368735" cy="274320"/>
+          </a:xfrm>
+          <a:prstGeom prst="rect">
+            <a:avLst/>
+          </a:prstGeom>
+          <a:noFill/>
+          <a:ln/>
+        </p:spPr>
+        <p:txBody>
+          <a:bodyPr wrap="square" lIns="0" tIns="0" rIns="0" bIns="0" rtlCol="0" anchor="ctr"/>
+          <a:lstStyle/>
+          <a:p>
+            <a:pPr algn="r" indent="0" marL="0">
+              <a:buNone/>
+            </a:pPr>
+            <a:r>
+              <a:rPr lang="en-US" sz="1400" b="1" dirty="0">
+                <a:solidFill>
+                  <a:srgbClr val="1C3F6E"/>
+                </a:solidFill>
+                <a:latin typeface="Calibri" pitchFamily="34" charset="0"/>
+                <a:ea typeface="Calibri" pitchFamily="34" charset="-122"/>
+                <a:cs typeface="Calibri" pitchFamily="34" charset="-120"/>
+              </a:rPr>
+              <a:t>FORMATIVE EVALUATION</a:t>
+            </a:r>
+            <a:endParaRPr lang="en-US" sz="1400" dirty="0"/>
+          </a:p>
+        </p:txBody>
+      </p:sp>
+      <p:pic>
+        <p:nvPicPr>
+          <p:cNvPr id="3" name="Image 0" descr="/home/claude/f4/img/minesec_sheet.png">    </p:cNvPr>
+          <p:cNvPicPr>
+            <a:picLocks noChangeAspect="1"/>
+          </p:cNvPicPr>
+          <p:nvPr/>
+        </p:nvPicPr>
+        <p:blipFill>
+          <a:blip r:embed="rId1"/>
+          <a:stretch>
+            <a:fillRect/>
+          </a:stretch>
+        </p:blipFill>
+        <p:spPr>
+          <a:xfrm>
+            <a:off x="0" y="658368"/>
+            <a:ext cx="5120640" cy="5833872"/>
+          </a:xfrm>
+          <a:prstGeom prst="rect">
+            <a:avLst/>
+          </a:prstGeom>
+        </p:spPr>
+      </p:pic>
+      <p:sp>
+        <p:nvSpPr>
+          <p:cNvPr id="4" name="Text 1"/>
+          <p:cNvSpPr/>
+          <p:nvPr/>
+        </p:nvSpPr>
+        <p:spPr>
+          <a:xfrm>
+            <a:off x="5349240" y="1005840"/>
+            <a:ext cx="6522415" cy="731520"/>
+          </a:xfrm>
+          <a:prstGeom prst="rect">
+            <a:avLst/>
+          </a:prstGeom>
+          <a:noFill/>
+          <a:ln/>
+        </p:spPr>
+        <p:txBody>
+          <a:bodyPr wrap="square" lIns="0" tIns="0" rIns="0" bIns="0" rtlCol="0" anchor="ctr">
+            <a:normAutofit/>
+          </a:bodyPr>
+          <a:lstStyle/>
+          <a:p>
+            <a:pPr algn="ctr" indent="0" marL="0">
+              <a:buNone/>
+            </a:pPr>
+            <a:r>
+              <a:rPr lang="en-US" sz="3600" b="1" dirty="0">
+                <a:solidFill>
+                  <a:srgbClr val="990011"/>
+                </a:solidFill>
+                <a:latin typeface="Times New Roman" pitchFamily="34" charset="0"/>
+                <a:ea typeface="Times New Roman" pitchFamily="34" charset="-122"/>
+                <a:cs typeface="Times New Roman" pitchFamily="34" charset="-120"/>
+              </a:rPr>
+              <a:t>Expected Answer</a:t>
+            </a:r>
+            <a:endParaRPr lang="en-US" sz="3600" dirty="0"/>
+          </a:p>
+        </p:txBody>
+      </p:sp>
+      <p:sp>
+        <p:nvSpPr>
+          <p:cNvPr id="5" name="Text 2"/>
+          <p:cNvSpPr/>
+          <p:nvPr/>
+        </p:nvSpPr>
+        <p:spPr>
+          <a:xfrm>
+            <a:off x="5349240" y="1783080"/>
+            <a:ext cx="6522415" cy="4663440"/>
+          </a:xfrm>
+          <a:prstGeom prst="rect">
+            <a:avLst/>
+          </a:prstGeom>
+          <a:noFill/>
+          <a:ln/>
+        </p:spPr>
+        <p:txBody>
+          <a:bodyPr wrap="square" lIns="0" tIns="0" rIns="0" bIns="0" rtlCol="0" anchor="t"/>
+          <a:lstStyle/>
+          <a:p>
+            <a:pPr algn="l" indent="0" marL="0">
+              <a:spcAft>
+                <a:spcPts val="800"/>
+              </a:spcAft>
+              <a:buNone/>
+            </a:pPr>
+            <a:r>
+              <a:rPr lang="en-US" sz="4000" dirty="0">
+                <a:solidFill>
+                  <a:srgbClr val="111111"/>
+                </a:solidFill>
+                <a:latin typeface="Times New Roman" pitchFamily="34" charset="0"/>
+                <a:ea typeface="Times New Roman" pitchFamily="34" charset="-122"/>
+                <a:cs typeface="Times New Roman" pitchFamily="34" charset="-120"/>
+              </a:rPr>
+              <a:t>Drop, cover and hold on; stay away from windows.</a:t>
+            </a:r>
+            <a:endParaRPr lang="en-US" sz="4000" dirty="0"/>
+          </a:p>
+        </p:txBody>
+      </p:sp>
+      <p:sp>
+        <p:nvSpPr>
+          <p:cNvPr id="25" name="Slide Number Placeholder 0"/>
+          <p:cNvSpPr>
+            <a:spLocks noGrp="1"/>
+          </p:cNvSpPr>
+          <p:nvPr>
+            <p:ph type="sldNum" sz="quarter" idx="4294967295"/>
+          </p:nvPr>
+        </p:nvSpPr>
+        <p:spPr>
+          <a:xfrm>
+            <a:off x="27432" y="91440"/>
+            <a:ext cx="585216" cy="475488"/>
+          </a:xfrm>
+          <a:prstGeom prst="rect">
+            <a:avLst/>
+          </a:prstGeom>
+          <a:extLst>
+            <a:ext uri="{C572A759-6A51-4108-AA02-DFA0A04FC94B}">
+              <ma14:wrappingTextBoxFlag xmlns:ma14="http://schemas.microsoft.com/office/mac/drawingml/2011/main" val="0"/>
+            </a:ext>
+          </a:extLst>
+        </p:spPr>
+        <p:txBody>
+          <a:bodyPr/>
+          <a:lstStyle>
+            <a:lvl1pPr>
+              <a:defRPr sz="2000">
+                <a:solidFill>
+                  <a:srgbClr val="FFFFFF"/>
+                </a:solidFill>
+                <a:latin typeface="Calibri"/>
+                <a:ea typeface="Calibri"/>
+                <a:cs typeface="Calibri"/>
+              </a:defRPr>
+            </a:lvl1pPr>
+          </a:lstStyle>
+          <a:p>
+            <a:pPr algn="ctr"/>
+            <a:fld id="{F7021451-1387-4CA6-816F-3879F97B5CBC}" type="slidenum">
+              <a:rPr b="1" lang="en-US"/>
+              <a:t>48</a:t>
+            </a:fld>
+            <a:endParaRPr lang="en-US"/>
+          </a:p>
+        </p:txBody>
+      </p:sp>
+    </p:spTree>
+  </p:cSld>
+  <p:clrMapOvr>
+    <a:masterClrMapping/>
+  </p:clrMapOvr>
+</p:sld>
+</file>
+
+<file path=ppt/slides/slide49.xml><?xml version="1.0" encoding="utf-8"?>
+<p:sld xmlns:a="http://schemas.openxmlformats.org/drawingml/2006/main" xmlns:r="http://schemas.openxmlformats.org/officeDocument/2006/relationships" xmlns:p="http://schemas.openxmlformats.org/presentationml/2006/main">
+  <p:cSld name="Slide 49">
+    <p:spTree>
+      <p:nvGrpSpPr>
+        <p:cNvPr id="1" name=""/>
+        <p:cNvGrpSpPr/>
+        <p:nvPr/>
+      </p:nvGrpSpPr>
+      <p:grpSpPr>
+        <a:xfrm>
+          <a:off x="0" y="0"/>
+          <a:ext cx="0" cy="0"/>
+          <a:chOff x="0" y="0"/>
+          <a:chExt cx="0" cy="0"/>
+        </a:xfrm>
+      </p:grpSpPr>
+      <p:sp>
+        <p:nvSpPr>
+          <p:cNvPr id="2" name="Text 0"/>
+          <p:cNvSpPr/>
+          <p:nvPr/>
+        </p:nvSpPr>
+        <p:spPr>
+          <a:xfrm>
+            <a:off x="457200" y="713232"/>
+            <a:ext cx="11368735" cy="274320"/>
+          </a:xfrm>
+          <a:prstGeom prst="rect">
+            <a:avLst/>
+          </a:prstGeom>
+          <a:noFill/>
+          <a:ln/>
+        </p:spPr>
+        <p:txBody>
+          <a:bodyPr wrap="square" lIns="0" tIns="0" rIns="0" bIns="0" rtlCol="0" anchor="ctr"/>
+          <a:lstStyle/>
+          <a:p>
+            <a:pPr algn="r" indent="0" marL="0">
+              <a:buNone/>
+            </a:pPr>
+            <a:r>
+              <a:rPr lang="en-US" sz="1400" b="1" dirty="0">
+                <a:solidFill>
+                  <a:srgbClr val="1C3F6E"/>
+                </a:solidFill>
+                <a:latin typeface="Calibri" pitchFamily="34" charset="0"/>
+                <a:ea typeface="Calibri" pitchFamily="34" charset="-122"/>
+                <a:cs typeface="Calibri" pitchFamily="34" charset="-120"/>
+              </a:rPr>
+              <a:t>FORMATIVE EVALUATION</a:t>
+            </a:r>
+            <a:endParaRPr lang="en-US" sz="1400" dirty="0"/>
+          </a:p>
+        </p:txBody>
+      </p:sp>
+      <p:pic>
+        <p:nvPicPr>
+          <p:cNvPr id="3" name="Image 0" descr="/home/claude/f4/img/minesec_sheet.png">    </p:cNvPr>
+          <p:cNvPicPr>
+            <a:picLocks noChangeAspect="1"/>
+          </p:cNvPicPr>
+          <p:nvPr/>
+        </p:nvPicPr>
+        <p:blipFill>
+          <a:blip r:embed="rId1"/>
+          <a:stretch>
+            <a:fillRect/>
+          </a:stretch>
+        </p:blipFill>
+        <p:spPr>
+          <a:xfrm>
+            <a:off x="0" y="658368"/>
+            <a:ext cx="5120640" cy="5833872"/>
+          </a:xfrm>
+          <a:prstGeom prst="rect">
+            <a:avLst/>
+          </a:prstGeom>
+        </p:spPr>
+      </p:pic>
+      <p:sp>
+        <p:nvSpPr>
+          <p:cNvPr id="4" name="Text 1"/>
+          <p:cNvSpPr/>
+          <p:nvPr/>
+        </p:nvSpPr>
+        <p:spPr>
+          <a:xfrm>
+            <a:off x="5349240" y="1005840"/>
+            <a:ext cx="6522415" cy="731520"/>
+          </a:xfrm>
+          <a:prstGeom prst="rect">
+            <a:avLst/>
+          </a:prstGeom>
+          <a:noFill/>
+          <a:ln/>
+        </p:spPr>
+        <p:txBody>
+          <a:bodyPr wrap="square" lIns="0" tIns="0" rIns="0" bIns="0" rtlCol="0" anchor="ctr">
+            <a:normAutofit/>
+          </a:bodyPr>
+          <a:lstStyle/>
+          <a:p>
+            <a:pPr algn="ctr" indent="0" marL="0">
+              <a:buNone/>
+            </a:pPr>
+            <a:r>
+              <a:rPr lang="en-US" sz="3600" b="1" dirty="0">
+                <a:solidFill>
+                  <a:srgbClr val="990011"/>
+                </a:solidFill>
+                <a:latin typeface="Times New Roman" pitchFamily="34" charset="0"/>
+                <a:ea typeface="Times New Roman" pitchFamily="34" charset="-122"/>
+                <a:cs typeface="Times New Roman" pitchFamily="34" charset="-120"/>
+              </a:rPr>
+              <a:t>Evaluation 2</a:t>
+            </a:r>
+            <a:endParaRPr lang="en-US" sz="3600" dirty="0"/>
+          </a:p>
+        </p:txBody>
+      </p:sp>
+      <p:sp>
+        <p:nvSpPr>
+          <p:cNvPr id="5" name="Text 2"/>
+          <p:cNvSpPr/>
+          <p:nvPr/>
+        </p:nvSpPr>
+        <p:spPr>
+          <a:xfrm>
+            <a:off x="5349240" y="1783080"/>
+            <a:ext cx="6522415" cy="4663440"/>
+          </a:xfrm>
+          <a:prstGeom prst="rect">
+            <a:avLst/>
+          </a:prstGeom>
+          <a:noFill/>
+          <a:ln/>
+        </p:spPr>
+        <p:txBody>
+          <a:bodyPr wrap="square" lIns="0" tIns="0" rIns="0" bIns="0" rtlCol="0" anchor="t"/>
+          <a:lstStyle/>
+          <a:p>
+            <a:pPr algn="l" indent="0" marL="0">
+              <a:spcAft>
+                <a:spcPts val="800"/>
+              </a:spcAft>
+              <a:buNone/>
+            </a:pPr>
+            <a:r>
+              <a:rPr lang="en-US" sz="4000" dirty="0">
+                <a:solidFill>
+                  <a:srgbClr val="111111"/>
+                </a:solidFill>
+                <a:latin typeface="Times New Roman" pitchFamily="34" charset="0"/>
+                <a:ea typeface="Times New Roman" pitchFamily="34" charset="-122"/>
+                <a:cs typeface="Times New Roman" pitchFamily="34" charset="-120"/>
+              </a:rPr>
+              <a:t>Give two rules during a volcanic eruption.</a:t>
+            </a:r>
+            <a:endParaRPr lang="en-US" sz="4000" dirty="0"/>
+          </a:p>
+        </p:txBody>
+      </p:sp>
+      <p:sp>
+        <p:nvSpPr>
+          <p:cNvPr id="25" name="Slide Number Placeholder 0"/>
+          <p:cNvSpPr>
+            <a:spLocks noGrp="1"/>
+          </p:cNvSpPr>
+          <p:nvPr>
+            <p:ph type="sldNum" sz="quarter" idx="4294967295"/>
+          </p:nvPr>
+        </p:nvSpPr>
+        <p:spPr>
+          <a:xfrm>
+            <a:off x="27432" y="91440"/>
+            <a:ext cx="585216" cy="475488"/>
+          </a:xfrm>
+          <a:prstGeom prst="rect">
+            <a:avLst/>
+          </a:prstGeom>
+          <a:extLst>
+            <a:ext uri="{C572A759-6A51-4108-AA02-DFA0A04FC94B}">
+              <ma14:wrappingTextBoxFlag xmlns:ma14="http://schemas.microsoft.com/office/mac/drawingml/2011/main" val="0"/>
+            </a:ext>
+          </a:extLst>
+        </p:spPr>
+        <p:txBody>
+          <a:bodyPr/>
+          <a:lstStyle>
+            <a:lvl1pPr>
+              <a:defRPr sz="2000">
+                <a:solidFill>
+                  <a:srgbClr val="FFFFFF"/>
+                </a:solidFill>
+                <a:latin typeface="Calibri"/>
+                <a:ea typeface="Calibri"/>
+                <a:cs typeface="Calibri"/>
+              </a:defRPr>
+            </a:lvl1pPr>
+          </a:lstStyle>
+          <a:p>
+            <a:pPr algn="ctr"/>
+            <a:fld id="{F7021451-1387-4CA6-816F-3879F97B5CBC}" type="slidenum">
+              <a:rPr b="1" lang="en-US"/>
+              <a:t>49</a:t>
+            </a:fld>
+            <a:endParaRPr lang="en-US"/>
+          </a:p>
+        </p:txBody>
+      </p:sp>
+    </p:spTree>
+  </p:cSld>
+  <p:clrMapOvr>
+    <a:masterClrMapping/>
+  </p:clrMapOvr>
+</p:sld>
+</file>
+
+<file path=ppt/slides/slide5.xml><?xml version="1.0" encoding="utf-8"?>
+<p:sld xmlns:a="http://schemas.openxmlformats.org/drawingml/2006/main" xmlns:r="http://schemas.openxmlformats.org/officeDocument/2006/relationships" xmlns:p="http://schemas.openxmlformats.org/presentationml/2006/main">
+  <p:cSld name="Slide 5">
+    <p:spTree>
+      <p:nvGrpSpPr>
+        <p:cNvPr id="1" name=""/>
+        <p:cNvGrpSpPr/>
+        <p:nvPr/>
+      </p:nvGrpSpPr>
+      <p:grpSpPr>
+        <a:xfrm>
+          <a:off x="0" y="0"/>
+          <a:ext cx="0" cy="0"/>
+          <a:chOff x="0" y="0"/>
+          <a:chExt cx="0" cy="0"/>
+        </a:xfrm>
+      </p:grpSpPr>
+      <p:sp>
+        <p:nvSpPr>
+          <p:cNvPr id="2" name="Text 0"/>
+          <p:cNvSpPr/>
+          <p:nvPr/>
+        </p:nvSpPr>
+        <p:spPr>
+          <a:xfrm>
+            <a:off x="457200" y="713232"/>
+            <a:ext cx="11368735" cy="274320"/>
+          </a:xfrm>
+          <a:prstGeom prst="rect">
+            <a:avLst/>
+          </a:prstGeom>
+          <a:noFill/>
+          <a:ln/>
+        </p:spPr>
+        <p:txBody>
+          <a:bodyPr wrap="square" lIns="0" tIns="0" rIns="0" bIns="0" rtlCol="0" anchor="ctr"/>
+          <a:lstStyle/>
+          <a:p>
+            <a:pPr algn="r" indent="0" marL="0">
+              <a:buNone/>
+            </a:pPr>
+            <a:r>
+              <a:rPr lang="en-US" sz="1400" b="1" dirty="0">
+                <a:solidFill>
+                  <a:srgbClr val="1C3F6E"/>
+                </a:solidFill>
+                <a:latin typeface="Calibri" pitchFamily="34" charset="0"/>
+                <a:ea typeface="Calibri" pitchFamily="34" charset="-122"/>
+                <a:cs typeface="Calibri" pitchFamily="34" charset="-120"/>
+              </a:rPr>
+              <a:t>HOMEWORK CORRECTION</a:t>
+            </a:r>
+            <a:endParaRPr lang="en-US" sz="1400" dirty="0"/>
+          </a:p>
+        </p:txBody>
+      </p:sp>
+      <p:pic>
+        <p:nvPicPr>
+          <p:cNvPr id="3" name="Image 0" descr="/home/claude/f4/img/minesec_sheet.png">    </p:cNvPr>
+          <p:cNvPicPr>
+            <a:picLocks noChangeAspect="1"/>
+          </p:cNvPicPr>
+          <p:nvPr/>
+        </p:nvPicPr>
+        <p:blipFill>
+          <a:blip r:embed="rId1"/>
+          <a:stretch>
+            <a:fillRect/>
+          </a:stretch>
+        </p:blipFill>
+        <p:spPr>
+          <a:xfrm>
+            <a:off x="0" y="658368"/>
+            <a:ext cx="5120640" cy="5833872"/>
+          </a:xfrm>
+          <a:prstGeom prst="rect">
+            <a:avLst/>
+          </a:prstGeom>
+        </p:spPr>
+      </p:pic>
+      <p:sp>
+        <p:nvSpPr>
+          <p:cNvPr id="4" name="Text 1"/>
+          <p:cNvSpPr/>
+          <p:nvPr/>
+        </p:nvSpPr>
+        <p:spPr>
+          <a:xfrm>
+            <a:off x="5349240" y="1005840"/>
+            <a:ext cx="6522415" cy="731520"/>
+          </a:xfrm>
+          <a:prstGeom prst="rect">
+            <a:avLst/>
+          </a:prstGeom>
+          <a:noFill/>
+          <a:ln/>
+        </p:spPr>
+        <p:txBody>
+          <a:bodyPr wrap="square" lIns="0" tIns="0" rIns="0" bIns="0" rtlCol="0" anchor="ctr">
+            <a:normAutofit/>
+          </a:bodyPr>
+          <a:lstStyle/>
+          <a:p>
+            <a:pPr algn="ctr" indent="0" marL="0">
+              <a:buNone/>
+            </a:pPr>
+            <a:r>
+              <a:rPr lang="en-US" sz="3600" b="1" dirty="0">
+                <a:solidFill>
+                  <a:srgbClr val="990011"/>
+                </a:solidFill>
+                <a:latin typeface="Times New Roman" pitchFamily="34" charset="0"/>
+                <a:ea typeface="Times New Roman" pitchFamily="34" charset="-122"/>
+                <a:cs typeface="Times New Roman" pitchFamily="34" charset="-120"/>
+              </a:rPr>
+              <a:t>Correction: Possible Answer</a:t>
+            </a:r>
+            <a:endParaRPr lang="en-US" sz="3600" dirty="0"/>
+          </a:p>
+        </p:txBody>
+      </p:sp>
+      <p:sp>
+        <p:nvSpPr>
+          <p:cNvPr id="5" name="Text 2"/>
+          <p:cNvSpPr/>
+          <p:nvPr/>
+        </p:nvSpPr>
+        <p:spPr>
+          <a:xfrm>
+            <a:off x="5349240" y="1783080"/>
+            <a:ext cx="6522415" cy="4663440"/>
+          </a:xfrm>
+          <a:prstGeom prst="rect">
+            <a:avLst/>
+          </a:prstGeom>
+          <a:noFill/>
+          <a:ln/>
+        </p:spPr>
+        <p:txBody>
+          <a:bodyPr wrap="square" lIns="0" tIns="0" rIns="0" bIns="0" rtlCol="0" anchor="t"/>
+          <a:lstStyle/>
+          <a:p>
+            <a:pPr algn="l" indent="0" marL="0">
+              <a:spcAft>
+                <a:spcPts val="800"/>
+              </a:spcAft>
+              <a:buNone/>
+            </a:pPr>
+            <a:r>
+              <a:rPr lang="en-US" sz="4000" dirty="0">
+                <a:solidFill>
+                  <a:srgbClr val="111111"/>
+                </a:solidFill>
+                <a:latin typeface="Times New Roman" pitchFamily="34" charset="0"/>
+                <a:ea typeface="Times New Roman" pitchFamily="34" charset="-122"/>
+                <a:cs typeface="Times New Roman" pitchFamily="34" charset="-120"/>
+              </a:rPr>
+              <a:t>On 21 August 1986, a cloud of carbon dioxide gas came out of Lake Nyos. It flowed down the valleys and killed about 1,700 people and many animals. Today pipes remove the gas from the lake.</a:t>
+            </a:r>
+            <a:endParaRPr lang="en-US" sz="4000" dirty="0"/>
+          </a:p>
+        </p:txBody>
+      </p:sp>
+      <p:sp>
+        <p:nvSpPr>
+          <p:cNvPr id="25" name="Slide Number Placeholder 0"/>
+          <p:cNvSpPr>
+            <a:spLocks noGrp="1"/>
+          </p:cNvSpPr>
+          <p:nvPr>
+            <p:ph type="sldNum" sz="quarter" idx="4294967295"/>
+          </p:nvPr>
+        </p:nvSpPr>
+        <p:spPr>
+          <a:xfrm>
+            <a:off x="27432" y="91440"/>
+            <a:ext cx="585216" cy="475488"/>
+          </a:xfrm>
+          <a:prstGeom prst="rect">
+            <a:avLst/>
+          </a:prstGeom>
+          <a:extLst>
+            <a:ext uri="{C572A759-6A51-4108-AA02-DFA0A04FC94B}">
+              <ma14:wrappingTextBoxFlag xmlns:ma14="http://schemas.microsoft.com/office/mac/drawingml/2011/main" val="0"/>
+            </a:ext>
+          </a:extLst>
+        </p:spPr>
+        <p:txBody>
+          <a:bodyPr/>
+          <a:lstStyle>
+            <a:lvl1pPr>
+              <a:defRPr sz="2000">
+                <a:solidFill>
+                  <a:srgbClr val="FFFFFF"/>
+                </a:solidFill>
+                <a:latin typeface="Calibri"/>
+                <a:ea typeface="Calibri"/>
+                <a:cs typeface="Calibri"/>
+              </a:defRPr>
+            </a:lvl1pPr>
+          </a:lstStyle>
+          <a:p>
+            <a:pPr algn="ctr"/>
+            <a:fld id="{F7021451-1387-4CA6-816F-3879F97B5CBC}" type="slidenum">
+              <a:rPr b="1" lang="en-US"/>
+              <a:t>5</a:t>
+            </a:fld>
+            <a:endParaRPr lang="en-US"/>
+          </a:p>
+        </p:txBody>
+      </p:sp>
+    </p:spTree>
+  </p:cSld>
+  <p:clrMapOvr>
+    <a:masterClrMapping/>
+  </p:clrMapOvr>
+</p:sld>
+</file>
+
+<file path=ppt/slides/slide50.xml><?xml version="1.0" encoding="utf-8"?>
+<p:sld xmlns:a="http://schemas.openxmlformats.org/drawingml/2006/main" xmlns:r="http://schemas.openxmlformats.org/officeDocument/2006/relationships" xmlns:p="http://schemas.openxmlformats.org/presentationml/2006/main">
+  <p:cSld name="Slide 50">
+    <p:spTree>
+      <p:nvGrpSpPr>
+        <p:cNvPr id="1" name=""/>
+        <p:cNvGrpSpPr/>
+        <p:nvPr/>
+      </p:nvGrpSpPr>
+      <p:grpSpPr>
+        <a:xfrm>
+          <a:off x="0" y="0"/>
+          <a:ext cx="0" cy="0"/>
+          <a:chOff x="0" y="0"/>
+          <a:chExt cx="0" cy="0"/>
+        </a:xfrm>
+      </p:grpSpPr>
+      <p:sp>
+        <p:nvSpPr>
+          <p:cNvPr id="2" name="Text 0"/>
+          <p:cNvSpPr/>
+          <p:nvPr/>
+        </p:nvSpPr>
+        <p:spPr>
+          <a:xfrm>
+            <a:off x="457200" y="713232"/>
+            <a:ext cx="11368735" cy="274320"/>
+          </a:xfrm>
+          <a:prstGeom prst="rect">
+            <a:avLst/>
+          </a:prstGeom>
+          <a:noFill/>
+          <a:ln/>
+        </p:spPr>
+        <p:txBody>
+          <a:bodyPr wrap="square" lIns="0" tIns="0" rIns="0" bIns="0" rtlCol="0" anchor="ctr"/>
+          <a:lstStyle/>
+          <a:p>
+            <a:pPr algn="r" indent="0" marL="0">
+              <a:buNone/>
+            </a:pPr>
+            <a:r>
+              <a:rPr lang="en-US" sz="1400" b="1" dirty="0">
+                <a:solidFill>
+                  <a:srgbClr val="1C3F6E"/>
+                </a:solidFill>
+                <a:latin typeface="Calibri" pitchFamily="34" charset="0"/>
+                <a:ea typeface="Calibri" pitchFamily="34" charset="-122"/>
+                <a:cs typeface="Calibri" pitchFamily="34" charset="-120"/>
+              </a:rPr>
+              <a:t>FORMATIVE EVALUATION</a:t>
+            </a:r>
+            <a:endParaRPr lang="en-US" sz="1400" dirty="0"/>
+          </a:p>
+        </p:txBody>
+      </p:sp>
+      <p:pic>
+        <p:nvPicPr>
+          <p:cNvPr id="3" name="Image 0" descr="/home/claude/f4/img/minesec_sheet.png">    </p:cNvPr>
+          <p:cNvPicPr>
+            <a:picLocks noChangeAspect="1"/>
+          </p:cNvPicPr>
+          <p:nvPr/>
+        </p:nvPicPr>
+        <p:blipFill>
+          <a:blip r:embed="rId1"/>
+          <a:stretch>
+            <a:fillRect/>
+          </a:stretch>
+        </p:blipFill>
+        <p:spPr>
+          <a:xfrm>
+            <a:off x="0" y="658368"/>
+            <a:ext cx="5120640" cy="5833872"/>
+          </a:xfrm>
+          <a:prstGeom prst="rect">
+            <a:avLst/>
+          </a:prstGeom>
+        </p:spPr>
+      </p:pic>
+      <p:sp>
+        <p:nvSpPr>
+          <p:cNvPr id="4" name="Text 1"/>
+          <p:cNvSpPr/>
+          <p:nvPr/>
+        </p:nvSpPr>
+        <p:spPr>
+          <a:xfrm>
+            <a:off x="5349240" y="1005840"/>
+            <a:ext cx="6522415" cy="731520"/>
+          </a:xfrm>
+          <a:prstGeom prst="rect">
+            <a:avLst/>
+          </a:prstGeom>
+          <a:noFill/>
+          <a:ln/>
+        </p:spPr>
+        <p:txBody>
+          <a:bodyPr wrap="square" lIns="0" tIns="0" rIns="0" bIns="0" rtlCol="0" anchor="ctr">
+            <a:normAutofit/>
+          </a:bodyPr>
+          <a:lstStyle/>
+          <a:p>
+            <a:pPr algn="ctr" indent="0" marL="0">
+              <a:buNone/>
+            </a:pPr>
+            <a:r>
+              <a:rPr lang="en-US" sz="3600" b="1" dirty="0">
+                <a:solidFill>
+                  <a:srgbClr val="990011"/>
+                </a:solidFill>
+                <a:latin typeface="Times New Roman" pitchFamily="34" charset="0"/>
+                <a:ea typeface="Times New Roman" pitchFamily="34" charset="-122"/>
+                <a:cs typeface="Times New Roman" pitchFamily="34" charset="-120"/>
+              </a:rPr>
+              <a:t>Expected Answer</a:t>
+            </a:r>
+            <a:endParaRPr lang="en-US" sz="3600" dirty="0"/>
+          </a:p>
+        </p:txBody>
+      </p:sp>
+      <p:sp>
+        <p:nvSpPr>
+          <p:cNvPr id="5" name="Text 2"/>
+          <p:cNvSpPr/>
+          <p:nvPr/>
+        </p:nvSpPr>
+        <p:spPr>
+          <a:xfrm>
+            <a:off x="5349240" y="1783080"/>
+            <a:ext cx="6522415" cy="4663440"/>
+          </a:xfrm>
+          <a:prstGeom prst="rect">
+            <a:avLst/>
+          </a:prstGeom>
+          <a:noFill/>
+          <a:ln/>
+        </p:spPr>
+        <p:txBody>
+          <a:bodyPr wrap="square" lIns="0" tIns="0" rIns="0" bIns="0" rtlCol="0" anchor="t"/>
+          <a:lstStyle/>
+          <a:p>
+            <a:pPr algn="l" indent="0" marL="0">
+              <a:spcAft>
+                <a:spcPts val="800"/>
+              </a:spcAft>
+              <a:buNone/>
+            </a:pPr>
+            <a:r>
+              <a:rPr lang="en-US" sz="4000" dirty="0">
+                <a:solidFill>
+                  <a:srgbClr val="111111"/>
+                </a:solidFill>
+                <a:latin typeface="Times New Roman" pitchFamily="34" charset="0"/>
+                <a:ea typeface="Times New Roman" pitchFamily="34" charset="-122"/>
+                <a:cs typeface="Times New Roman" pitchFamily="34" charset="-120"/>
+              </a:rPr>
+              <a:t>Obey warnings and leave the area away from lava paths.</a:t>
+            </a:r>
+            <a:endParaRPr lang="en-US" sz="4000" dirty="0"/>
+          </a:p>
+        </p:txBody>
+      </p:sp>
+      <p:sp>
+        <p:nvSpPr>
+          <p:cNvPr id="25" name="Slide Number Placeholder 0"/>
+          <p:cNvSpPr>
+            <a:spLocks noGrp="1"/>
+          </p:cNvSpPr>
+          <p:nvPr>
+            <p:ph type="sldNum" sz="quarter" idx="4294967295"/>
+          </p:nvPr>
+        </p:nvSpPr>
+        <p:spPr>
+          <a:xfrm>
+            <a:off x="27432" y="91440"/>
+            <a:ext cx="585216" cy="475488"/>
+          </a:xfrm>
+          <a:prstGeom prst="rect">
+            <a:avLst/>
+          </a:prstGeom>
+          <a:extLst>
+            <a:ext uri="{C572A759-6A51-4108-AA02-DFA0A04FC94B}">
+              <ma14:wrappingTextBoxFlag xmlns:ma14="http://schemas.microsoft.com/office/mac/drawingml/2011/main" val="0"/>
+            </a:ext>
+          </a:extLst>
+        </p:spPr>
+        <p:txBody>
+          <a:bodyPr/>
+          <a:lstStyle>
+            <a:lvl1pPr>
+              <a:defRPr sz="2000">
+                <a:solidFill>
+                  <a:srgbClr val="FFFFFF"/>
+                </a:solidFill>
+                <a:latin typeface="Calibri"/>
+                <a:ea typeface="Calibri"/>
+                <a:cs typeface="Calibri"/>
+              </a:defRPr>
+            </a:lvl1pPr>
+          </a:lstStyle>
+          <a:p>
+            <a:pPr algn="ctr"/>
+            <a:fld id="{F7021451-1387-4CA6-816F-3879F97B5CBC}" type="slidenum">
+              <a:rPr b="1" lang="en-US"/>
+              <a:t>50</a:t>
+            </a:fld>
+            <a:endParaRPr lang="en-US"/>
+          </a:p>
+        </p:txBody>
+      </p:sp>
+    </p:spTree>
+  </p:cSld>
+  <p:clrMapOvr>
+    <a:masterClrMapping/>
+  </p:clrMapOvr>
+</p:sld>
+</file>
+
+<file path=ppt/slides/slide51.xml><?xml version="1.0" encoding="utf-8"?>
+<p:sld xmlns:a="http://schemas.openxmlformats.org/drawingml/2006/main" xmlns:r="http://schemas.openxmlformats.org/officeDocument/2006/relationships" xmlns:p="http://schemas.openxmlformats.org/presentationml/2006/main">
+  <p:cSld name="Slide 51">
+    <p:spTree>
+      <p:nvGrpSpPr>
+        <p:cNvPr id="1" name=""/>
+        <p:cNvGrpSpPr/>
+        <p:nvPr/>
+      </p:nvGrpSpPr>
+      <p:grpSpPr>
+        <a:xfrm>
+          <a:off x="0" y="0"/>
+          <a:ext cx="0" cy="0"/>
+          <a:chOff x="0" y="0"/>
+          <a:chExt cx="0" cy="0"/>
+        </a:xfrm>
+      </p:grpSpPr>
+      <p:sp>
+        <p:nvSpPr>
+          <p:cNvPr id="2" name="Text 0"/>
+          <p:cNvSpPr/>
+          <p:nvPr/>
+        </p:nvSpPr>
+        <p:spPr>
+          <a:xfrm>
+            <a:off x="457200" y="713232"/>
+            <a:ext cx="11368735" cy="274320"/>
+          </a:xfrm>
+          <a:prstGeom prst="rect">
+            <a:avLst/>
+          </a:prstGeom>
+          <a:noFill/>
+          <a:ln/>
+        </p:spPr>
+        <p:txBody>
+          <a:bodyPr wrap="square" lIns="0" tIns="0" rIns="0" bIns="0" rtlCol="0" anchor="ctr"/>
+          <a:lstStyle/>
+          <a:p>
+            <a:pPr algn="r" indent="0" marL="0">
+              <a:buNone/>
+            </a:pPr>
+            <a:r>
+              <a:rPr lang="en-US" sz="1400" b="1" dirty="0">
+                <a:solidFill>
+                  <a:srgbClr val="1C3F6E"/>
+                </a:solidFill>
+                <a:latin typeface="Calibri" pitchFamily="34" charset="0"/>
+                <a:ea typeface="Calibri" pitchFamily="34" charset="-122"/>
+                <a:cs typeface="Calibri" pitchFamily="34" charset="-120"/>
+              </a:rPr>
+              <a:t>REMEDIATION</a:t>
+            </a:r>
+            <a:endParaRPr lang="en-US" sz="1400" dirty="0"/>
+          </a:p>
+        </p:txBody>
+      </p:sp>
+      <p:pic>
+        <p:nvPicPr>
+          <p:cNvPr id="3" name="Image 0" descr="/home/claude/f4/img/minesec_sheet.png">    </p:cNvPr>
+          <p:cNvPicPr>
+            <a:picLocks noChangeAspect="1"/>
+          </p:cNvPicPr>
+          <p:nvPr/>
+        </p:nvPicPr>
+        <p:blipFill>
+          <a:blip r:embed="rId1"/>
+          <a:stretch>
+            <a:fillRect/>
+          </a:stretch>
+        </p:blipFill>
+        <p:spPr>
+          <a:xfrm>
+            <a:off x="0" y="658368"/>
+            <a:ext cx="2468880" cy="5833872"/>
+          </a:xfrm>
+          <a:prstGeom prst="rect">
+            <a:avLst/>
+          </a:prstGeom>
+        </p:spPr>
+      </p:pic>
+      <p:sp>
+        <p:nvSpPr>
+          <p:cNvPr id="4" name="Text 1"/>
+          <p:cNvSpPr/>
+          <p:nvPr/>
+        </p:nvSpPr>
+        <p:spPr>
+          <a:xfrm>
+            <a:off x="2697480" y="1005840"/>
+            <a:ext cx="9174175" cy="731520"/>
+          </a:xfrm>
+          <a:prstGeom prst="rect">
+            <a:avLst/>
+          </a:prstGeom>
+          <a:noFill/>
+          <a:ln/>
+        </p:spPr>
+        <p:txBody>
+          <a:bodyPr wrap="square" lIns="0" tIns="0" rIns="0" bIns="0" rtlCol="0" anchor="ctr">
+            <a:normAutofit/>
+          </a:bodyPr>
+          <a:lstStyle/>
+          <a:p>
+            <a:pPr algn="ctr" indent="0" marL="0">
+              <a:buNone/>
+            </a:pPr>
+            <a:r>
+              <a:rPr lang="en-US" sz="3600" b="1" dirty="0">
+                <a:solidFill>
+                  <a:srgbClr val="990011"/>
+                </a:solidFill>
+                <a:latin typeface="Times New Roman" pitchFamily="34" charset="0"/>
+                <a:ea typeface="Times New Roman" pitchFamily="34" charset="-122"/>
+                <a:cs typeface="Times New Roman" pitchFamily="34" charset="-120"/>
+              </a:rPr>
+              <a:t>Remediation</a:t>
+            </a:r>
+            <a:endParaRPr lang="en-US" sz="3600" dirty="0"/>
+          </a:p>
+        </p:txBody>
+      </p:sp>
+      <p:sp>
+        <p:nvSpPr>
+          <p:cNvPr id="5" name="Text 2"/>
+          <p:cNvSpPr/>
+          <p:nvPr/>
+        </p:nvSpPr>
+        <p:spPr>
+          <a:xfrm>
+            <a:off x="2697480" y="1783080"/>
+            <a:ext cx="9174175" cy="4663440"/>
+          </a:xfrm>
+          <a:prstGeom prst="rect">
+            <a:avLst/>
+          </a:prstGeom>
+          <a:noFill/>
+          <a:ln/>
+        </p:spPr>
+        <p:txBody>
+          <a:bodyPr wrap="square" lIns="0" tIns="0" rIns="0" bIns="0" rtlCol="0" anchor="t"/>
+          <a:lstStyle/>
+          <a:p>
+            <a:pPr algn="l" indent="0" marL="0">
+              <a:spcAft>
+                <a:spcPts val="800"/>
+              </a:spcAft>
+              <a:buNone/>
+            </a:pPr>
+            <a:r>
+              <a:rPr lang="en-US" sz="4000" b="1" dirty="0">
+                <a:solidFill>
+                  <a:srgbClr val="111111"/>
+                </a:solidFill>
+                <a:latin typeface="Times New Roman" pitchFamily="34" charset="0"/>
+                <a:ea typeface="Times New Roman" pitchFamily="34" charset="-122"/>
+                <a:cs typeface="Times New Roman" pitchFamily="34" charset="-120"/>
+              </a:rPr>
+              <a:t>Fill in the blanks:</a:t>
+            </a:r>
+            <a:endParaRPr lang="en-US" sz="4000" dirty="0"/>
+          </a:p>
+          <a:p>
+            <a:pPr algn="l" marL="342900" indent="-342900">
+              <a:spcAft>
+                <a:spcPts val="800"/>
+              </a:spcAft>
+              <a:buSzPct val="100000"/>
+              <a:buFont typeface="+mj-lt"/>
+              <a:buAutoNum type="arabicPeriod" startAt="1"/>
+            </a:pPr>
+            <a:r>
+              <a:rPr lang="en-US" sz="4000" dirty="0">
+                <a:solidFill>
+                  <a:srgbClr val="111111"/>
+                </a:solidFill>
+                <a:latin typeface="Times New Roman" pitchFamily="34" charset="0"/>
+                <a:ea typeface="Times New Roman" pitchFamily="34" charset="-122"/>
+                <a:cs typeface="Times New Roman" pitchFamily="34" charset="-120"/>
+              </a:rPr>
+              <a:t>During an earthquake, we drop, cover and ______ on.</a:t>
+            </a:r>
+            <a:endParaRPr lang="en-US" sz="4000" dirty="0"/>
+          </a:p>
+          <a:p>
+            <a:pPr algn="l" marL="342900" indent="-342900">
+              <a:spcAft>
+                <a:spcPts val="800"/>
+              </a:spcAft>
+              <a:buSzPct val="100000"/>
+              <a:buFont typeface="+mj-lt"/>
+              <a:buAutoNum type="arabicPeriod" startAt="1"/>
+            </a:pPr>
+            <a:r>
+              <a:rPr lang="en-US" sz="4000" dirty="0">
+                <a:solidFill>
+                  <a:srgbClr val="111111"/>
+                </a:solidFill>
+                <a:latin typeface="Times New Roman" pitchFamily="34" charset="0"/>
+                <a:ea typeface="Times New Roman" pitchFamily="34" charset="-122"/>
+                <a:cs typeface="Times New Roman" pitchFamily="34" charset="-120"/>
+              </a:rPr>
+              <a:t>Leaving a dangerous area is ______.</a:t>
+            </a:r>
+            <a:endParaRPr lang="en-US" sz="4000" dirty="0"/>
+          </a:p>
+          <a:p>
+            <a:pPr algn="l" marL="342900" indent="-342900">
+              <a:spcAft>
+                <a:spcPts val="800"/>
+              </a:spcAft>
+              <a:buSzPct val="100000"/>
+              <a:buFont typeface="+mj-lt"/>
+              <a:buAutoNum type="arabicPeriod" startAt="1"/>
+            </a:pPr>
+            <a:r>
+              <a:rPr lang="en-US" sz="4000" dirty="0">
+                <a:solidFill>
+                  <a:srgbClr val="111111"/>
+                </a:solidFill>
+                <a:latin typeface="Times New Roman" pitchFamily="34" charset="0"/>
+                <a:ea typeface="Times New Roman" pitchFamily="34" charset="-122"/>
+                <a:cs typeface="Times New Roman" pitchFamily="34" charset="-120"/>
+              </a:rPr>
+              <a:t>Scientists watch volcanoes to give ______.</a:t>
+            </a:r>
+            <a:endParaRPr lang="en-US" sz="4000" dirty="0"/>
+          </a:p>
+        </p:txBody>
+      </p:sp>
+      <p:sp>
+        <p:nvSpPr>
+          <p:cNvPr id="25" name="Slide Number Placeholder 0"/>
+          <p:cNvSpPr>
+            <a:spLocks noGrp="1"/>
+          </p:cNvSpPr>
+          <p:nvPr>
+            <p:ph type="sldNum" sz="quarter" idx="4294967295"/>
+          </p:nvPr>
+        </p:nvSpPr>
+        <p:spPr>
+          <a:xfrm>
+            <a:off x="27432" y="91440"/>
+            <a:ext cx="585216" cy="475488"/>
+          </a:xfrm>
+          <a:prstGeom prst="rect">
+            <a:avLst/>
+          </a:prstGeom>
+          <a:extLst>
+            <a:ext uri="{C572A759-6A51-4108-AA02-DFA0A04FC94B}">
+              <ma14:wrappingTextBoxFlag xmlns:ma14="http://schemas.microsoft.com/office/mac/drawingml/2011/main" val="0"/>
+            </a:ext>
+          </a:extLst>
+        </p:spPr>
+        <p:txBody>
+          <a:bodyPr/>
+          <a:lstStyle>
+            <a:lvl1pPr>
+              <a:defRPr sz="2000">
+                <a:solidFill>
+                  <a:srgbClr val="FFFFFF"/>
+                </a:solidFill>
+                <a:latin typeface="Calibri"/>
+                <a:ea typeface="Calibri"/>
+                <a:cs typeface="Calibri"/>
+              </a:defRPr>
+            </a:lvl1pPr>
+          </a:lstStyle>
+          <a:p>
+            <a:pPr algn="ctr"/>
+            <a:fld id="{F7021451-1387-4CA6-816F-3879F97B5CBC}" type="slidenum">
+              <a:rPr b="1" lang="en-US"/>
+              <a:t>51</a:t>
+            </a:fld>
+            <a:endParaRPr lang="en-US"/>
+          </a:p>
+        </p:txBody>
+      </p:sp>
+    </p:spTree>
+  </p:cSld>
+  <p:clrMapOvr>
+    <a:masterClrMapping/>
+  </p:clrMapOvr>
+</p:sld>
+</file>
+
+<file path=ppt/slides/slide52.xml><?xml version="1.0" encoding="utf-8"?>
+<p:sld xmlns:a="http://schemas.openxmlformats.org/drawingml/2006/main" xmlns:r="http://schemas.openxmlformats.org/officeDocument/2006/relationships" xmlns:p="http://schemas.openxmlformats.org/presentationml/2006/main">
+  <p:cSld name="Slide 52">
+    <p:spTree>
+      <p:nvGrpSpPr>
+        <p:cNvPr id="1" name=""/>
+        <p:cNvGrpSpPr/>
+        <p:nvPr/>
+      </p:nvGrpSpPr>
+      <p:grpSpPr>
+        <a:xfrm>
+          <a:off x="0" y="0"/>
+          <a:ext cx="0" cy="0"/>
+          <a:chOff x="0" y="0"/>
+          <a:chExt cx="0" cy="0"/>
+        </a:xfrm>
+      </p:grpSpPr>
+      <p:sp>
+        <p:nvSpPr>
+          <p:cNvPr id="2" name="Text 0"/>
+          <p:cNvSpPr/>
+          <p:nvPr/>
+        </p:nvSpPr>
+        <p:spPr>
+          <a:xfrm>
+            <a:off x="457200" y="713232"/>
+            <a:ext cx="11368735" cy="274320"/>
+          </a:xfrm>
+          <a:prstGeom prst="rect">
+            <a:avLst/>
+          </a:prstGeom>
+          <a:noFill/>
+          <a:ln/>
+        </p:spPr>
+        <p:txBody>
+          <a:bodyPr wrap="square" lIns="0" tIns="0" rIns="0" bIns="0" rtlCol="0" anchor="ctr"/>
+          <a:lstStyle/>
+          <a:p>
+            <a:pPr algn="r" indent="0" marL="0">
+              <a:buNone/>
+            </a:pPr>
+            <a:r>
+              <a:rPr lang="en-US" sz="1400" b="1" dirty="0">
+                <a:solidFill>
+                  <a:srgbClr val="1C3F6E"/>
+                </a:solidFill>
+                <a:latin typeface="Calibri" pitchFamily="34" charset="0"/>
+                <a:ea typeface="Calibri" pitchFamily="34" charset="-122"/>
+                <a:cs typeface="Calibri" pitchFamily="34" charset="-120"/>
+              </a:rPr>
+              <a:t>HOMEWORK</a:t>
+            </a:r>
+            <a:endParaRPr lang="en-US" sz="1400" dirty="0"/>
+          </a:p>
+        </p:txBody>
+      </p:sp>
+      <p:pic>
+        <p:nvPicPr>
+          <p:cNvPr id="3" name="Image 0" descr="/home/claude/f4/img/minesec_sheet.png">    </p:cNvPr>
+          <p:cNvPicPr>
+            <a:picLocks noChangeAspect="1"/>
+          </p:cNvPicPr>
+          <p:nvPr/>
+        </p:nvPicPr>
+        <p:blipFill>
+          <a:blip r:embed="rId1"/>
+          <a:stretch>
+            <a:fillRect/>
+          </a:stretch>
+        </p:blipFill>
+        <p:spPr>
+          <a:xfrm>
+            <a:off x="0" y="658368"/>
+            <a:ext cx="5120640" cy="5833872"/>
+          </a:xfrm>
+          <a:prstGeom prst="rect">
+            <a:avLst/>
+          </a:prstGeom>
+        </p:spPr>
+      </p:pic>
+      <p:sp>
+        <p:nvSpPr>
+          <p:cNvPr id="4" name="Text 1"/>
+          <p:cNvSpPr/>
+          <p:nvPr/>
+        </p:nvSpPr>
+        <p:spPr>
+          <a:xfrm>
+            <a:off x="5349240" y="1005840"/>
+            <a:ext cx="6522415" cy="731520"/>
+          </a:xfrm>
+          <a:prstGeom prst="rect">
+            <a:avLst/>
+          </a:prstGeom>
+          <a:noFill/>
+          <a:ln/>
+        </p:spPr>
+        <p:txBody>
+          <a:bodyPr wrap="square" lIns="0" tIns="0" rIns="0" bIns="0" rtlCol="0" anchor="ctr">
+            <a:normAutofit/>
+          </a:bodyPr>
+          <a:lstStyle/>
+          <a:p>
+            <a:pPr algn="ctr" indent="0" marL="0">
+              <a:buNone/>
+            </a:pPr>
+            <a:r>
+              <a:rPr lang="en-US" sz="3600" b="1" dirty="0">
+                <a:solidFill>
+                  <a:srgbClr val="990011"/>
+                </a:solidFill>
+                <a:latin typeface="Times New Roman" pitchFamily="34" charset="0"/>
+                <a:ea typeface="Times New Roman" pitchFamily="34" charset="-122"/>
+                <a:cs typeface="Times New Roman" pitchFamily="34" charset="-120"/>
+              </a:rPr>
+              <a:t>Homework</a:t>
+            </a:r>
+            <a:endParaRPr lang="en-US" sz="3600" dirty="0"/>
+          </a:p>
+        </p:txBody>
+      </p:sp>
+      <p:sp>
+        <p:nvSpPr>
+          <p:cNvPr id="5" name="Text 2"/>
+          <p:cNvSpPr/>
+          <p:nvPr/>
+        </p:nvSpPr>
+        <p:spPr>
+          <a:xfrm>
+            <a:off x="5349240" y="1783080"/>
+            <a:ext cx="6522415" cy="4663440"/>
+          </a:xfrm>
+          <a:prstGeom prst="rect">
+            <a:avLst/>
+          </a:prstGeom>
+          <a:noFill/>
+          <a:ln/>
+        </p:spPr>
+        <p:txBody>
+          <a:bodyPr wrap="square" lIns="0" tIns="0" rIns="0" bIns="0" rtlCol="0" anchor="t"/>
+          <a:lstStyle/>
+          <a:p>
+            <a:pPr algn="l" indent="0" marL="0">
+              <a:spcAft>
+                <a:spcPts val="800"/>
+              </a:spcAft>
+              <a:buNone/>
+            </a:pPr>
+            <a:r>
+              <a:rPr lang="en-US" sz="4000" dirty="0">
+                <a:solidFill>
+                  <a:srgbClr val="111111"/>
+                </a:solidFill>
+                <a:latin typeface="Times New Roman" pitchFamily="34" charset="0"/>
+                <a:ea typeface="Times New Roman" pitchFamily="34" charset="-122"/>
+                <a:cs typeface="Times New Roman" pitchFamily="34" charset="-120"/>
+              </a:rPr>
+              <a:t>Prepare a list of five items to take in an emergency bag.</a:t>
+            </a:r>
+            <a:endParaRPr lang="en-US" sz="4000" dirty="0"/>
+          </a:p>
+        </p:txBody>
+      </p:sp>
+      <p:sp>
+        <p:nvSpPr>
+          <p:cNvPr id="25" name="Slide Number Placeholder 0"/>
+          <p:cNvSpPr>
+            <a:spLocks noGrp="1"/>
+          </p:cNvSpPr>
+          <p:nvPr>
+            <p:ph type="sldNum" sz="quarter" idx="4294967295"/>
+          </p:nvPr>
+        </p:nvSpPr>
+        <p:spPr>
+          <a:xfrm>
+            <a:off x="27432" y="91440"/>
+            <a:ext cx="585216" cy="475488"/>
+          </a:xfrm>
+          <a:prstGeom prst="rect">
+            <a:avLst/>
+          </a:prstGeom>
+          <a:extLst>
+            <a:ext uri="{C572A759-6A51-4108-AA02-DFA0A04FC94B}">
+              <ma14:wrappingTextBoxFlag xmlns:ma14="http://schemas.microsoft.com/office/mac/drawingml/2011/main" val="0"/>
+            </a:ext>
+          </a:extLst>
+        </p:spPr>
+        <p:txBody>
+          <a:bodyPr/>
+          <a:lstStyle>
+            <a:lvl1pPr>
+              <a:defRPr sz="2000">
+                <a:solidFill>
+                  <a:srgbClr val="FFFFFF"/>
+                </a:solidFill>
+                <a:latin typeface="Calibri"/>
+                <a:ea typeface="Calibri"/>
+                <a:cs typeface="Calibri"/>
+              </a:defRPr>
+            </a:lvl1pPr>
+          </a:lstStyle>
+          <a:p>
+            <a:pPr algn="ctr"/>
+            <a:fld id="{F7021451-1387-4CA6-816F-3879F97B5CBC}" type="slidenum">
+              <a:rPr b="1" lang="en-US"/>
+              <a:t>52</a:t>
+            </a:fld>
+            <a:endParaRPr lang="en-US"/>
+          </a:p>
+        </p:txBody>
+      </p:sp>
+    </p:spTree>
+  </p:cSld>
+  <p:clrMapOvr>
+    <a:masterClrMapping/>
+  </p:clrMapOvr>
+</p:sld>
+</file>
+
+<file path=ppt/slides/slide53.xml><?xml version="1.0" encoding="utf-8"?>
+<p:sld xmlns:a="http://schemas.openxmlformats.org/drawingml/2006/main" xmlns:r="http://schemas.openxmlformats.org/officeDocument/2006/relationships" xmlns:p="http://schemas.openxmlformats.org/presentationml/2006/main">
+  <p:cSld name="Slide 53">
+    <p:spTree>
+      <p:nvGrpSpPr>
+        <p:cNvPr id="1" name=""/>
+        <p:cNvGrpSpPr/>
+        <p:nvPr/>
+      </p:nvGrpSpPr>
+      <p:grpSpPr>
+        <a:xfrm>
+          <a:off x="0" y="0"/>
+          <a:ext cx="0" cy="0"/>
+          <a:chOff x="0" y="0"/>
+          <a:chExt cx="0" cy="0"/>
+        </a:xfrm>
+      </p:grpSpPr>
+      <p:sp>
+        <p:nvSpPr>
+          <p:cNvPr id="2" name="Text 0"/>
+          <p:cNvSpPr/>
+          <p:nvPr/>
+        </p:nvSpPr>
+        <p:spPr>
+          <a:xfrm>
+            <a:off x="457200" y="713232"/>
+            <a:ext cx="11368735" cy="274320"/>
+          </a:xfrm>
+          <a:prstGeom prst="rect">
+            <a:avLst/>
+          </a:prstGeom>
+          <a:noFill/>
+          <a:ln/>
+        </p:spPr>
+        <p:txBody>
+          <a:bodyPr wrap="square" lIns="0" tIns="0" rIns="0" bIns="0" rtlCol="0" anchor="ctr"/>
+          <a:lstStyle/>
+          <a:p>
+            <a:pPr algn="r" indent="0" marL="0">
+              <a:buNone/>
+            </a:pPr>
+            <a:r>
+              <a:rPr lang="en-US" sz="1400" b="1" dirty="0">
+                <a:solidFill>
+                  <a:srgbClr val="1C3F6E"/>
+                </a:solidFill>
+                <a:latin typeface="Calibri" pitchFamily="34" charset="0"/>
+                <a:ea typeface="Calibri" pitchFamily="34" charset="-122"/>
+                <a:cs typeface="Calibri" pitchFamily="34" charset="-120"/>
+              </a:rPr>
               <a:t>BILINGUAL GAME</a:t>
             </a:r>
             <a:endParaRPr lang="en-US" sz="1400" dirty="0"/>
@@ -16656,7 +19040,7 @@
       </p:sp>
       <p:graphicFrame>
         <p:nvGraphicFramePr>
-          <p:cNvPr id="48" name="Table 0"/>
+          <p:cNvPr id="54" name="Table 0"/>
           <p:cNvGraphicFramePr>
             <a:graphicFrameLocks noGrp="1"/>
           </p:cNvGraphicFramePr>
@@ -17692,7 +20076,7 @@
             <a:pPr algn="ctr"/>
             <a:fld id="{F7021451-1387-4CA6-816F-3879F97B5CBC}" type="slidenum">
               <a:rPr b="1" lang="en-US"/>
-              <a:t>47</a:t>
+              <a:t>53</a:t>
             </a:fld>
             <a:endParaRPr lang="en-US"/>
           </a:p>
@@ -17706,9 +20090,9 @@
 </p:sld>
 </file>
 
-<file path=ppt/slides/slide48.xml><?xml version="1.0" encoding="utf-8"?>
+<file path=ppt/slides/slide54.xml><?xml version="1.0" encoding="utf-8"?>
 <p:sld xmlns:a="http://schemas.openxmlformats.org/drawingml/2006/main" xmlns:r="http://schemas.openxmlformats.org/officeDocument/2006/relationships" xmlns:p="http://schemas.openxmlformats.org/presentationml/2006/main">
-  <p:cSld name="Slide 48">
+  <p:cSld name="Slide 54">
     <p:spTree>
       <p:nvGrpSpPr>
         <p:cNvPr id="1" name=""/>
@@ -17803,7 +20187,7 @@
       </p:sp>
       <p:graphicFrame>
         <p:nvGraphicFramePr>
-          <p:cNvPr id="49" name="Table 0"/>
+          <p:cNvPr id="55" name="Table 0"/>
           <p:cNvGraphicFramePr>
             <a:graphicFrameLocks noGrp="1"/>
           </p:cNvGraphicFramePr>
@@ -18425,7 +20809,7 @@
             <a:pPr algn="ctr"/>
             <a:fld id="{F7021451-1387-4CA6-816F-3879F97B5CBC}" type="slidenum">
               <a:rPr b="1" lang="en-US"/>
-              <a:t>48</a:t>
+              <a:t>54</a:t>
             </a:fld>
             <a:endParaRPr lang="en-US"/>
           </a:p>
@@ -18439,9 +20823,9 @@
 </p:sld>
 </file>
 
-<file path=ppt/slides/slide49.xml><?xml version="1.0" encoding="utf-8"?>
+<file path=ppt/slides/slide55.xml><?xml version="1.0" encoding="utf-8"?>
 <p:sld xmlns:a="http://schemas.openxmlformats.org/drawingml/2006/main" xmlns:r="http://schemas.openxmlformats.org/officeDocument/2006/relationships" xmlns:p="http://schemas.openxmlformats.org/presentationml/2006/main">
-  <p:cSld name="Slide 49">
+  <p:cSld name="Slide 55">
     <p:spTree>
       <p:nvGrpSpPr>
         <p:cNvPr id="1" name=""/>
@@ -18536,7 +20920,7 @@
       </p:sp>
       <p:graphicFrame>
         <p:nvGraphicFramePr>
-          <p:cNvPr id="50" name="Table 0"/>
+          <p:cNvPr id="56" name="Table 0"/>
           <p:cNvGraphicFramePr>
             <a:graphicFrameLocks noGrp="1"/>
           </p:cNvGraphicFramePr>
@@ -18646,7 +21030,7 @@
                           <a:ea typeface="Calibri" pitchFamily="34" charset="-122"/>
                           <a:cs typeface="Calibri" pitchFamily="34" charset="-120"/>
                         </a:rPr>
-                        <a:t>What to Do During an Earthquake; What to Do During a Volcanic Eruption; Adaptation and Mitigation Measures.</a:t>
+                        <a:t>DEFINITIONS; What to Do in Case of an Earthquake; What to Do in Case of a Volcanic Eruption; Adaptation and Mitigation Measures.</a:t>
                       </a:r>
                       <a:endParaRPr lang="en-US" sz="1600" dirty="0">
                         <a:latin typeface="Calibri" charset="0"/>
@@ -19296,7 +21680,7 @@
             <a:pPr algn="ctr"/>
             <a:fld id="{F7021451-1387-4CA6-816F-3879F97B5CBC}" type="slidenum">
               <a:rPr b="1" lang="en-US"/>
-              <a:t>49</a:t>
+              <a:t>55</a:t>
             </a:fld>
             <a:endParaRPr lang="en-US"/>
           </a:p>
@@ -19310,9 +21694,9 @@
 </p:sld>
 </file>
 
-<file path=ppt/slides/slide5.xml><?xml version="1.0" encoding="utf-8"?>
+<file path=ppt/slides/slide56.xml><?xml version="1.0" encoding="utf-8"?>
 <p:sld xmlns:a="http://schemas.openxmlformats.org/drawingml/2006/main" xmlns:r="http://schemas.openxmlformats.org/officeDocument/2006/relationships" xmlns:p="http://schemas.openxmlformats.org/presentationml/2006/main">
-  <p:cSld name="Slide 5">
+  <p:cSld name="Slide 56">
     <p:spTree>
       <p:nvGrpSpPr>
         <p:cNvPr id="1" name=""/>
@@ -19360,7 +21744,7 @@
                 <a:ea typeface="Calibri" pitchFamily="34" charset="-122"/>
                 <a:cs typeface="Calibri" pitchFamily="34" charset="-120"/>
               </a:rPr>
-              <a:t>HOMEWORK CORRECTION</a:t>
+              <a:t>TEACHER'S NOTE</a:t>
             </a:r>
             <a:endParaRPr lang="en-US" sz="1400" dirty="0"/>
           </a:p>
@@ -19383,7 +21767,7 @@
         <p:spPr>
           <a:xfrm>
             <a:off x="0" y="658368"/>
-            <a:ext cx="5120640" cy="5833872"/>
+            <a:ext cx="3840480" cy="5833872"/>
           </a:xfrm>
           <a:prstGeom prst="rect">
             <a:avLst/>
@@ -19398,8 +21782,8 @@
         </p:nvSpPr>
         <p:spPr>
           <a:xfrm>
-            <a:off x="5349240" y="1005840"/>
-            <a:ext cx="6522415" cy="731520"/>
+            <a:off x="4069080" y="1005840"/>
+            <a:ext cx="7802575" cy="731520"/>
           </a:xfrm>
           <a:prstGeom prst="rect">
             <a:avLst/>
@@ -19425,7 +21809,7 @@
                 <a:ea typeface="Times New Roman" pitchFamily="34" charset="-122"/>
                 <a:cs typeface="Times New Roman" pitchFamily="34" charset="-120"/>
               </a:rPr>
-              <a:t>Correction: Possible Answer</a:t>
+              <a:t>Teacher's Note</a:t>
             </a:r>
             <a:endParaRPr lang="en-US" sz="3600" dirty="0"/>
           </a:p>
@@ -19439,8 +21823,8 @@
         </p:nvSpPr>
         <p:spPr>
           <a:xfrm>
-            <a:off x="5349240" y="1783080"/>
-            <a:ext cx="6522415" cy="4663440"/>
+            <a:off x="4069080" y="1783080"/>
+            <a:ext cx="7802575" cy="4663440"/>
           </a:xfrm>
           <a:prstGeom prst="rect">
             <a:avLst/>
@@ -19452,24 +21836,130 @@
           <a:bodyPr wrap="square" lIns="0" tIns="0" rIns="0" bIns="0" rtlCol="0" anchor="t"/>
           <a:lstStyle/>
           <a:p>
-            <a:pPr algn="l" indent="0" marL="0">
+            <a:pPr algn="l" marL="342900" indent="-342900">
               <a:spcAft>
                 <a:spcPts val="800"/>
               </a:spcAft>
-              <a:buNone/>
+              <a:buSzPct val="100000"/>
+              <a:buChar char="•"/>
             </a:pPr>
             <a:r>
-              <a:rPr lang="en-US" sz="4000" dirty="0">
+              <a:rPr lang="en-US" sz="2000" dirty="0">
                 <a:solidFill>
                   <a:srgbClr val="111111"/>
                 </a:solidFill>
-                <a:latin typeface="Times New Roman" pitchFamily="34" charset="0"/>
-                <a:ea typeface="Times New Roman" pitchFamily="34" charset="-122"/>
-                <a:cs typeface="Times New Roman" pitchFamily="34" charset="-120"/>
+                <a:latin typeface="Calibri" pitchFamily="34" charset="0"/>
+                <a:ea typeface="Calibri" pitchFamily="34" charset="-122"/>
+                <a:cs typeface="Calibri" pitchFamily="34" charset="-120"/>
               </a:rPr>
-              <a:t>On 21 August 1986, a cloud of carbon dioxide gas came out of Lake Nyos. It flowed down the valleys and killed about 1,700 people and many animals. Today pipes remove the gas from the lake.</a:t>
-            </a:r>
-            <a:endParaRPr lang="en-US" sz="4000" dirty="0"/>
+              <a:t>Timing: Homework correction, plan, objectives 8 min | Recall, situation, action 10 min | 5 activities 30 min | Board summary (copying) 30 min | Evaluation, remediation 10 min | Homework, next lesson 5 min | Logbook 7 min</a:t>
+            </a:r>
+            <a:endParaRPr lang="en-US" sz="2000" dirty="0"/>
+          </a:p>
+          <a:p>
+            <a:pPr algn="l" marL="342900" indent="-342900">
+              <a:spcAft>
+                <a:spcPts val="800"/>
+              </a:spcAft>
+              <a:buSzPct val="100000"/>
+              <a:buChar char="•"/>
+            </a:pPr>
+            <a:r>
+              <a:rPr lang="en-US" sz="2000" dirty="0">
+                <a:solidFill>
+                  <a:srgbClr val="111111"/>
+                </a:solidFill>
+                <a:latin typeface="Calibri" pitchFamily="34" charset="0"/>
+                <a:ea typeface="Calibri" pitchFamily="34" charset="-122"/>
+                <a:cs typeface="Calibri" pitchFamily="34" charset="-120"/>
+              </a:rPr>
+              <a:t>Without the projector (Activity 1): practise "drop, cover, hold on".</a:t>
+            </a:r>
+            <a:endParaRPr lang="en-US" sz="2000" dirty="0"/>
+          </a:p>
+          <a:p>
+            <a:pPr algn="l" marL="342900" indent="-342900">
+              <a:spcAft>
+                <a:spcPts val="800"/>
+              </a:spcAft>
+              <a:buSzPct val="100000"/>
+              <a:buChar char="•"/>
+            </a:pPr>
+            <a:r>
+              <a:rPr lang="en-US" sz="2000" dirty="0">
+                <a:solidFill>
+                  <a:srgbClr val="111111"/>
+                </a:solidFill>
+                <a:latin typeface="Calibri" pitchFamily="34" charset="0"/>
+                <a:ea typeface="Calibri" pitchFamily="34" charset="-122"/>
+                <a:cs typeface="Calibri" pitchFamily="34" charset="-120"/>
+              </a:rPr>
+              <a:t>Without the projector (Activity 2): role-play a rescue.</a:t>
+            </a:r>
+            <a:endParaRPr lang="en-US" sz="2000" dirty="0"/>
+          </a:p>
+          <a:p>
+            <a:pPr algn="l" marL="342900" indent="-342900">
+              <a:spcAft>
+                <a:spcPts val="800"/>
+              </a:spcAft>
+              <a:buSzPct val="100000"/>
+              <a:buChar char="•"/>
+            </a:pPr>
+            <a:r>
+              <a:rPr lang="en-US" sz="2000" dirty="0">
+                <a:solidFill>
+                  <a:srgbClr val="111111"/>
+                </a:solidFill>
+                <a:latin typeface="Calibri" pitchFamily="34" charset="0"/>
+                <a:ea typeface="Calibri" pitchFamily="34" charset="-122"/>
+                <a:cs typeface="Calibri" pitchFamily="34" charset="-120"/>
+              </a:rPr>
+              <a:t>Without the projector (Activity 3): list items to take when leaving.</a:t>
+            </a:r>
+            <a:endParaRPr lang="en-US" sz="2000" dirty="0"/>
+          </a:p>
+          <a:p>
+            <a:pPr algn="l" marL="342900" indent="-342900">
+              <a:spcAft>
+                <a:spcPts val="800"/>
+              </a:spcAft>
+              <a:buSzPct val="100000"/>
+              <a:buChar char="•"/>
+            </a:pPr>
+            <a:r>
+              <a:rPr lang="en-US" sz="2000" dirty="0">
+                <a:solidFill>
+                  <a:srgbClr val="111111"/>
+                </a:solidFill>
+                <a:latin typeface="Calibri" pitchFamily="34" charset="0"/>
+                <a:ea typeface="Calibri" pitchFamily="34" charset="-122"/>
+                <a:cs typeface="Calibri" pitchFamily="34" charset="-120"/>
+              </a:rPr>
+              <a:t>Without the projector (Activity 4): explain monitoring.</a:t>
+            </a:r>
+            <a:endParaRPr lang="en-US" sz="2000" dirty="0"/>
+          </a:p>
+          <a:p>
+            <a:pPr algn="l" marL="342900" indent="-342900">
+              <a:spcAft>
+                <a:spcPts val="800"/>
+              </a:spcAft>
+              <a:buSzPct val="100000"/>
+              <a:buChar char="•"/>
+            </a:pPr>
+            <a:r>
+              <a:rPr lang="en-US" sz="2000" dirty="0">
+                <a:solidFill>
+                  <a:srgbClr val="111111"/>
+                </a:solidFill>
+                <a:latin typeface="Calibri" pitchFamily="34" charset="0"/>
+                <a:ea typeface="Calibri" pitchFamily="34" charset="-122"/>
+                <a:cs typeface="Calibri" pitchFamily="34" charset="-120"/>
+              </a:rPr>
+              <a:t>Without the projector (Activity 5): describe the degassing pipes.</a:t>
+            </a:r>
+            <a:endParaRPr lang="en-US" sz="2000" dirty="0"/>
           </a:p>
         </p:txBody>
       </p:sp>
@@ -19515,7 +22005,7 @@
             <a:pPr algn="ctr"/>
             <a:fld id="{F7021451-1387-4CA6-816F-3879F97B5CBC}" type="slidenum">
               <a:rPr b="1" lang="en-US"/>
-              <a:t>5</a:t>
+              <a:t>56</a:t>
             </a:fld>
             <a:endParaRPr lang="en-US"/>
           </a:p>
@@ -19529,9 +22019,9 @@
 </p:sld>
 </file>
 
-<file path=ppt/slides/slide50.xml><?xml version="1.0" encoding="utf-8"?>
+<file path=ppt/slides/slide57.xml><?xml version="1.0" encoding="utf-8"?>
 <p:sld xmlns:a="http://schemas.openxmlformats.org/drawingml/2006/main" xmlns:r="http://schemas.openxmlformats.org/officeDocument/2006/relationships" xmlns:p="http://schemas.openxmlformats.org/presentationml/2006/main">
-  <p:cSld name="Slide 50">
+  <p:cSld name="Slide 57">
     <p:spTree>
       <p:nvGrpSpPr>
         <p:cNvPr id="1" name=""/>
@@ -19579,7 +22069,7 @@
                 <a:ea typeface="Calibri" pitchFamily="34" charset="-122"/>
                 <a:cs typeface="Calibri" pitchFamily="34" charset="-120"/>
               </a:rPr>
-              <a:t>TEACHER'S NOTE</a:t>
+              <a:t>REFERENCES</a:t>
             </a:r>
             <a:endParaRPr lang="en-US" sz="1400" dirty="0"/>
           </a:p>
@@ -19602,7 +22092,7 @@
         <p:spPr>
           <a:xfrm>
             <a:off x="0" y="658368"/>
-            <a:ext cx="3840480" cy="5833872"/>
+            <a:ext cx="1463040" cy="5833872"/>
           </a:xfrm>
           <a:prstGeom prst="rect">
             <a:avLst/>
@@ -19617,8 +22107,8 @@
         </p:nvSpPr>
         <p:spPr>
           <a:xfrm>
-            <a:off x="4069080" y="1005840"/>
-            <a:ext cx="7802575" cy="731520"/>
+            <a:off x="1691640" y="1005840"/>
+            <a:ext cx="10180015" cy="731520"/>
           </a:xfrm>
           <a:prstGeom prst="rect">
             <a:avLst/>
@@ -19644,7 +22134,7 @@
                 <a:ea typeface="Times New Roman" pitchFamily="34" charset="-122"/>
                 <a:cs typeface="Times New Roman" pitchFamily="34" charset="-120"/>
               </a:rPr>
-              <a:t>Teacher's Note</a:t>
+              <a:t>References</a:t>
             </a:r>
             <a:endParaRPr lang="en-US" sz="3600" dirty="0"/>
           </a:p>
@@ -19658,8 +22148,8 @@
         </p:nvSpPr>
         <p:spPr>
           <a:xfrm>
-            <a:off x="4069080" y="1783080"/>
-            <a:ext cx="7802575" cy="4663440"/>
+            <a:off x="1691640" y="1783080"/>
+            <a:ext cx="10180015" cy="4663440"/>
           </a:xfrm>
           <a:prstGeom prst="rect">
             <a:avLst/>
@@ -19679,7 +22169,7 @@
               <a:buChar char="•"/>
             </a:pPr>
             <a:r>
-              <a:rPr lang="en-US" sz="2000" dirty="0">
+              <a:rPr lang="en-US" sz="1800" dirty="0">
                 <a:solidFill>
                   <a:srgbClr val="111111"/>
                 </a:solidFill>
@@ -19687,9 +22177,9 @@
                 <a:ea typeface="Calibri" pitchFamily="34" charset="-122"/>
                 <a:cs typeface="Calibri" pitchFamily="34" charset="-120"/>
               </a:rPr>
-              <a:t>Timing: Homework correction, plan, objectives 8 min | Recall, situation, action 10 min | 5 activities 30 min | Board summary (copying) 30 min | Evaluation, remediation 10 min | Homework, next lesson 5 min | Logbook 7 min</a:t>
-            </a:r>
-            <a:endParaRPr lang="en-US" sz="2000" dirty="0"/>
+              <a:t>Geography Syllabus, Forms I–V, MINESEC (2023) — Form 1, Module 3: Protection from the Wrath of Nature.</a:t>
+            </a:r>
+            <a:endParaRPr lang="en-US" sz="1800" dirty="0"/>
           </a:p>
           <a:p>
             <a:pPr algn="l" marL="342900" indent="-342900">
@@ -19700,7 +22190,7 @@
               <a:buChar char="•"/>
             </a:pPr>
             <a:r>
-              <a:rPr lang="en-US" sz="2000" dirty="0">
+              <a:rPr lang="en-US" sz="1800" dirty="0">
                 <a:solidFill>
                   <a:srgbClr val="111111"/>
                 </a:solidFill>
@@ -19708,9 +22198,9 @@
                 <a:ea typeface="Calibri" pitchFamily="34" charset="-122"/>
                 <a:cs typeface="Calibri" pitchFamily="34" charset="-120"/>
               </a:rPr>
-              <a:t>Without the projector (Activity 1): practise "drop, cover, hold on".</a:t>
-            </a:r>
-            <a:endParaRPr lang="en-US" sz="2000" dirty="0"/>
+              <a:t>Photo, Activity 1: “Collapsed buildings in earthquake-hit Chautara, Nepal” by DFID - UK Department for International Development, CC BY 2.0, via Flickr (https://www.flickr.com/photos/14214150@N02/16693413433)</a:t>
+            </a:r>
+            <a:endParaRPr lang="en-US" sz="1800" dirty="0"/>
           </a:p>
           <a:p>
             <a:pPr algn="l" marL="342900" indent="-342900">
@@ -19721,7 +22211,7 @@
               <a:buChar char="•"/>
             </a:pPr>
             <a:r>
-              <a:rPr lang="en-US" sz="2000" dirty="0">
+              <a:rPr lang="en-US" sz="1800" dirty="0">
                 <a:solidFill>
                   <a:srgbClr val="111111"/>
                 </a:solidFill>
@@ -19729,9 +22219,9 @@
                 <a:ea typeface="Calibri" pitchFamily="34" charset="-122"/>
                 <a:cs typeface="Calibri" pitchFamily="34" charset="-120"/>
               </a:rPr>
-              <a:t>Without the projector (Activity 2): role-play a rescue.</a:t>
-            </a:r>
-            <a:endParaRPr lang="en-US" sz="2000" dirty="0"/>
+              <a:t>Photo, Activity 2: “160310-F-VO743-004” by Official U.S. Air Force, CC BY-NC 2.0, via Flickr (https://www.flickr.com/photos/39513508@N06/25854674326)</a:t>
+            </a:r>
+            <a:endParaRPr lang="en-US" sz="1800" dirty="0"/>
           </a:p>
           <a:p>
             <a:pPr algn="l" marL="342900" indent="-342900">
@@ -19742,7 +22232,7 @@
               <a:buChar char="•"/>
             </a:pPr>
             <a:r>
-              <a:rPr lang="en-US" sz="2000" dirty="0">
+              <a:rPr lang="en-US" sz="1800" dirty="0">
                 <a:solidFill>
                   <a:srgbClr val="111111"/>
                 </a:solidFill>
@@ -19750,9 +22240,9 @@
                 <a:ea typeface="Calibri" pitchFamily="34" charset="-122"/>
                 <a:cs typeface="Calibri" pitchFamily="34" charset="-120"/>
               </a:rPr>
-              <a:t>Without the projector (Activity 3): list items to take when leaving.</a:t>
-            </a:r>
-            <a:endParaRPr lang="en-US" sz="2000" dirty="0"/>
+              <a:t>Photo, Activity 3: “Happy Anniversary Hawaii” by U.S. Geological Survey, CC0 1.0, via Flickr (https://www.flickr.com/photos/27784370@N05/14802198589)</a:t>
+            </a:r>
+            <a:endParaRPr lang="en-US" sz="1800" dirty="0"/>
           </a:p>
           <a:p>
             <a:pPr algn="l" marL="342900" indent="-342900">
@@ -19763,7 +22253,7 @@
               <a:buChar char="•"/>
             </a:pPr>
             <a:r>
-              <a:rPr lang="en-US" sz="2000" dirty="0">
+              <a:rPr lang="en-US" sz="1800" dirty="0">
                 <a:solidFill>
                   <a:srgbClr val="111111"/>
                 </a:solidFill>
@@ -19771,9 +22261,9 @@
                 <a:ea typeface="Calibri" pitchFamily="34" charset="-122"/>
                 <a:cs typeface="Calibri" pitchFamily="34" charset="-120"/>
               </a:rPr>
-              <a:t>Without the projector (Activity 4): explain monitoring.</a:t>
-            </a:r>
-            <a:endParaRPr lang="en-US" sz="2000" dirty="0"/>
+              <a:t>Photo, Activity 4: “Hawaiian Volcano Observatory, Hawaiʻi Volcanoes National Park, Hawaii” by Ken Lund, CC BY-SA 2.0, via Flickr (https://www.flickr.com/photos/75683070@N00/4528702285)</a:t>
+            </a:r>
+            <a:endParaRPr lang="en-US" sz="1800" dirty="0"/>
           </a:p>
           <a:p>
             <a:pPr algn="l" marL="342900" indent="-342900">
@@ -19784,7 +22274,7 @@
               <a:buChar char="•"/>
             </a:pPr>
             <a:r>
-              <a:rPr lang="en-US" sz="2000" dirty="0">
+              <a:rPr lang="en-US" sz="1800" dirty="0">
                 <a:solidFill>
                   <a:srgbClr val="111111"/>
                 </a:solidFill>
@@ -19792,209 +22282,10 @@
                 <a:ea typeface="Calibri" pitchFamily="34" charset="-122"/>
                 <a:cs typeface="Calibri" pitchFamily="34" charset="-120"/>
               </a:rPr>
-              <a:t>Without the projector (Activity 5): describe the degassing pipes.</a:t>
-            </a:r>
-            <a:endParaRPr lang="en-US" sz="2000" dirty="0"/>
-          </a:p>
-        </p:txBody>
-      </p:sp>
-      <p:sp>
-        <p:nvSpPr>
-          <p:cNvPr id="25" name="Slide Number Placeholder 0"/>
-          <p:cNvSpPr>
-            <a:spLocks noGrp="1"/>
-          </p:cNvSpPr>
-          <p:nvPr>
-            <p:ph type="sldNum" sz="quarter" idx="4294967295"/>
-          </p:nvPr>
-        </p:nvSpPr>
-        <p:spPr>
-          <a:xfrm>
-            <a:off x="27432" y="91440"/>
-            <a:ext cx="585216" cy="475488"/>
-          </a:xfrm>
-          <a:prstGeom prst="rect">
-            <a:avLst/>
-          </a:prstGeom>
-          <a:extLst>
-            <a:ext uri="{C572A759-6A51-4108-AA02-DFA0A04FC94B}">
-              <ma14:wrappingTextBoxFlag xmlns:ma14="http://schemas.microsoft.com/office/mac/drawingml/2011/main" val="0"/>
-            </a:ext>
-          </a:extLst>
-        </p:spPr>
-        <p:txBody>
-          <a:bodyPr/>
-          <a:lstStyle>
-            <a:lvl1pPr>
-              <a:defRPr sz="2000">
-                <a:solidFill>
-                  <a:srgbClr val="FFFFFF"/>
-                </a:solidFill>
-                <a:latin typeface="Calibri"/>
-                <a:ea typeface="Calibri"/>
-                <a:cs typeface="Calibri"/>
-              </a:defRPr>
-            </a:lvl1pPr>
-          </a:lstStyle>
-          <a:p>
-            <a:pPr algn="ctr"/>
-            <a:fld id="{F7021451-1387-4CA6-816F-3879F97B5CBC}" type="slidenum">
-              <a:rPr b="1" lang="en-US"/>
-              <a:t>50</a:t>
-            </a:fld>
-            <a:endParaRPr lang="en-US"/>
-          </a:p>
-        </p:txBody>
-      </p:sp>
-    </p:spTree>
-  </p:cSld>
-  <p:clrMapOvr>
-    <a:masterClrMapping/>
-  </p:clrMapOvr>
-</p:sld>
-</file>
-
-<file path=ppt/slides/slide51.xml><?xml version="1.0" encoding="utf-8"?>
-<p:sld xmlns:a="http://schemas.openxmlformats.org/drawingml/2006/main" xmlns:r="http://schemas.openxmlformats.org/officeDocument/2006/relationships" xmlns:p="http://schemas.openxmlformats.org/presentationml/2006/main">
-  <p:cSld name="Slide 51">
-    <p:spTree>
-      <p:nvGrpSpPr>
-        <p:cNvPr id="1" name=""/>
-        <p:cNvGrpSpPr/>
-        <p:nvPr/>
-      </p:nvGrpSpPr>
-      <p:grpSpPr>
-        <a:xfrm>
-          <a:off x="0" y="0"/>
-          <a:ext cx="0" cy="0"/>
-          <a:chOff x="0" y="0"/>
-          <a:chExt cx="0" cy="0"/>
-        </a:xfrm>
-      </p:grpSpPr>
-      <p:sp>
-        <p:nvSpPr>
-          <p:cNvPr id="2" name="Text 0"/>
-          <p:cNvSpPr/>
-          <p:nvPr/>
-        </p:nvSpPr>
-        <p:spPr>
-          <a:xfrm>
-            <a:off x="457200" y="713232"/>
-            <a:ext cx="11368735" cy="274320"/>
-          </a:xfrm>
-          <a:prstGeom prst="rect">
-            <a:avLst/>
-          </a:prstGeom>
-          <a:noFill/>
-          <a:ln/>
-        </p:spPr>
-        <p:txBody>
-          <a:bodyPr wrap="square" lIns="0" tIns="0" rIns="0" bIns="0" rtlCol="0" anchor="ctr"/>
-          <a:lstStyle/>
-          <a:p>
-            <a:pPr algn="r" indent="0" marL="0">
-              <a:buNone/>
-            </a:pPr>
-            <a:r>
-              <a:rPr lang="en-US" sz="1400" b="1" dirty="0">
-                <a:solidFill>
-                  <a:srgbClr val="1C3F6E"/>
-                </a:solidFill>
-                <a:latin typeface="Calibri" pitchFamily="34" charset="0"/>
-                <a:ea typeface="Calibri" pitchFamily="34" charset="-122"/>
-                <a:cs typeface="Calibri" pitchFamily="34" charset="-120"/>
-              </a:rPr>
-              <a:t>REFERENCES</a:t>
-            </a:r>
-            <a:endParaRPr lang="en-US" sz="1400" dirty="0"/>
-          </a:p>
-        </p:txBody>
-      </p:sp>
-      <p:pic>
-        <p:nvPicPr>
-          <p:cNvPr id="3" name="Image 0" descr="/home/claude/f4/img/minesec_sheet.png">    </p:cNvPr>
-          <p:cNvPicPr>
-            <a:picLocks noChangeAspect="1"/>
-          </p:cNvPicPr>
-          <p:nvPr/>
-        </p:nvPicPr>
-        <p:blipFill>
-          <a:blip r:embed="rId1"/>
-          <a:stretch>
-            <a:fillRect/>
-          </a:stretch>
-        </p:blipFill>
-        <p:spPr>
-          <a:xfrm>
-            <a:off x="0" y="658368"/>
-            <a:ext cx="1463040" cy="5833872"/>
-          </a:xfrm>
-          <a:prstGeom prst="rect">
-            <a:avLst/>
-          </a:prstGeom>
-        </p:spPr>
-      </p:pic>
-      <p:sp>
-        <p:nvSpPr>
-          <p:cNvPr id="4" name="Text 1"/>
-          <p:cNvSpPr/>
-          <p:nvPr/>
-        </p:nvSpPr>
-        <p:spPr>
-          <a:xfrm>
-            <a:off x="1691640" y="1005840"/>
-            <a:ext cx="10180015" cy="731520"/>
-          </a:xfrm>
-          <a:prstGeom prst="rect">
-            <a:avLst/>
-          </a:prstGeom>
-          <a:noFill/>
-          <a:ln/>
-        </p:spPr>
-        <p:txBody>
-          <a:bodyPr wrap="square" lIns="0" tIns="0" rIns="0" bIns="0" rtlCol="0" anchor="ctr">
-            <a:normAutofit/>
-          </a:bodyPr>
-          <a:lstStyle/>
-          <a:p>
-            <a:pPr algn="ctr" indent="0" marL="0">
-              <a:buNone/>
-            </a:pPr>
-            <a:r>
-              <a:rPr lang="en-US" sz="3600" b="1" dirty="0">
-                <a:solidFill>
-                  <a:srgbClr val="990011"/>
-                </a:solidFill>
-                <a:latin typeface="Times New Roman" pitchFamily="34" charset="0"/>
-                <a:ea typeface="Times New Roman" pitchFamily="34" charset="-122"/>
-                <a:cs typeface="Times New Roman" pitchFamily="34" charset="-120"/>
-              </a:rPr>
-              <a:t>References</a:t>
-            </a:r>
-            <a:endParaRPr lang="en-US" sz="3600" dirty="0"/>
-          </a:p>
-        </p:txBody>
-      </p:sp>
-      <p:sp>
-        <p:nvSpPr>
-          <p:cNvPr id="5" name="Text 2"/>
-          <p:cNvSpPr/>
-          <p:nvPr/>
-        </p:nvSpPr>
-        <p:spPr>
-          <a:xfrm>
-            <a:off x="1691640" y="1783080"/>
-            <a:ext cx="10180015" cy="4663440"/>
-          </a:xfrm>
-          <a:prstGeom prst="rect">
-            <a:avLst/>
-          </a:prstGeom>
-          <a:noFill/>
-          <a:ln/>
-        </p:spPr>
-        <p:txBody>
-          <a:bodyPr wrap="square" lIns="0" tIns="0" rIns="0" bIns="0" rtlCol="0" anchor="t"/>
-          <a:lstStyle/>
+              <a:t>Photo, Activity 5: “Lake Nyos, Cameroon” by jbdodane, CC BY-NC 2.0, via Flickr (https://www.flickr.com/photos/27998473@N02/11584073056)</a:t>
+            </a:r>
+            <a:endParaRPr lang="en-US" sz="1800" dirty="0"/>
+          </a:p>
           <a:p>
             <a:pPr algn="l" marL="342900" indent="-342900">
               <a:spcAft>
@@ -20012,132 +22303,6 @@
                 <a:ea typeface="Calibri" pitchFamily="34" charset="-122"/>
                 <a:cs typeface="Calibri" pitchFamily="34" charset="-120"/>
               </a:rPr>
-              <a:t>Geography Syllabus, Forms I–V, MINESEC (2023) — Form 1, Module 3: Protection from the Wrath of Nature.</a:t>
-            </a:r>
-            <a:endParaRPr lang="en-US" sz="1800" dirty="0"/>
-          </a:p>
-          <a:p>
-            <a:pPr algn="l" marL="342900" indent="-342900">
-              <a:spcAft>
-                <a:spcPts val="800"/>
-              </a:spcAft>
-              <a:buSzPct val="100000"/>
-              <a:buChar char="•"/>
-            </a:pPr>
-            <a:r>
-              <a:rPr lang="en-US" sz="1800" dirty="0">
-                <a:solidFill>
-                  <a:srgbClr val="111111"/>
-                </a:solidFill>
-                <a:latin typeface="Calibri" pitchFamily="34" charset="0"/>
-                <a:ea typeface="Calibri" pitchFamily="34" charset="-122"/>
-                <a:cs typeface="Calibri" pitchFamily="34" charset="-120"/>
-              </a:rPr>
-              <a:t>Photo, Activity 1: “Collapsed buildings in earthquake-hit Chautara, Nepal” by DFID - UK Department for International Development, CC BY 2.0, via Flickr (https://www.flickr.com/photos/14214150@N02/16693413433)</a:t>
-            </a:r>
-            <a:endParaRPr lang="en-US" sz="1800" dirty="0"/>
-          </a:p>
-          <a:p>
-            <a:pPr algn="l" marL="342900" indent="-342900">
-              <a:spcAft>
-                <a:spcPts val="800"/>
-              </a:spcAft>
-              <a:buSzPct val="100000"/>
-              <a:buChar char="•"/>
-            </a:pPr>
-            <a:r>
-              <a:rPr lang="en-US" sz="1800" dirty="0">
-                <a:solidFill>
-                  <a:srgbClr val="111111"/>
-                </a:solidFill>
-                <a:latin typeface="Calibri" pitchFamily="34" charset="0"/>
-                <a:ea typeface="Calibri" pitchFamily="34" charset="-122"/>
-                <a:cs typeface="Calibri" pitchFamily="34" charset="-120"/>
-              </a:rPr>
-              <a:t>Photo, Activity 2: “160310-F-VO743-004” by Official U.S. Air Force, CC BY-NC 2.0, via Flickr (https://www.flickr.com/photos/39513508@N06/25854674326)</a:t>
-            </a:r>
-            <a:endParaRPr lang="en-US" sz="1800" dirty="0"/>
-          </a:p>
-          <a:p>
-            <a:pPr algn="l" marL="342900" indent="-342900">
-              <a:spcAft>
-                <a:spcPts val="800"/>
-              </a:spcAft>
-              <a:buSzPct val="100000"/>
-              <a:buChar char="•"/>
-            </a:pPr>
-            <a:r>
-              <a:rPr lang="en-US" sz="1800" dirty="0">
-                <a:solidFill>
-                  <a:srgbClr val="111111"/>
-                </a:solidFill>
-                <a:latin typeface="Calibri" pitchFamily="34" charset="0"/>
-                <a:ea typeface="Calibri" pitchFamily="34" charset="-122"/>
-                <a:cs typeface="Calibri" pitchFamily="34" charset="-120"/>
-              </a:rPr>
-              <a:t>Photo, Activity 3: “Happy Anniversary Hawaii” by U.S. Geological Survey, CC0 1.0, via Flickr (https://www.flickr.com/photos/27784370@N05/14802198589)</a:t>
-            </a:r>
-            <a:endParaRPr lang="en-US" sz="1800" dirty="0"/>
-          </a:p>
-          <a:p>
-            <a:pPr algn="l" marL="342900" indent="-342900">
-              <a:spcAft>
-                <a:spcPts val="800"/>
-              </a:spcAft>
-              <a:buSzPct val="100000"/>
-              <a:buChar char="•"/>
-            </a:pPr>
-            <a:r>
-              <a:rPr lang="en-US" sz="1800" dirty="0">
-                <a:solidFill>
-                  <a:srgbClr val="111111"/>
-                </a:solidFill>
-                <a:latin typeface="Calibri" pitchFamily="34" charset="0"/>
-                <a:ea typeface="Calibri" pitchFamily="34" charset="-122"/>
-                <a:cs typeface="Calibri" pitchFamily="34" charset="-120"/>
-              </a:rPr>
-              <a:t>Photo, Activity 4: “Hawaiian Volcano Observatory, Hawaiʻi Volcanoes National Park, Hawaii” by Ken Lund, CC BY-SA 2.0, via Flickr (https://www.flickr.com/photos/75683070@N00/4528702285)</a:t>
-            </a:r>
-            <a:endParaRPr lang="en-US" sz="1800" dirty="0"/>
-          </a:p>
-          <a:p>
-            <a:pPr algn="l" marL="342900" indent="-342900">
-              <a:spcAft>
-                <a:spcPts val="800"/>
-              </a:spcAft>
-              <a:buSzPct val="100000"/>
-              <a:buChar char="•"/>
-            </a:pPr>
-            <a:r>
-              <a:rPr lang="en-US" sz="1800" dirty="0">
-                <a:solidFill>
-                  <a:srgbClr val="111111"/>
-                </a:solidFill>
-                <a:latin typeface="Calibri" pitchFamily="34" charset="0"/>
-                <a:ea typeface="Calibri" pitchFamily="34" charset="-122"/>
-                <a:cs typeface="Calibri" pitchFamily="34" charset="-120"/>
-              </a:rPr>
-              <a:t>Photo, Activity 5: “Lake Nyos, Cameroon” by jbdodane, CC BY-NC 2.0, via Flickr (https://www.flickr.com/photos/27998473@N02/11584073056)</a:t>
-            </a:r>
-            <a:endParaRPr lang="en-US" sz="1800" dirty="0"/>
-          </a:p>
-          <a:p>
-            <a:pPr algn="l" marL="342900" indent="-342900">
-              <a:spcAft>
-                <a:spcPts val="800"/>
-              </a:spcAft>
-              <a:buSzPct val="100000"/>
-              <a:buChar char="•"/>
-            </a:pPr>
-            <a:r>
-              <a:rPr lang="en-US" sz="1800" dirty="0">
-                <a:solidFill>
-                  <a:srgbClr val="111111"/>
-                </a:solidFill>
-                <a:latin typeface="Calibri" pitchFamily="34" charset="0"/>
-                <a:ea typeface="Calibri" pitchFamily="34" charset="-122"/>
-                <a:cs typeface="Calibri" pitchFamily="34" charset="-120"/>
-              </a:rPr>
               <a:t>Diagrams and animations: drawn for this lesson (Geography Department).</a:t>
             </a:r>
             <a:endParaRPr lang="en-US" sz="1800" dirty="0"/>
@@ -20186,7 +22351,7 @@
             <a:pPr algn="ctr"/>
             <a:fld id="{F7021451-1387-4CA6-816F-3879F97B5CBC}" type="slidenum">
               <a:rPr b="1" lang="en-US"/>
-              <a:t>51</a:t>
+              <a:t>57</a:t>
             </a:fld>
             <a:endParaRPr lang="en-US"/>
           </a:p>

--- a/lecons/F1/22_F1_M3_FS02_What_to_Do_in_Case_of_an_Earthquake_or_a_Volcanic_Eruption.pptx
+++ b/lecons/F1/22_F1_M3_FS02_What_to_Do_in_Case_of_an_Earthquake_or_a_Volcanic_Eruption.pptx
@@ -13777,7 +13777,7 @@
               <a:buNone/>
             </a:pPr>
             <a:r>
-              <a:rPr lang="en-US" sz="4000" b="1" dirty="0">
+              <a:rPr lang="en-US" sz="3200" b="1" dirty="0">
                 <a:solidFill>
                   <a:srgbClr val="111111"/>
                 </a:solidFill>
@@ -13787,7 +13787,7 @@
               </a:rPr>
               <a:t>Topic: Protection against the Wrath of Nature</a:t>
             </a:r>
-            <a:endParaRPr lang="en-US" sz="4000" dirty="0"/>
+            <a:endParaRPr lang="en-US" sz="3200" dirty="0"/>
           </a:p>
           <a:p>
             <a:pPr algn="l" indent="0" marL="0">
@@ -13797,7 +13797,7 @@
               <a:buNone/>
             </a:pPr>
             <a:r>
-              <a:rPr lang="en-US" sz="4000" b="1" dirty="0">
+              <a:rPr lang="en-US" sz="3200" b="1" dirty="0">
                 <a:solidFill>
                   <a:srgbClr val="111111"/>
                 </a:solidFill>
@@ -13807,7 +13807,7 @@
               </a:rPr>
               <a:t>Sub-topic: Movements of the Earth's Crust</a:t>
             </a:r>
-            <a:endParaRPr lang="en-US" sz="4000" dirty="0"/>
+            <a:endParaRPr lang="en-US" sz="3200" dirty="0"/>
           </a:p>
           <a:p>
             <a:pPr algn="l" indent="0" marL="0">
@@ -13817,7 +13817,7 @@
               <a:buNone/>
             </a:pPr>
             <a:r>
-              <a:rPr lang="en-US" sz="4000" b="1" dirty="0">
+              <a:rPr lang="en-US" sz="3200" b="1" dirty="0">
                 <a:solidFill>
                   <a:srgbClr val="990011"/>
                 </a:solidFill>
@@ -13827,7 +13827,7 @@
               </a:rPr>
               <a:t>Further Study 2: What to Do in Case of an Earthquake or a Volcanic Eruption</a:t>
             </a:r>
-            <a:endParaRPr lang="en-US" sz="4000" dirty="0"/>
+            <a:endParaRPr lang="en-US" sz="3200" dirty="0"/>
           </a:p>
         </p:txBody>
       </p:sp>

--- a/lecons/F1/22_F1_M3_FS02_What_to_Do_in_Case_of_an_Earthquake_or_a_Volcanic_Eruption.pptx
+++ b/lecons/F1/22_F1_M3_FS02_What_to_Do_in_Case_of_an_Earthquake_or_a_Volcanic_Eruption.pptx
@@ -3462,7 +3462,7 @@
           <a:p>
             <a:r>
               <a:rPr lang="en-US" dirty="0"/>
-              <a:t>Before we start the new lesson, let us correct the homework I gave you at the end of Lesson 13: Consequences of the Instability of the Earth's Crust. The question was: Find out what happened at Lake Nyos in 1986 and write three sentences about it. Take out your exercise books.</a:t>
+              <a:t>Before we start the new lesson, let us correct the homework I gave you at the end of Lesson 13: Consequences of the Instability of the Earth's Crust. The question was: Give one rule to follow during an earthquake. Take out your exercise books.</a:t>
             </a:r>
             <a:endParaRPr lang="en-US" dirty="0"/>
           </a:p>
@@ -4430,7 +4430,7 @@
           <a:p>
             <a:r>
               <a:rPr lang="en-US" dirty="0"/>
-              <a:t>Here is a good answer. On 21 August 1986, a cloud of carbon dioxide gas came out of Lake Nyos. It flowed down the valleys and killed about 1,700 people and many animals. Today pipes remove the gas from the lake. Compare it with your own answer and correct your work in red.</a:t>
+              <a:t>Here is a good answer. Take cover under a strong table and protect your head (or go outside, away from buildings). Compare it with your own answer and correct your work in red.</a:t>
             </a:r>
             <a:endParaRPr lang="en-US" dirty="0"/>
           </a:p>
@@ -4694,7 +4694,7 @@
           <a:p>
             <a:r>
               <a:rPr lang="en-US" dirty="0"/>
-              <a:t>For your homework: Prepare a list of five items to take in an emergency bag. We shall correct it at the beginning of our next lesson.</a:t>
+              <a:t>For your homework: List three items of an emergency bag. We shall correct it at the beginning of our next lesson.</a:t>
             </a:r>
             <a:endParaRPr lang="en-US" dirty="0"/>
           </a:p>
@@ -15399,7 +15399,7 @@
                 <a:ea typeface="Times New Roman" pitchFamily="34" charset="-122"/>
                 <a:cs typeface="Times New Roman" pitchFamily="34" charset="-120"/>
               </a:rPr>
-              <a:t>Find out what happened at Lake Nyos in 1986 and write three sentences about it.</a:t>
+              <a:t>Give one rule to follow during an earthquake.</a:t>
             </a:r>
             <a:endParaRPr lang="en-US" sz="4000" dirty="0"/>
           </a:p>
@@ -18158,7 +18158,7 @@
                 <a:ea typeface="Times New Roman" pitchFamily="34" charset="-122"/>
                 <a:cs typeface="Times New Roman" pitchFamily="34" charset="-120"/>
               </a:rPr>
-              <a:t>On 21 August 1986, a cloud of carbon dioxide gas came out of Lake Nyos. It flowed down the valleys and killed about 1,700 people and many animals. Today pipes remove the gas from the lake.</a:t>
+              <a:t>Take cover under a strong table and protect your head (or go outside, away from buildings).</a:t>
             </a:r>
             <a:endParaRPr lang="en-US" sz="4000" dirty="0"/>
           </a:p>
@@ -18881,7 +18881,7 @@
                 <a:ea typeface="Times New Roman" pitchFamily="34" charset="-122"/>
                 <a:cs typeface="Times New Roman" pitchFamily="34" charset="-120"/>
               </a:rPr>
-              <a:t>Prepare a list of five items to take in an emergency bag.</a:t>
+              <a:t>List three items of an emergency bag.</a:t>
             </a:r>
             <a:endParaRPr lang="en-US" sz="4000" dirty="0"/>
           </a:p>
@@ -21306,7 +21306,7 @@
                           <a:ea typeface="Calibri" pitchFamily="34" charset="-122"/>
                           <a:cs typeface="Calibri" pitchFamily="34" charset="-120"/>
                         </a:rPr>
-                        <a:t>Prepare a list of five items to take in an emergency bag.</a:t>
+                        <a:t>List three items of an emergency bag.</a:t>
                       </a:r>
                       <a:endParaRPr lang="en-US" sz="1600" dirty="0">
                         <a:latin typeface="Calibri" charset="0"/>
